--- a/data-architecture/Student_Data_Architecture.pptx
+++ b/data-architecture/Student_Data_Architecture.pptx
@@ -15,9 +15,10 @@
     <p:sldId id="263" r:id="rId9"/>
     <p:sldId id="264" r:id="rId10"/>
     <p:sldId id="265" r:id="rId11"/>
+    <p:sldId id="266" r:id="rId12"/>
   </p:sldIdLst>
   <p:notesMasterIdLst>
-    <p:notesMasterId r:id="rId12"/>
+    <p:notesMasterId r:id="rId13"/>
   </p:notesMasterIdLst>
   <p:sldSz cx="12192000" cy="6858000"/>
   <p:notesSz cx="6858000" cy="12192000"/>
@@ -116,34 +117,35 @@
   <p:extLst>
     <p:ext uri="{521415D9-36F7-43E2-AB2F-B90AF26B5E84}">
       <p14:sectionLst xmlns:p14="http://schemas.microsoft.com/office/powerpoint/2010/main">
-        <p14:section name="Introduction" id="{101b2195-5f29-d68e-aec7-baaf10beef1c}">
+        <p14:section name="Introduction" id="{69581321-b14c-99f0-f8ee-a81c3704e6f4}">
           <p14:sldIdLst>
             <p14:sldId id="256"/>
             <p14:sldId id="257"/>
             <p14:sldId id="258"/>
           </p14:sldIdLst>
         </p14:section>
-        <p14:section name="Architecture" id="{4ea2ade6-043d-a7c2-4fb8-ffa9d158f613}">
+        <p14:section name="Architecture" id="{907b126d-bac7-4c1d-6285-5a1442d41afb}">
           <p14:sldIdLst>
             <p14:sldId id="259"/>
             <p14:sldId id="260"/>
+            <p14:sldId id="261"/>
           </p14:sldIdLst>
         </p14:section>
-        <p14:section name="Data flows" id="{5faf0ac0-a51d-2605-596c-013b3214496f}">
+        <p14:section name="Data flows" id="{0edaeceb-ff6f-a509-2ce3-82716281a386}">
           <p14:sldIdLst>
-            <p14:sldId id="261"/>
             <p14:sldId id="262"/>
+            <p14:sldId id="263"/>
           </p14:sldIdLst>
         </p14:section>
-        <p14:section name="Findings" id="{29598236-9583-2d3d-1d34-5b4a656c82e9}">
+        <p14:section name="Findings" id="{5f2cd613-6e9e-0d45-c9ec-0527c3580713}">
           <p14:sldIdLst>
-            <p14:sldId id="263"/>
             <p14:sldId id="264"/>
+            <p14:sldId id="265"/>
           </p14:sldIdLst>
         </p14:section>
-        <p14:section name="Next steps" id="{65179658-d4df-0577-b1b6-d747fbb6cdd9}">
+        <p14:section name="Next steps" id="{fac824a9-2c33-fa11-bae0-7df4a1f800c4}">
           <p14:sldIdLst>
-            <p14:sldId id="265"/>
+            <p14:sldId id="266"/>
           </p14:sldIdLst>
         </p14:section>
       </p14:sectionLst>
@@ -680,6 +682,94 @@
 </p:notes>
 </file>
 
+<file path=ppt/notesSlides/notesSlide11.xml><?xml version="1.0" encoding="utf-8"?>
+<p:notes xmlns:a="http://schemas.openxmlformats.org/drawingml/2006/main" xmlns:r="http://schemas.openxmlformats.org/officeDocument/2006/relationships" xmlns:p="http://schemas.openxmlformats.org/presentationml/2006/main">
+  <p:cSld>
+    <p:spTree>
+      <p:nvGrpSpPr>
+        <p:cNvPr id="1" name=""/>
+        <p:cNvGrpSpPr/>
+        <p:nvPr/>
+      </p:nvGrpSpPr>
+      <p:grpSpPr>
+        <a:xfrm>
+          <a:off x="0" y="0"/>
+          <a:ext cx="0" cy="0"/>
+          <a:chOff x="0" y="0"/>
+          <a:chExt cx="0" cy="0"/>
+        </a:xfrm>
+      </p:grpSpPr>
+      <p:sp>
+        <p:nvSpPr>
+          <p:cNvPr id="2" name="Slide Image Placeholder 1"/>
+          <p:cNvSpPr>
+            <a:spLocks noGrp="1" noRot="1" noChangeAspect="1"/>
+          </p:cNvSpPr>
+          <p:nvPr>
+            <p:ph type="sldImg"/>
+          </p:nvPr>
+        </p:nvSpPr>
+        <p:spPr/>
+      </p:sp>
+      <p:sp>
+        <p:nvSpPr>
+          <p:cNvPr id="3" name="Notes Placeholder 2"/>
+          <p:cNvSpPr>
+            <a:spLocks noGrp="1"/>
+          </p:cNvSpPr>
+          <p:nvPr>
+            <p:ph type="body" idx="1"/>
+          </p:nvPr>
+        </p:nvSpPr>
+        <p:spPr/>
+        <p:txBody>
+          <a:bodyPr/>
+          <a:lstStyle/>
+          <a:p>
+            <a:r>
+              <a:rPr lang="en-US" dirty="0"/>
+              <a:t/>
+            </a:r>
+            <a:endParaRPr lang="en-US" dirty="0"/>
+          </a:p>
+        </p:txBody>
+      </p:sp>
+      <p:sp>
+        <p:nvSpPr>
+          <p:cNvPr id="4" name="Slide Number Placeholder 3"/>
+          <p:cNvSpPr>
+            <a:spLocks noGrp="1"/>
+          </p:cNvSpPr>
+          <p:nvPr>
+            <p:ph type="sldNum" sz="quarter" idx="10"/>
+          </p:nvPr>
+        </p:nvSpPr>
+        <p:spPr/>
+        <p:txBody>
+          <a:bodyPr/>
+          <a:lstStyle/>
+          <a:p>
+            <a:fld id="{F7021451-1387-4CA6-816F-3879F97B5CBC}" type="slidenum">
+              <a:rPr lang="en-US"/>
+              <a:t>11</a:t>
+            </a:fld>
+            <a:endParaRPr lang="en-US"/>
+          </a:p>
+        </p:txBody>
+      </p:sp>
+    </p:spTree>
+    <p:extLst>
+      <p:ext uri="{BB962C8B-B14F-4D97-AF65-F5344CB8AC3E}">
+        <p14:creationId xmlns:p14="http://schemas.microsoft.com/office/powerpoint/2010/main" val="1024086991"/>
+      </p:ext>
+    </p:extLst>
+  </p:cSld>
+  <p:clrMapOvr>
+    <a:masterClrMapping/>
+  </p:clrMapOvr>
+</p:notes>
+</file>
+
 <file path=ppt/notesSlides/notesSlide2.xml><?xml version="1.0" encoding="utf-8"?>
 <p:notes xmlns:a="http://schemas.openxmlformats.org/drawingml/2006/main" xmlns:r="http://schemas.openxmlformats.org/officeDocument/2006/relationships" xmlns:p="http://schemas.openxmlformats.org/presentationml/2006/main">
   <p:cSld>
@@ -990,7 +1080,7 @@
           <a:p>
             <a:r>
               <a:rPr lang="en-US" dirty="0"/>
-              <a:t>UnitE pushes data out automatically to most systems (indigo). The amber lines are where data comes back into UnitE by hand: from Enquirer, Bursary, the Student Portal and FVC Portal, from iTrent for staff starters/leavers, and from manual forms. Onefile also receives its learner data by hand.</a:t>
+              <a:t>Simplified from the Student System group in the Lucid working file (1 Oct 2026). Some links are left out for readability, for example UnitE to FVC Portal and iTrent to UnitE; they remain in the detailed map. Editable version: https://lucid.app/lucidchart/a267d6e5-4997-41db-a995-88c7c970fb20/edit</a:t>
             </a:r>
             <a:endParaRPr lang="en-US" dirty="0"/>
           </a:p>
@@ -1078,7 +1168,7 @@
           <a:p>
             <a:r>
               <a:rPr lang="en-US" dirty="0"/>
-              <a:t>This is the same architecture seen from the student's point of view. UnitE (highlighted) is where the student officially becomes a student; before that, data lives in the website, CRM and Enquirer.</a:t>
+              <a:t>UnitE pushes data out automatically to most systems (indigo). The amber lines are where data comes back into UnitE by hand: from Enquirer, Bursary, the Student Portal and FVC Portal, from iTrent for staff starters/leavers, and from manual forms. Onefile also receives its learner data by hand.</a:t>
             </a:r>
             <a:endParaRPr lang="en-US" dirty="0"/>
           </a:p>
@@ -1166,7 +1256,7 @@
           <a:p>
             <a:r>
               <a:rPr lang="en-US" dirty="0"/>
-              <a:t>This is the Intelligence Report part of the Lucid map. The connector is the one controlled route into Power BI. Feeds that bypass it are candidates to bring onto the connector.</a:t>
+              <a:t>This is the same architecture seen from the student's point of view. UnitE (highlighted) is where the student officially becomes a student; before that, data lives in the website, CRM and Enquirer.</a:t>
             </a:r>
             <a:endParaRPr lang="en-US" dirty="0"/>
           </a:p>
@@ -1254,7 +1344,7 @@
           <a:p>
             <a:r>
               <a:rPr lang="en-US" dirty="0"/>
-              <a:t>Each row is a dashed line in the Lucid map. Not all of these need automating; the aim is to agree which ones cost the most time or risk.</a:t>
+              <a:t>This is the Intelligence Report part of the Lucid map. The connector is the one controlled route into Power BI. Feeds that bypass it are candidates to bring onto the connector.</a:t>
             </a:r>
             <a:endParaRPr lang="en-US" dirty="0"/>
           </a:p>
@@ -1342,7 +1432,7 @@
           <a:p>
             <a:r>
               <a:rPr lang="en-US" dirty="0"/>
-              <a:t/>
+              <a:t>Each row is a dashed line in the Lucid map. Not all of these need automating; the aim is to agree which ones cost the most time or risk.</a:t>
             </a:r>
             <a:endParaRPr lang="en-US" dirty="0"/>
           </a:p>
@@ -2239,7 +2329,7 @@
                   <a:schemeClr val="tx2"/>
                 </a:solidFill>
               </a:rPr>
-              <a:t>Proposed next steps</a:t>
+              <a:t>Four things to take away</a:t>
             </a:r>
             <a:endParaRPr lang="en-US" sz="3200" dirty="0"/>
           </a:p>
@@ -2277,7 +2367,7 @@
                   <a:schemeClr val="tx1"/>
                 </a:solidFill>
               </a:rPr>
-              <a:t>For discussion with Sarah, Lyndsay and Lesley</a:t>
+              <a:t>What the map tells us about how our data works today</a:t>
             </a:r>
             <a:endParaRPr lang="en-US" sz="1500" dirty="0"/>
           </a:p>
@@ -2285,14 +2375,41 @@
       </p:sp>
       <p:sp>
         <p:nvSpPr>
-          <p:cNvPr id="4" name="step dot 1"/>
-          <p:cNvSpPr/>
-          <p:nvPr/>
-        </p:nvSpPr>
-        <p:spPr>
-          <a:xfrm>
-            <a:off x="1527048" y="1783080"/>
-            <a:ext cx="640080" cy="640080"/>
+          <p:cNvPr id="4" name="message card 1"/>
+          <p:cNvSpPr/>
+          <p:nvPr/>
+        </p:nvSpPr>
+        <p:spPr>
+          <a:xfrm>
+            <a:off x="548640" y="1691640"/>
+            <a:ext cx="5394960" cy="2011680"/>
+          </a:xfrm>
+          <a:prstGeom prst="roundRect">
+            <a:avLst>
+              <a:gd name="adj" fmla="val 4545"/>
+            </a:avLst>
+          </a:prstGeom>
+          <a:solidFill>
+            <a:schemeClr val="bg2"/>
+          </a:solidFill>
+          <a:ln w="12700">
+            <a:solidFill>
+              <a:schemeClr val="bg2"/>
+            </a:solidFill>
+            <a:prstDash val="solid"/>
+          </a:ln>
+        </p:spPr>
+      </p:sp>
+      <p:sp>
+        <p:nvSpPr>
+          <p:cNvPr id="5" name="message dot 1"/>
+          <p:cNvSpPr/>
+          <p:nvPr/>
+        </p:nvSpPr>
+        <p:spPr>
+          <a:xfrm>
+            <a:off x="822960" y="1984248"/>
+            <a:ext cx="457200" cy="457200"/>
           </a:xfrm>
           <a:prstGeom prst="ellipse">
             <a:avLst/>
@@ -2310,14 +2427,14 @@
       </p:sp>
       <p:sp>
         <p:nvSpPr>
-          <p:cNvPr id="5" name="Text 3"/>
+          <p:cNvPr id="6" name="Text 4"/>
           <p:cNvSpPr txBox="1"/>
           <p:nvPr/>
         </p:nvSpPr>
         <p:spPr>
           <a:xfrm>
-            <a:off x="1527048" y="1783080"/>
-            <a:ext cx="640080" cy="640080"/>
+            <a:off x="822960" y="1984248"/>
+            <a:ext cx="457200" cy="457200"/>
           </a:xfrm>
           <a:prstGeom prst="rect">
             <a:avLst/>
@@ -2333,54 +2450,103 @@
               <a:buNone/>
             </a:pPr>
             <a:r>
-              <a:rPr lang="en-US" sz="2000" b="1" dirty="0">
+              <a:rPr lang="en-US" sz="1500" b="1" dirty="0">
                 <a:solidFill>
                   <a:schemeClr val="bg1"/>
                 </a:solidFill>
               </a:rPr>
               <a:t>1</a:t>
             </a:r>
-            <a:endParaRPr lang="en-US" sz="2000" dirty="0"/>
-          </a:p>
-        </p:txBody>
-      </p:sp>
-      <p:sp>
-        <p:nvSpPr>
-          <p:cNvPr id="6" name="Shape 4"/>
-          <p:cNvSpPr/>
-          <p:nvPr/>
-        </p:nvSpPr>
-        <p:spPr>
-          <a:xfrm>
-            <a:off x="2240280" y="2103120"/>
-            <a:ext cx="2176272" cy="0"/>
-          </a:xfrm>
-          <a:prstGeom prst="line">
-            <a:avLst/>
-          </a:prstGeom>
-          <a:noFill/>
-          <a:ln w="25400">
-            <a:solidFill>
-              <a:schemeClr val="accent5"/>
-            </a:solidFill>
-            <a:prstDash val="solid"/>
-          </a:ln>
-        </p:spPr>
-      </p:sp>
-      <p:sp>
-        <p:nvSpPr>
-          <p:cNvPr id="7" name="step card 1"/>
-          <p:cNvSpPr/>
-          <p:nvPr/>
-        </p:nvSpPr>
-        <p:spPr>
-          <a:xfrm>
-            <a:off x="548640" y="2651760"/>
-            <a:ext cx="2606040" cy="1920240"/>
+            <a:endParaRPr lang="en-US" sz="1500" dirty="0"/>
+          </a:p>
+        </p:txBody>
+      </p:sp>
+      <p:sp>
+        <p:nvSpPr>
+          <p:cNvPr id="7" name="Text 5"/>
+          <p:cNvSpPr txBox="1"/>
+          <p:nvPr/>
+        </p:nvSpPr>
+        <p:spPr>
+          <a:xfrm>
+            <a:off x="1463040" y="1965960"/>
+            <a:ext cx="4297680" cy="502920"/>
+          </a:xfrm>
+          <a:prstGeom prst="rect">
+            <a:avLst/>
+          </a:prstGeom>
+          <a:noFill/>
+          <a:ln/>
+        </p:spPr>
+        <p:txBody>
+          <a:bodyPr wrap="square" lIns="0" tIns="0" rIns="0" bIns="0" rtlCol="0" anchor="ctr"/>
+          <a:lstStyle/>
+          <a:p>
+            <a:pPr indent="0" marL="0">
+              <a:buNone/>
+            </a:pPr>
+            <a:r>
+              <a:rPr lang="en-US" sz="1800" b="1" dirty="0">
+                <a:solidFill>
+                  <a:schemeClr val="tx2"/>
+                </a:solidFill>
+              </a:rPr>
+              <a:t>UnitE is the backbone</a:t>
+            </a:r>
+            <a:endParaRPr lang="en-US" sz="1800" dirty="0"/>
+          </a:p>
+        </p:txBody>
+      </p:sp>
+      <p:sp>
+        <p:nvSpPr>
+          <p:cNvPr id="8" name="Text 6"/>
+          <p:cNvSpPr txBox="1"/>
+          <p:nvPr/>
+        </p:nvSpPr>
+        <p:spPr>
+          <a:xfrm>
+            <a:off x="1463040" y="2560320"/>
+            <a:ext cx="4297680" cy="1005840"/>
+          </a:xfrm>
+          <a:prstGeom prst="rect">
+            <a:avLst/>
+          </a:prstGeom>
+          <a:noFill/>
+          <a:ln/>
+        </p:spPr>
+        <p:txBody>
+          <a:bodyPr wrap="square" lIns="0" tIns="0" rIns="0" bIns="0" rtlCol="0" anchor="t"/>
+          <a:lstStyle/>
+          <a:p>
+            <a:pPr indent="0" marL="0">
+              <a:buNone/>
+            </a:pPr>
+            <a:r>
+              <a:rPr lang="en-US" sz="1400" dirty="0">
+                <a:solidFill>
+                  <a:schemeClr val="tx1"/>
+                </a:solidFill>
+              </a:rPr>
+              <a:t>Nearly every student system syncs with UnitE. Keeping it accurate keeps everything downstream accurate.</a:t>
+            </a:r>
+            <a:endParaRPr lang="en-US" sz="1400" dirty="0"/>
+          </a:p>
+        </p:txBody>
+      </p:sp>
+      <p:sp>
+        <p:nvSpPr>
+          <p:cNvPr id="9" name="message card 2"/>
+          <p:cNvSpPr/>
+          <p:nvPr/>
+        </p:nvSpPr>
+        <p:spPr>
+          <a:xfrm>
+            <a:off x="6217920" y="1691640"/>
+            <a:ext cx="5394960" cy="2011680"/>
           </a:xfrm>
           <a:prstGeom prst="roundRect">
             <a:avLst>
-              <a:gd name="adj" fmla="val 4762"/>
+              <a:gd name="adj" fmla="val 4545"/>
             </a:avLst>
           </a:prstGeom>
           <a:solidFill>
@@ -2396,14 +2562,39 @@
       </p:sp>
       <p:sp>
         <p:nvSpPr>
-          <p:cNvPr id="8" name="Text 6"/>
+          <p:cNvPr id="10" name="message dot 2"/>
+          <p:cNvSpPr/>
+          <p:nvPr/>
+        </p:nvSpPr>
+        <p:spPr>
+          <a:xfrm>
+            <a:off x="6492240" y="1984248"/>
+            <a:ext cx="457200" cy="457200"/>
+          </a:xfrm>
+          <a:prstGeom prst="ellipse">
+            <a:avLst/>
+          </a:prstGeom>
+          <a:solidFill>
+            <a:schemeClr val="accent3"/>
+          </a:solidFill>
+          <a:ln w="12700">
+            <a:solidFill>
+              <a:schemeClr val="accent3"/>
+            </a:solidFill>
+            <a:prstDash val="solid"/>
+          </a:ln>
+        </p:spPr>
+      </p:sp>
+      <p:sp>
+        <p:nvSpPr>
+          <p:cNvPr id="11" name="Text 9"/>
           <p:cNvSpPr txBox="1"/>
           <p:nvPr/>
         </p:nvSpPr>
         <p:spPr>
           <a:xfrm>
-            <a:off x="640080" y="2788920"/>
-            <a:ext cx="2423160" cy="411480"/>
+            <a:off x="6492240" y="1984248"/>
+            <a:ext cx="457200" cy="457200"/>
           </a:xfrm>
           <a:prstGeom prst="rect">
             <a:avLst/>
@@ -2419,27 +2610,63 @@
               <a:buNone/>
             </a:pPr>
             <a:r>
-              <a:rPr lang="en-US" sz="1600" b="1" dirty="0">
+              <a:rPr lang="en-US" sz="1500" b="1" dirty="0">
+                <a:solidFill>
+                  <a:schemeClr val="bg1"/>
+                </a:solidFill>
+              </a:rPr>
+              <a:t>2</a:t>
+            </a:r>
+            <a:endParaRPr lang="en-US" sz="1500" dirty="0"/>
+          </a:p>
+        </p:txBody>
+      </p:sp>
+      <p:sp>
+        <p:nvSpPr>
+          <p:cNvPr id="12" name="Text 10"/>
+          <p:cNvSpPr txBox="1"/>
+          <p:nvPr/>
+        </p:nvSpPr>
+        <p:spPr>
+          <a:xfrm>
+            <a:off x="7132320" y="1965960"/>
+            <a:ext cx="4297680" cy="502920"/>
+          </a:xfrm>
+          <a:prstGeom prst="rect">
+            <a:avLst/>
+          </a:prstGeom>
+          <a:noFill/>
+          <a:ln/>
+        </p:spPr>
+        <p:txBody>
+          <a:bodyPr wrap="square" lIns="0" tIns="0" rIns="0" bIns="0" rtlCol="0" anchor="ctr"/>
+          <a:lstStyle/>
+          <a:p>
+            <a:pPr indent="0" marL="0">
+              <a:buNone/>
+            </a:pPr>
+            <a:r>
+              <a:rPr lang="en-US" sz="1800" b="1" dirty="0">
                 <a:solidFill>
                   <a:schemeClr val="tx2"/>
                 </a:solidFill>
               </a:rPr>
-              <a:t>Validate</a:t>
-            </a:r>
-            <a:endParaRPr lang="en-US" sz="1600" dirty="0"/>
-          </a:p>
-        </p:txBody>
-      </p:sp>
-      <p:sp>
-        <p:nvSpPr>
-          <p:cNvPr id="9" name="Text 7"/>
+              <a:t>Data flows out well, but not back in</a:t>
+            </a:r>
+            <a:endParaRPr lang="en-US" sz="1800" dirty="0"/>
+          </a:p>
+        </p:txBody>
+      </p:sp>
+      <p:sp>
+        <p:nvSpPr>
+          <p:cNvPr id="13" name="Text 11"/>
           <p:cNvSpPr txBox="1"/>
           <p:nvPr/>
         </p:nvSpPr>
         <p:spPr>
           <a:xfrm>
-            <a:off x="731520" y="3246120"/>
-            <a:ext cx="2240280" cy="1234440"/>
+            <a:off x="7132320" y="2560320"/>
+            <a:ext cx="4297680" cy="1005840"/>
           </a:xfrm>
           <a:prstGeom prst="rect">
             <a:avLst/>
@@ -2451,30 +2678,496 @@
           <a:bodyPr wrap="square" lIns="0" tIns="0" rIns="0" bIns="0" rtlCol="0" anchor="t"/>
           <a:lstStyle/>
           <a:p>
+            <a:pPr indent="0" marL="0">
+              <a:buNone/>
+            </a:pPr>
+            <a:r>
+              <a:rPr lang="en-US" sz="1400" dirty="0">
+                <a:solidFill>
+                  <a:schemeClr val="tx1"/>
+                </a:solidFill>
+              </a:rPr>
+              <a:t>UnitE sends data out automatically. Most return routes into UnitE are still manual.</a:t>
+            </a:r>
+            <a:endParaRPr lang="en-US" sz="1400" dirty="0"/>
+          </a:p>
+        </p:txBody>
+      </p:sp>
+      <p:sp>
+        <p:nvSpPr>
+          <p:cNvPr id="14" name="message card 3"/>
+          <p:cNvSpPr/>
+          <p:nvPr/>
+        </p:nvSpPr>
+        <p:spPr>
+          <a:xfrm>
+            <a:off x="548640" y="3977640"/>
+            <a:ext cx="5394960" cy="2011680"/>
+          </a:xfrm>
+          <a:prstGeom prst="roundRect">
+            <a:avLst>
+              <a:gd name="adj" fmla="val 4545"/>
+            </a:avLst>
+          </a:prstGeom>
+          <a:solidFill>
+            <a:schemeClr val="bg2"/>
+          </a:solidFill>
+          <a:ln w="12700">
+            <a:solidFill>
+              <a:schemeClr val="bg2"/>
+            </a:solidFill>
+            <a:prstDash val="solid"/>
+          </a:ln>
+        </p:spPr>
+      </p:sp>
+      <p:sp>
+        <p:nvSpPr>
+          <p:cNvPr id="15" name="message dot 3"/>
+          <p:cNvSpPr/>
+          <p:nvPr/>
+        </p:nvSpPr>
+        <p:spPr>
+          <a:xfrm>
+            <a:off x="822960" y="4270248"/>
+            <a:ext cx="457200" cy="457200"/>
+          </a:xfrm>
+          <a:prstGeom prst="ellipse">
+            <a:avLst/>
+          </a:prstGeom>
+          <a:solidFill>
+            <a:schemeClr val="accent4"/>
+          </a:solidFill>
+          <a:ln w="12700">
+            <a:solidFill>
+              <a:schemeClr val="accent4"/>
+            </a:solidFill>
+            <a:prstDash val="solid"/>
+          </a:ln>
+        </p:spPr>
+      </p:sp>
+      <p:sp>
+        <p:nvSpPr>
+          <p:cNvPr id="16" name="Text 14"/>
+          <p:cNvSpPr txBox="1"/>
+          <p:nvPr/>
+        </p:nvSpPr>
+        <p:spPr>
+          <a:xfrm>
+            <a:off x="822960" y="4270248"/>
+            <a:ext cx="457200" cy="457200"/>
+          </a:xfrm>
+          <a:prstGeom prst="rect">
+            <a:avLst/>
+          </a:prstGeom>
+          <a:noFill/>
+          <a:ln/>
+        </p:spPr>
+        <p:txBody>
+          <a:bodyPr wrap="square" lIns="0" tIns="0" rIns="0" bIns="0" rtlCol="0" anchor="ctr"/>
+          <a:lstStyle/>
+          <a:p>
             <a:pPr algn="ctr" indent="0" marL="0">
               <a:buNone/>
             </a:pPr>
             <a:r>
-              <a:rPr lang="en-US" sz="1300" dirty="0">
+              <a:rPr lang="en-US" sz="1500" b="1" dirty="0">
+                <a:solidFill>
+                  <a:schemeClr val="bg1"/>
+                </a:solidFill>
+              </a:rPr>
+              <a:t>3</a:t>
+            </a:r>
+            <a:endParaRPr lang="en-US" sz="1500" dirty="0"/>
+          </a:p>
+        </p:txBody>
+      </p:sp>
+      <p:sp>
+        <p:nvSpPr>
+          <p:cNvPr id="17" name="Text 15"/>
+          <p:cNvSpPr txBox="1"/>
+          <p:nvPr/>
+        </p:nvSpPr>
+        <p:spPr>
+          <a:xfrm>
+            <a:off x="1463040" y="4251960"/>
+            <a:ext cx="4297680" cy="502920"/>
+          </a:xfrm>
+          <a:prstGeom prst="rect">
+            <a:avLst/>
+          </a:prstGeom>
+          <a:noFill/>
+          <a:ln/>
+        </p:spPr>
+        <p:txBody>
+          <a:bodyPr wrap="square" lIns="0" tIns="0" rIns="0" bIns="0" rtlCol="0" anchor="ctr"/>
+          <a:lstStyle/>
+          <a:p>
+            <a:pPr indent="0" marL="0">
+              <a:buNone/>
+            </a:pPr>
+            <a:r>
+              <a:rPr lang="en-US" sz="1800" b="1" dirty="0">
+                <a:solidFill>
+                  <a:schemeClr val="tx2"/>
+                </a:solidFill>
+              </a:rPr>
+              <a:t>Reporting already has one front door</a:t>
+            </a:r>
+            <a:endParaRPr lang="en-US" sz="1800" dirty="0"/>
+          </a:p>
+        </p:txBody>
+      </p:sp>
+      <p:sp>
+        <p:nvSpPr>
+          <p:cNvPr id="18" name="Text 16"/>
+          <p:cNvSpPr txBox="1"/>
+          <p:nvPr/>
+        </p:nvSpPr>
+        <p:spPr>
+          <a:xfrm>
+            <a:off x="1463040" y="4846320"/>
+            <a:ext cx="4297680" cy="1005840"/>
+          </a:xfrm>
+          <a:prstGeom prst="rect">
+            <a:avLst/>
+          </a:prstGeom>
+          <a:noFill/>
+          <a:ln/>
+        </p:spPr>
+        <p:txBody>
+          <a:bodyPr wrap="square" lIns="0" tIns="0" rIns="0" bIns="0" rtlCol="0" anchor="t"/>
+          <a:lstStyle/>
+          <a:p>
+            <a:pPr indent="0" marL="0">
+              <a:buNone/>
+            </a:pPr>
+            <a:r>
+              <a:rPr lang="en-US" sz="1400" dirty="0">
                 <a:solidFill>
                   <a:schemeClr val="tx1"/>
                 </a:solidFill>
               </a:rPr>
-              <a:t>Walk each system owner through their part of the map and confirm the connections.</a:t>
-            </a:r>
-            <a:endParaRPr lang="en-US" sz="1300" dirty="0"/>
-          </a:p>
-        </p:txBody>
-      </p:sp>
-      <p:sp>
-        <p:nvSpPr>
-          <p:cNvPr id="10" name="step dot 2"/>
-          <p:cNvSpPr/>
-          <p:nvPr/>
-        </p:nvSpPr>
-        <p:spPr>
-          <a:xfrm>
-            <a:off x="4343400" y="1783080"/>
+              <a:t>Five core systems feed Power BI through one SQL Server connector. A few side routes still bypass it.</a:t>
+            </a:r>
+            <a:endParaRPr lang="en-US" sz="1400" dirty="0"/>
+          </a:p>
+        </p:txBody>
+      </p:sp>
+      <p:sp>
+        <p:nvSpPr>
+          <p:cNvPr id="19" name="message card 4"/>
+          <p:cNvSpPr/>
+          <p:nvPr/>
+        </p:nvSpPr>
+        <p:spPr>
+          <a:xfrm>
+            <a:off x="6217920" y="3977640"/>
+            <a:ext cx="5394960" cy="2011680"/>
+          </a:xfrm>
+          <a:prstGeom prst="roundRect">
+            <a:avLst>
+              <a:gd name="adj" fmla="val 4545"/>
+            </a:avLst>
+          </a:prstGeom>
+          <a:solidFill>
+            <a:schemeClr val="bg2"/>
+          </a:solidFill>
+          <a:ln w="12700">
+            <a:solidFill>
+              <a:schemeClr val="bg2"/>
+            </a:solidFill>
+            <a:prstDash val="solid"/>
+          </a:ln>
+        </p:spPr>
+      </p:sp>
+      <p:sp>
+        <p:nvSpPr>
+          <p:cNvPr id="20" name="message dot 4"/>
+          <p:cNvSpPr/>
+          <p:nvPr/>
+        </p:nvSpPr>
+        <p:spPr>
+          <a:xfrm>
+            <a:off x="6492240" y="4270248"/>
+            <a:ext cx="457200" cy="457200"/>
+          </a:xfrm>
+          <a:prstGeom prst="ellipse">
+            <a:avLst/>
+          </a:prstGeom>
+          <a:solidFill>
+            <a:schemeClr val="accent2"/>
+          </a:solidFill>
+          <a:ln w="12700">
+            <a:solidFill>
+              <a:schemeClr val="accent2"/>
+            </a:solidFill>
+            <a:prstDash val="solid"/>
+          </a:ln>
+        </p:spPr>
+      </p:sp>
+      <p:sp>
+        <p:nvSpPr>
+          <p:cNvPr id="21" name="Text 19"/>
+          <p:cNvSpPr txBox="1"/>
+          <p:nvPr/>
+        </p:nvSpPr>
+        <p:spPr>
+          <a:xfrm>
+            <a:off x="6492240" y="4270248"/>
+            <a:ext cx="457200" cy="457200"/>
+          </a:xfrm>
+          <a:prstGeom prst="rect">
+            <a:avLst/>
+          </a:prstGeom>
+          <a:noFill/>
+          <a:ln/>
+        </p:spPr>
+        <p:txBody>
+          <a:bodyPr wrap="square" lIns="0" tIns="0" rIns="0" bIns="0" rtlCol="0" anchor="ctr"/>
+          <a:lstStyle/>
+          <a:p>
+            <a:pPr algn="ctr" indent="0" marL="0">
+              <a:buNone/>
+            </a:pPr>
+            <a:r>
+              <a:rPr lang="en-US" sz="1500" b="1" dirty="0">
+                <a:solidFill>
+                  <a:schemeClr val="bg1"/>
+                </a:solidFill>
+              </a:rPr>
+              <a:t>4</a:t>
+            </a:r>
+            <a:endParaRPr lang="en-US" sz="1500" dirty="0"/>
+          </a:p>
+        </p:txBody>
+      </p:sp>
+      <p:sp>
+        <p:nvSpPr>
+          <p:cNvPr id="22" name="Text 20"/>
+          <p:cNvSpPr txBox="1"/>
+          <p:nvPr/>
+        </p:nvSpPr>
+        <p:spPr>
+          <a:xfrm>
+            <a:off x="7132320" y="4251960"/>
+            <a:ext cx="4297680" cy="502920"/>
+          </a:xfrm>
+          <a:prstGeom prst="rect">
+            <a:avLst/>
+          </a:prstGeom>
+          <a:noFill/>
+          <a:ln/>
+        </p:spPr>
+        <p:txBody>
+          <a:bodyPr wrap="square" lIns="0" tIns="0" rIns="0" bIns="0" rtlCol="0" anchor="ctr"/>
+          <a:lstStyle/>
+          <a:p>
+            <a:pPr indent="0" marL="0">
+              <a:buNone/>
+            </a:pPr>
+            <a:r>
+              <a:rPr lang="en-US" sz="1800" b="1" dirty="0">
+                <a:solidFill>
+                  <a:schemeClr val="tx2"/>
+                </a:solidFill>
+              </a:rPr>
+              <a:t>The wider estate is large</a:t>
+            </a:r>
+            <a:endParaRPr lang="en-US" sz="1800" dirty="0"/>
+          </a:p>
+        </p:txBody>
+      </p:sp>
+      <p:sp>
+        <p:nvSpPr>
+          <p:cNvPr id="23" name="Text 21"/>
+          <p:cNvSpPr txBox="1"/>
+          <p:nvPr/>
+        </p:nvSpPr>
+        <p:spPr>
+          <a:xfrm>
+            <a:off x="7132320" y="4846320"/>
+            <a:ext cx="4297680" cy="1005840"/>
+          </a:xfrm>
+          <a:prstGeom prst="rect">
+            <a:avLst/>
+          </a:prstGeom>
+          <a:noFill/>
+          <a:ln/>
+        </p:spPr>
+        <p:txBody>
+          <a:bodyPr wrap="square" lIns="0" tIns="0" rIns="0" bIns="0" rtlCol="0" anchor="t"/>
+          <a:lstStyle/>
+          <a:p>
+            <a:pPr indent="0" marL="0">
+              <a:buNone/>
+            </a:pPr>
+            <a:r>
+              <a:rPr lang="en-US" sz="1400" dirty="0">
+                <a:solidFill>
+                  <a:schemeClr val="tx1"/>
+                </a:solidFill>
+              </a:rPr>
+              <a:t>209 systems across 12 areas. Many sit outside the student system and are not yet connected.</a:t>
+            </a:r>
+            <a:endParaRPr lang="en-US" sz="1400" dirty="0"/>
+          </a:p>
+        </p:txBody>
+      </p:sp>
+      <p:sp>
+        <p:nvSpPr>
+          <p:cNvPr id="25" name="Slide Number Placeholder 0"/>
+          <p:cNvSpPr>
+            <a:spLocks noGrp="1"/>
+          </p:cNvSpPr>
+          <p:nvPr>
+            <p:ph type="sldNum" sz="quarter" idx="4294967295"/>
+          </p:nvPr>
+        </p:nvSpPr>
+        <p:spPr>
+          <a:xfrm>
+            <a:off x="11247120" y="6446520"/>
+            <a:ext cx="457200" cy="274320"/>
+          </a:xfrm>
+          <a:prstGeom prst="rect">
+            <a:avLst/>
+          </a:prstGeom>
+          <a:extLst>
+            <a:ext uri="{C572A759-6A51-4108-AA02-DFA0A04FC94B}">
+              <ma14:wrappingTextBoxFlag xmlns:ma14="http://schemas.microsoft.com/office/mac/drawingml/2011/main" val="0"/>
+            </a:ext>
+          </a:extLst>
+        </p:spPr>
+        <p:txBody>
+          <a:bodyPr/>
+          <a:lstStyle>
+            <a:lvl1pPr>
+              <a:defRPr sz="1000">
+                <a:solidFill>
+                  <a:srgbClr val="6B6F80"/>
+                </a:solidFill>
+              </a:defRPr>
+            </a:lvl1pPr>
+          </a:lstStyle>
+          <a:p>
+            <a:pPr algn="r"/>
+            <a:fld id="{F7021451-1387-4CA6-816F-3879F97B5CBC}" type="slidenum">
+              <a:rPr b="0" lang="en-US"/>
+              <a:t>10</a:t>
+            </a:fld>
+            <a:endParaRPr lang="en-US"/>
+          </a:p>
+        </p:txBody>
+      </p:sp>
+    </p:spTree>
+  </p:cSld>
+  <p:clrMapOvr>
+    <a:masterClrMapping/>
+  </p:clrMapOvr>
+</p:sld>
+</file>
+
+<file path=ppt/slides/slide11.xml><?xml version="1.0" encoding="utf-8"?>
+<p:sld xmlns:a="http://schemas.openxmlformats.org/drawingml/2006/main" xmlns:r="http://schemas.openxmlformats.org/officeDocument/2006/relationships" xmlns:p="http://schemas.openxmlformats.org/presentationml/2006/main">
+  <p:cSld name="Slide 11">
+    <p:spTree>
+      <p:nvGrpSpPr>
+        <p:cNvPr id="1" name=""/>
+        <p:cNvGrpSpPr/>
+        <p:nvPr/>
+      </p:nvGrpSpPr>
+      <p:grpSpPr>
+        <a:xfrm>
+          <a:off x="0" y="0"/>
+          <a:ext cx="0" cy="0"/>
+          <a:chOff x="0" y="0"/>
+          <a:chExt cx="0" cy="0"/>
+        </a:xfrm>
+      </p:grpSpPr>
+      <p:sp>
+        <p:nvSpPr>
+          <p:cNvPr id="2" name="Text 0"/>
+          <p:cNvSpPr/>
+          <p:nvPr>
+            <p:ph idx="100" type="title" hasCustomPrompt="1"/>
+          </p:nvPr>
+        </p:nvSpPr>
+        <p:spPr>
+          <a:xfrm>
+            <a:off x="548640" y="320040"/>
+            <a:ext cx="11064240" cy="731520"/>
+          </a:xfrm>
+          <a:prstGeom prst="rect">
+            <a:avLst/>
+          </a:prstGeom>
+          <a:noFill/>
+          <a:ln/>
+        </p:spPr>
+        <p:txBody>
+          <a:bodyPr wrap="square" lIns="0" tIns="0" rIns="0" bIns="0" rtlCol="0" anchor="ctr"/>
+          <a:lstStyle/>
+          <a:p>
+            <a:pPr indent="0" marL="0">
+              <a:buNone/>
+            </a:pPr>
+            <a:r>
+              <a:rPr lang="en-US" sz="3200" b="1" dirty="0">
+                <a:solidFill>
+                  <a:schemeClr val="tx2"/>
+                </a:solidFill>
+              </a:rPr>
+              <a:t>Proposed next steps</a:t>
+            </a:r>
+            <a:endParaRPr lang="en-US" sz="3200" dirty="0"/>
+          </a:p>
+        </p:txBody>
+      </p:sp>
+      <p:sp>
+        <p:nvSpPr>
+          <p:cNvPr id="3" name="Text 0"/>
+          <p:cNvSpPr/>
+          <p:nvPr>
+            <p:ph idx="101" type="body" hasCustomPrompt="1"/>
+          </p:nvPr>
+        </p:nvSpPr>
+        <p:spPr>
+          <a:xfrm>
+            <a:off x="548640" y="1005840"/>
+            <a:ext cx="11064240" cy="411480"/>
+          </a:xfrm>
+          <a:prstGeom prst="rect">
+            <a:avLst/>
+          </a:prstGeom>
+          <a:noFill/>
+          <a:ln/>
+        </p:spPr>
+        <p:txBody>
+          <a:bodyPr wrap="square" lIns="0" tIns="0" rIns="0" bIns="0" rtlCol="0" anchor="t"/>
+          <a:lstStyle/>
+          <a:p>
+            <a:pPr indent="0" marL="0">
+              <a:buNone/>
+            </a:pPr>
+            <a:r>
+              <a:rPr lang="en-US" sz="1500" dirty="0">
+                <a:solidFill>
+                  <a:schemeClr val="tx1"/>
+                </a:solidFill>
+              </a:rPr>
+              <a:t>For discussion with Sarah, Lyndsay and Lesley</a:t>
+            </a:r>
+            <a:endParaRPr lang="en-US" sz="1500" dirty="0"/>
+          </a:p>
+        </p:txBody>
+      </p:sp>
+      <p:sp>
+        <p:nvSpPr>
+          <p:cNvPr id="4" name="step dot 1"/>
+          <p:cNvSpPr/>
+          <p:nvPr/>
+        </p:nvSpPr>
+        <p:spPr>
+          <a:xfrm>
+            <a:off x="1527048" y="1783080"/>
             <a:ext cx="640080" cy="640080"/>
           </a:xfrm>
           <a:prstGeom prst="ellipse">
@@ -2493,13 +3186,13 @@
       </p:sp>
       <p:sp>
         <p:nvSpPr>
-          <p:cNvPr id="11" name="Text 9"/>
+          <p:cNvPr id="5" name="Text 3"/>
           <p:cNvSpPr txBox="1"/>
           <p:nvPr/>
         </p:nvSpPr>
         <p:spPr>
           <a:xfrm>
-            <a:off x="4343400" y="1783080"/>
+            <a:off x="1527048" y="1783080"/>
             <a:ext cx="640080" cy="640080"/>
           </a:xfrm>
           <a:prstGeom prst="rect">
@@ -2521,7 +3214,7 @@
                   <a:schemeClr val="bg1"/>
                 </a:solidFill>
               </a:rPr>
-              <a:t>2</a:t>
+              <a:t>1</a:t>
             </a:r>
             <a:endParaRPr lang="en-US" sz="2000" dirty="0"/>
           </a:p>
@@ -2529,13 +3222,13 @@
       </p:sp>
       <p:sp>
         <p:nvSpPr>
-          <p:cNvPr id="12" name="Shape 10"/>
-          <p:cNvSpPr/>
-          <p:nvPr/>
-        </p:nvSpPr>
-        <p:spPr>
-          <a:xfrm>
-            <a:off x="5056632" y="2103120"/>
+          <p:cNvPr id="6" name="Shape 4"/>
+          <p:cNvSpPr/>
+          <p:nvPr/>
+        </p:nvSpPr>
+        <p:spPr>
+          <a:xfrm>
+            <a:off x="2240280" y="2103120"/>
             <a:ext cx="2176272" cy="0"/>
           </a:xfrm>
           <a:prstGeom prst="line">
@@ -2552,13 +3245,13 @@
       </p:sp>
       <p:sp>
         <p:nvSpPr>
-          <p:cNvPr id="13" name="step card 2"/>
-          <p:cNvSpPr/>
-          <p:nvPr/>
-        </p:nvSpPr>
-        <p:spPr>
-          <a:xfrm>
-            <a:off x="3364992" y="2651760"/>
+          <p:cNvPr id="7" name="step card 1"/>
+          <p:cNvSpPr/>
+          <p:nvPr/>
+        </p:nvSpPr>
+        <p:spPr>
+          <a:xfrm>
+            <a:off x="548640" y="2651760"/>
             <a:ext cx="2606040" cy="1920240"/>
           </a:xfrm>
           <a:prstGeom prst="roundRect">
@@ -2579,13 +3272,13 @@
       </p:sp>
       <p:sp>
         <p:nvSpPr>
-          <p:cNvPr id="14" name="Text 12"/>
+          <p:cNvPr id="8" name="Text 6"/>
           <p:cNvSpPr txBox="1"/>
           <p:nvPr/>
         </p:nvSpPr>
         <p:spPr>
           <a:xfrm>
-            <a:off x="3456432" y="2788920"/>
+            <a:off x="640080" y="2788920"/>
             <a:ext cx="2423160" cy="411480"/>
           </a:xfrm>
           <a:prstGeom prst="rect">
@@ -2607,7 +3300,7 @@
                   <a:schemeClr val="tx2"/>
                 </a:solidFill>
               </a:rPr>
-              <a:t>Confirm manual steps</a:t>
+              <a:t>Validate</a:t>
             </a:r>
             <a:endParaRPr lang="en-US" sz="1600" dirty="0"/>
           </a:p>
@@ -2615,13 +3308,13 @@
       </p:sp>
       <p:sp>
         <p:nvSpPr>
-          <p:cNvPr id="15" name="Text 13"/>
+          <p:cNvPr id="9" name="Text 7"/>
           <p:cNvSpPr txBox="1"/>
           <p:nvPr/>
         </p:nvSpPr>
         <p:spPr>
           <a:xfrm>
-            <a:off x="3547872" y="3246120"/>
+            <a:off x="731520" y="3246120"/>
             <a:ext cx="2240280" cy="1234440"/>
           </a:xfrm>
           <a:prstGeom prst="rect">
@@ -2643,7 +3336,7 @@
                   <a:schemeClr val="tx1"/>
                 </a:solidFill>
               </a:rPr>
-              <a:t>Check open items, e.g. the HR starter form with Gillian and the weekly manual Moodle upload.</a:t>
+              <a:t>Walk each system owner through their part of the map and confirm the connections.</a:t>
             </a:r>
             <a:endParaRPr lang="en-US" sz="1300" dirty="0"/>
           </a:p>
@@ -2651,13 +3344,13 @@
       </p:sp>
       <p:sp>
         <p:nvSpPr>
-          <p:cNvPr id="16" name="step dot 3"/>
-          <p:cNvSpPr/>
-          <p:nvPr/>
-        </p:nvSpPr>
-        <p:spPr>
-          <a:xfrm>
-            <a:off x="7159752" y="1783080"/>
+          <p:cNvPr id="10" name="step dot 2"/>
+          <p:cNvSpPr/>
+          <p:nvPr/>
+        </p:nvSpPr>
+        <p:spPr>
+          <a:xfrm>
+            <a:off x="4343400" y="1783080"/>
             <a:ext cx="640080" cy="640080"/>
           </a:xfrm>
           <a:prstGeom prst="ellipse">
@@ -2676,13 +3369,13 @@
       </p:sp>
       <p:sp>
         <p:nvSpPr>
-          <p:cNvPr id="17" name="Text 15"/>
+          <p:cNvPr id="11" name="Text 9"/>
           <p:cNvSpPr txBox="1"/>
           <p:nvPr/>
         </p:nvSpPr>
         <p:spPr>
           <a:xfrm>
-            <a:off x="7159752" y="1783080"/>
+            <a:off x="4343400" y="1783080"/>
             <a:ext cx="640080" cy="640080"/>
           </a:xfrm>
           <a:prstGeom prst="rect">
@@ -2704,7 +3397,7 @@
                   <a:schemeClr val="bg1"/>
                 </a:solidFill>
               </a:rPr>
-              <a:t>3</a:t>
+              <a:t>2</a:t>
             </a:r>
             <a:endParaRPr lang="en-US" sz="2000" dirty="0"/>
           </a:p>
@@ -2712,13 +3405,13 @@
       </p:sp>
       <p:sp>
         <p:nvSpPr>
-          <p:cNvPr id="18" name="Shape 16"/>
-          <p:cNvSpPr/>
-          <p:nvPr/>
-        </p:nvSpPr>
-        <p:spPr>
-          <a:xfrm>
-            <a:off x="7872984" y="2103120"/>
+          <p:cNvPr id="12" name="Shape 10"/>
+          <p:cNvSpPr/>
+          <p:nvPr/>
+        </p:nvSpPr>
+        <p:spPr>
+          <a:xfrm>
+            <a:off x="5056632" y="2103120"/>
             <a:ext cx="2176272" cy="0"/>
           </a:xfrm>
           <a:prstGeom prst="line">
@@ -2735,13 +3428,13 @@
       </p:sp>
       <p:sp>
         <p:nvSpPr>
-          <p:cNvPr id="19" name="step card 3"/>
-          <p:cNvSpPr/>
-          <p:nvPr/>
-        </p:nvSpPr>
-        <p:spPr>
-          <a:xfrm>
-            <a:off x="6181344" y="2651760"/>
+          <p:cNvPr id="13" name="step card 2"/>
+          <p:cNvSpPr/>
+          <p:nvPr/>
+        </p:nvSpPr>
+        <p:spPr>
+          <a:xfrm>
+            <a:off x="3364992" y="2651760"/>
             <a:ext cx="2606040" cy="1920240"/>
           </a:xfrm>
           <a:prstGeom prst="roundRect">
@@ -2762,13 +3455,13 @@
       </p:sp>
       <p:sp>
         <p:nvSpPr>
-          <p:cNvPr id="20" name="Text 18"/>
+          <p:cNvPr id="14" name="Text 12"/>
           <p:cNvSpPr txBox="1"/>
           <p:nvPr/>
         </p:nvSpPr>
         <p:spPr>
           <a:xfrm>
-            <a:off x="6272784" y="2788920"/>
+            <a:off x="3456432" y="2788920"/>
             <a:ext cx="2423160" cy="411480"/>
           </a:xfrm>
           <a:prstGeom prst="rect">
@@ -2790,7 +3483,7 @@
                   <a:schemeClr val="tx2"/>
                 </a:solidFill>
               </a:rPr>
-              <a:t>Prioritise</a:t>
+              <a:t>Confirm manual steps</a:t>
             </a:r>
             <a:endParaRPr lang="en-US" sz="1600" dirty="0"/>
           </a:p>
@@ -2798,13 +3491,13 @@
       </p:sp>
       <p:sp>
         <p:nvSpPr>
-          <p:cNvPr id="21" name="Text 19"/>
+          <p:cNvPr id="15" name="Text 13"/>
           <p:cNvSpPr txBox="1"/>
           <p:nvPr/>
         </p:nvSpPr>
         <p:spPr>
           <a:xfrm>
-            <a:off x="6364224" y="3246120"/>
+            <a:off x="3547872" y="3246120"/>
             <a:ext cx="2240280" cy="1234440"/>
           </a:xfrm>
           <a:prstGeom prst="rect">
@@ -2826,7 +3519,7 @@
                   <a:schemeClr val="tx1"/>
                 </a:solidFill>
               </a:rPr>
-              <a:t>Score each manual hand-off on time spent and data risk; pick the top three.</a:t>
+              <a:t>Check open items, e.g. the HR starter form with Gillian and the weekly manual Moodle upload.</a:t>
             </a:r>
             <a:endParaRPr lang="en-US" sz="1300" dirty="0"/>
           </a:p>
@@ -2834,13 +3527,13 @@
       </p:sp>
       <p:sp>
         <p:nvSpPr>
-          <p:cNvPr id="22" name="step dot 4"/>
-          <p:cNvSpPr/>
-          <p:nvPr/>
-        </p:nvSpPr>
-        <p:spPr>
-          <a:xfrm>
-            <a:off x="9976104" y="1783080"/>
+          <p:cNvPr id="16" name="step dot 3"/>
+          <p:cNvSpPr/>
+          <p:nvPr/>
+        </p:nvSpPr>
+        <p:spPr>
+          <a:xfrm>
+            <a:off x="7159752" y="1783080"/>
             <a:ext cx="640080" cy="640080"/>
           </a:xfrm>
           <a:prstGeom prst="ellipse">
@@ -2859,13 +3552,13 @@
       </p:sp>
       <p:sp>
         <p:nvSpPr>
-          <p:cNvPr id="23" name="Text 21"/>
+          <p:cNvPr id="17" name="Text 15"/>
           <p:cNvSpPr txBox="1"/>
           <p:nvPr/>
         </p:nvSpPr>
         <p:spPr>
           <a:xfrm>
-            <a:off x="9976104" y="1783080"/>
+            <a:off x="7159752" y="1783080"/>
             <a:ext cx="640080" cy="640080"/>
           </a:xfrm>
           <a:prstGeom prst="rect">
@@ -2887,7 +3580,7 @@
                   <a:schemeClr val="bg1"/>
                 </a:solidFill>
               </a:rPr>
-              <a:t>4</a:t>
+              <a:t>3</a:t>
             </a:r>
             <a:endParaRPr lang="en-US" sz="2000" dirty="0"/>
           </a:p>
@@ -2895,13 +3588,36 @@
       </p:sp>
       <p:sp>
         <p:nvSpPr>
-          <p:cNvPr id="24" name="step card 4"/>
-          <p:cNvSpPr/>
-          <p:nvPr/>
-        </p:nvSpPr>
-        <p:spPr>
-          <a:xfrm>
-            <a:off x="8997696" y="2651760"/>
+          <p:cNvPr id="18" name="Shape 16"/>
+          <p:cNvSpPr/>
+          <p:nvPr/>
+        </p:nvSpPr>
+        <p:spPr>
+          <a:xfrm>
+            <a:off x="7872984" y="2103120"/>
+            <a:ext cx="2176272" cy="0"/>
+          </a:xfrm>
+          <a:prstGeom prst="line">
+            <a:avLst/>
+          </a:prstGeom>
+          <a:noFill/>
+          <a:ln w="25400">
+            <a:solidFill>
+              <a:schemeClr val="accent5"/>
+            </a:solidFill>
+            <a:prstDash val="solid"/>
+          </a:ln>
+        </p:spPr>
+      </p:sp>
+      <p:sp>
+        <p:nvSpPr>
+          <p:cNvPr id="19" name="step card 3"/>
+          <p:cNvSpPr/>
+          <p:nvPr/>
+        </p:nvSpPr>
+        <p:spPr>
+          <a:xfrm>
+            <a:off x="6181344" y="2651760"/>
             <a:ext cx="2606040" cy="1920240"/>
           </a:xfrm>
           <a:prstGeom prst="roundRect">
@@ -2922,6 +3638,166 @@
       </p:sp>
       <p:sp>
         <p:nvSpPr>
+          <p:cNvPr id="20" name="Text 18"/>
+          <p:cNvSpPr txBox="1"/>
+          <p:nvPr/>
+        </p:nvSpPr>
+        <p:spPr>
+          <a:xfrm>
+            <a:off x="6272784" y="2788920"/>
+            <a:ext cx="2423160" cy="411480"/>
+          </a:xfrm>
+          <a:prstGeom prst="rect">
+            <a:avLst/>
+          </a:prstGeom>
+          <a:noFill/>
+          <a:ln/>
+        </p:spPr>
+        <p:txBody>
+          <a:bodyPr wrap="square" lIns="0" tIns="0" rIns="0" bIns="0" rtlCol="0" anchor="ctr"/>
+          <a:lstStyle/>
+          <a:p>
+            <a:pPr algn="ctr" indent="0" marL="0">
+              <a:buNone/>
+            </a:pPr>
+            <a:r>
+              <a:rPr lang="en-US" sz="1600" b="1" dirty="0">
+                <a:solidFill>
+                  <a:schemeClr val="tx2"/>
+                </a:solidFill>
+              </a:rPr>
+              <a:t>Prioritise</a:t>
+            </a:r>
+            <a:endParaRPr lang="en-US" sz="1600" dirty="0"/>
+          </a:p>
+        </p:txBody>
+      </p:sp>
+      <p:sp>
+        <p:nvSpPr>
+          <p:cNvPr id="21" name="Text 19"/>
+          <p:cNvSpPr txBox="1"/>
+          <p:nvPr/>
+        </p:nvSpPr>
+        <p:spPr>
+          <a:xfrm>
+            <a:off x="6364224" y="3246120"/>
+            <a:ext cx="2240280" cy="1234440"/>
+          </a:xfrm>
+          <a:prstGeom prst="rect">
+            <a:avLst/>
+          </a:prstGeom>
+          <a:noFill/>
+          <a:ln/>
+        </p:spPr>
+        <p:txBody>
+          <a:bodyPr wrap="square" lIns="0" tIns="0" rIns="0" bIns="0" rtlCol="0" anchor="t"/>
+          <a:lstStyle/>
+          <a:p>
+            <a:pPr algn="ctr" indent="0" marL="0">
+              <a:buNone/>
+            </a:pPr>
+            <a:r>
+              <a:rPr lang="en-US" sz="1300" dirty="0">
+                <a:solidFill>
+                  <a:schemeClr val="tx1"/>
+                </a:solidFill>
+              </a:rPr>
+              <a:t>Score each manual hand-off on time spent and data risk; pick the top three.</a:t>
+            </a:r>
+            <a:endParaRPr lang="en-US" sz="1300" dirty="0"/>
+          </a:p>
+        </p:txBody>
+      </p:sp>
+      <p:sp>
+        <p:nvSpPr>
+          <p:cNvPr id="22" name="step dot 4"/>
+          <p:cNvSpPr/>
+          <p:nvPr/>
+        </p:nvSpPr>
+        <p:spPr>
+          <a:xfrm>
+            <a:off x="9976104" y="1783080"/>
+            <a:ext cx="640080" cy="640080"/>
+          </a:xfrm>
+          <a:prstGeom prst="ellipse">
+            <a:avLst/>
+          </a:prstGeom>
+          <a:solidFill>
+            <a:schemeClr val="accent1"/>
+          </a:solidFill>
+          <a:ln w="12700">
+            <a:solidFill>
+              <a:schemeClr val="accent1"/>
+            </a:solidFill>
+            <a:prstDash val="solid"/>
+          </a:ln>
+        </p:spPr>
+      </p:sp>
+      <p:sp>
+        <p:nvSpPr>
+          <p:cNvPr id="23" name="Text 21"/>
+          <p:cNvSpPr txBox="1"/>
+          <p:nvPr/>
+        </p:nvSpPr>
+        <p:spPr>
+          <a:xfrm>
+            <a:off x="9976104" y="1783080"/>
+            <a:ext cx="640080" cy="640080"/>
+          </a:xfrm>
+          <a:prstGeom prst="rect">
+            <a:avLst/>
+          </a:prstGeom>
+          <a:noFill/>
+          <a:ln/>
+        </p:spPr>
+        <p:txBody>
+          <a:bodyPr wrap="square" lIns="0" tIns="0" rIns="0" bIns="0" rtlCol="0" anchor="ctr"/>
+          <a:lstStyle/>
+          <a:p>
+            <a:pPr algn="ctr" indent="0" marL="0">
+              <a:buNone/>
+            </a:pPr>
+            <a:r>
+              <a:rPr lang="en-US" sz="2000" b="1" dirty="0">
+                <a:solidFill>
+                  <a:schemeClr val="bg1"/>
+                </a:solidFill>
+              </a:rPr>
+              <a:t>4</a:t>
+            </a:r>
+            <a:endParaRPr lang="en-US" sz="2000" dirty="0"/>
+          </a:p>
+        </p:txBody>
+      </p:sp>
+      <p:sp>
+        <p:nvSpPr>
+          <p:cNvPr id="24" name="step card 4"/>
+          <p:cNvSpPr/>
+          <p:nvPr/>
+        </p:nvSpPr>
+        <p:spPr>
+          <a:xfrm>
+            <a:off x="8997696" y="2651760"/>
+            <a:ext cx="2606040" cy="1920240"/>
+          </a:xfrm>
+          <a:prstGeom prst="roundRect">
+            <a:avLst>
+              <a:gd name="adj" fmla="val 4762"/>
+            </a:avLst>
+          </a:prstGeom>
+          <a:solidFill>
+            <a:schemeClr val="bg2"/>
+          </a:solidFill>
+          <a:ln w="12700">
+            <a:solidFill>
+              <a:schemeClr val="bg2"/>
+            </a:solidFill>
+            <a:prstDash val="solid"/>
+          </a:ln>
+        </p:spPr>
+      </p:sp>
+      <p:sp>
+        <p:nvSpPr>
           <p:cNvPr id="25" name="Text 23"/>
           <p:cNvSpPr txBox="1"/>
           <p:nvPr/>
@@ -3108,7 +3984,7 @@
             <a:pPr algn="r"/>
             <a:fld id="{F7021451-1387-4CA6-816F-3879F97B5CBC}" type="slidenum">
               <a:rPr b="0" lang="en-US"/>
-              <a:t>10</a:t>
+              <a:t>11</a:t>
             </a:fld>
             <a:endParaRPr lang="en-US"/>
           </a:p>
@@ -6962,7 +7838,7 @@
                   <a:schemeClr val="tx2"/>
                 </a:solidFill>
               </a:rPr>
-              <a:t>UnitE is the hub: what goes in and out</a:t>
+              <a:t>Student System: the high-level map</a:t>
             </a:r>
             <a:endParaRPr lang="en-US" sz="3200" dirty="0"/>
           </a:p>
@@ -7000,1420 +7876,207 @@
                   <a:schemeClr val="tx1"/>
                 </a:solidFill>
               </a:rPr>
-              <a:t>Every core student system exchanges data with UnitE; amber lines are still done by hand</a:t>
+              <a:t>16 systems grouped into four zones, drawn from the Lucid working file</a:t>
             </a:r>
             <a:endParaRPr lang="en-US" sz="1500" dirty="0"/>
           </a:p>
         </p:txBody>
       </p:sp>
-      <p:sp>
-        <p:nvSpPr>
-          <p:cNvPr id="4" name="hub UnitE"/>
-          <p:cNvSpPr/>
-          <p:nvPr/>
-        </p:nvSpPr>
-        <p:spPr>
-          <a:xfrm>
-            <a:off x="4910328" y="3246120"/>
-            <a:ext cx="2377440" cy="1097280"/>
+      <p:pic>
+        <p:nvPicPr>
+          <p:cNvPr id="4" name="Image 0" descr="Student System high-level data architecture: four zones (Capture, Engage and support, Core record, Student-facing services) feeding a SQL Server data connector and Power BI">    </p:cNvPr>
+          <p:cNvPicPr>
+            <a:picLocks noChangeAspect="1"/>
+          </p:cNvPicPr>
+          <p:nvPr/>
+        </p:nvPicPr>
+        <p:blipFill>
+          <a:blip r:embed="rId1"/>
+          <a:stretch>
+            <a:fillRect/>
+          </a:stretch>
+        </p:blipFill>
+        <p:spPr>
+          <a:xfrm>
+            <a:off x="548640" y="1554480"/>
+            <a:ext cx="6272784" cy="4754880"/>
+          </a:xfrm>
+          <a:prstGeom prst="rect">
+            <a:avLst/>
+          </a:prstGeom>
+        </p:spPr>
+      </p:pic>
+      <p:sp>
+        <p:nvSpPr>
+          <p:cNvPr id="5" name="map guide"/>
+          <p:cNvSpPr/>
+          <p:nvPr/>
+        </p:nvSpPr>
+        <p:spPr>
+          <a:xfrm>
+            <a:off x="7086600" y="1554480"/>
+            <a:ext cx="4526280" cy="4754880"/>
           </a:xfrm>
           <a:prstGeom prst="roundRect">
             <a:avLst>
-              <a:gd name="adj" fmla="val 6667"/>
+              <a:gd name="adj" fmla="val 1616"/>
             </a:avLst>
           </a:prstGeom>
           <a:solidFill>
-            <a:schemeClr val="accent1"/>
+            <a:schemeClr val="bg2"/>
           </a:solidFill>
           <a:ln w="12700">
             <a:solidFill>
-              <a:schemeClr val="accent1"/>
+              <a:schemeClr val="bg2"/>
             </a:solidFill>
             <a:prstDash val="solid"/>
           </a:ln>
-          <a:effectLst>
-            <a:outerShdw sx="100000" sy="100000" kx="0" ky="0" algn="bl" rotWithShape="0" blurRad="50800" dist="25400" dir="5400000">
-              <a:srgbClr val="000000">
-                <a:alpha val="15000"/>
-              </a:srgbClr>
-            </a:outerShdw>
-          </a:effectLst>
-        </p:spPr>
-      </p:sp>
-      <p:sp>
-        <p:nvSpPr>
-          <p:cNvPr id="5" name="hub UnitE text"/>
+        </p:spPr>
+      </p:sp>
+      <p:sp>
+        <p:nvSpPr>
+          <p:cNvPr id="6" name="Text 3"/>
           <p:cNvSpPr txBox="1"/>
           <p:nvPr/>
         </p:nvSpPr>
         <p:spPr>
           <a:xfrm>
-            <a:off x="4956048" y="3246120"/>
-            <a:ext cx="2286000" cy="1097280"/>
-          </a:xfrm>
-          <a:prstGeom prst="rect">
-            <a:avLst/>
-          </a:prstGeom>
-          <a:noFill/>
-          <a:ln/>
-        </p:spPr>
-        <p:txBody>
-          <a:bodyPr wrap="square" lIns="25400" tIns="25400" rIns="25400" bIns="25400" rtlCol="0" anchor="ctr"/>
-          <a:lstStyle/>
-          <a:p>
-            <a:pPr algn="ctr" indent="0" marL="0">
-              <a:buNone/>
-            </a:pPr>
-            <a:r>
-              <a:rPr lang="en-US" sz="2000" b="1" dirty="0">
-                <a:solidFill>
-                  <a:schemeClr val="bg1"/>
-                </a:solidFill>
-              </a:rPr>
-              <a:t>UnitE</a:t>
-            </a:r>
-            <a:endParaRPr lang="en-US" sz="2000" dirty="0"/>
-          </a:p>
-          <a:p>
-            <a:pPr algn="ctr" indent="0" marL="0">
-              <a:buNone/>
-            </a:pPr>
-            <a:r>
-              <a:rPr lang="en-US" sz="1100" dirty="0">
-                <a:solidFill>
-                  <a:schemeClr val="bg1"/>
-                </a:solidFill>
-              </a:rPr>
-              <a:t>Core MIS (student &amp; staff)</a:t>
-            </a:r>
-            <a:endParaRPr lang="en-US" sz="2000" dirty="0"/>
-          </a:p>
-        </p:txBody>
-      </p:sp>
-      <p:sp>
-        <p:nvSpPr>
-          <p:cNvPr id="6" name="spoke Timetable &amp; Attendance"/>
-          <p:cNvSpPr/>
-          <p:nvPr/>
-        </p:nvSpPr>
-        <p:spPr>
-          <a:xfrm>
-            <a:off x="548640" y="1600200"/>
-            <a:ext cx="2240280" cy="777240"/>
-          </a:xfrm>
-          <a:prstGeom prst="roundRect">
-            <a:avLst>
-              <a:gd name="adj" fmla="val 9412"/>
-            </a:avLst>
-          </a:prstGeom>
-          <a:solidFill>
-            <a:schemeClr val="accent5"/>
-          </a:solidFill>
-          <a:ln w="12700">
-            <a:solidFill>
-              <a:schemeClr val="accent5"/>
-            </a:solidFill>
-            <a:prstDash val="solid"/>
-          </a:ln>
-        </p:spPr>
-      </p:sp>
-      <p:sp>
-        <p:nvSpPr>
-          <p:cNvPr id="7" name="spoke Timetable &amp; Attendance text"/>
+            <a:off x="7315200" y="1737360"/>
+            <a:ext cx="4114800" cy="4023360"/>
+          </a:xfrm>
+          <a:prstGeom prst="rect">
+            <a:avLst/>
+          </a:prstGeom>
+          <a:noFill/>
+          <a:ln/>
+        </p:spPr>
+        <p:txBody>
+          <a:bodyPr wrap="square" lIns="0" tIns="0" rIns="0" bIns="0" rtlCol="0" anchor="t"/>
+          <a:lstStyle/>
+          <a:p>
+            <a:pPr indent="0" marL="0">
+              <a:spcAft>
+                <a:spcPts val="800"/>
+              </a:spcAft>
+              <a:buNone/>
+            </a:pPr>
+            <a:r>
+              <a:rPr lang="en-US" sz="1700" b="1" dirty="0">
+                <a:solidFill>
+                  <a:schemeClr val="tx2"/>
+                </a:solidFill>
+              </a:rPr>
+              <a:t>How to read it</a:t>
+            </a:r>
+            <a:endParaRPr lang="en-US" sz="1350" dirty="0"/>
+          </a:p>
+          <a:p>
+            <a:pPr marL="342900" indent="-342900">
+              <a:spcAft>
+                <a:spcPts val="800"/>
+              </a:spcAft>
+              <a:buSzPct val="100000"/>
+              <a:buChar char="•"/>
+            </a:pPr>
+            <a:r>
+              <a:rPr lang="en-US" sz="1350" dirty="0">
+                <a:solidFill>
+                  <a:schemeClr val="tx1"/>
+                </a:solidFill>
+              </a:rPr>
+              <a:t>Data flows left to right: captured, worked on, held in UnitE, then served to students.</a:t>
+            </a:r>
+            <a:endParaRPr lang="en-US" sz="1350" dirty="0"/>
+          </a:p>
+          <a:p>
+            <a:pPr marL="342900" indent="-342900">
+              <a:spcAft>
+                <a:spcPts val="800"/>
+              </a:spcAft>
+              <a:buSzPct val="100000"/>
+              <a:buChar char="•"/>
+            </a:pPr>
+            <a:r>
+              <a:rPr lang="en-US" sz="1350" dirty="0">
+                <a:solidFill>
+                  <a:schemeClr val="tx1"/>
+                </a:solidFill>
+              </a:rPr>
+              <a:t>Purple boxes are the two core systems: Enquirer and UnitE.</a:t>
+            </a:r>
+            <a:endParaRPr lang="en-US" sz="1350" dirty="0"/>
+          </a:p>
+          <a:p>
+            <a:pPr marL="342900" indent="-342900">
+              <a:spcAft>
+                <a:spcPts val="800"/>
+              </a:spcAft>
+              <a:buSzPct val="100000"/>
+              <a:buChar char="•"/>
+            </a:pPr>
+            <a:r>
+              <a:rPr lang="en-US" sz="1350" dirty="0">
+                <a:solidFill>
+                  <a:schemeClr val="tx1"/>
+                </a:solidFill>
+              </a:rPr>
+              <a:t>Amber dashed lines are manual hand-offs, including applications going into UnitE and student updates coming back.</a:t>
+            </a:r>
+            <a:endParaRPr lang="en-US" sz="1350" dirty="0"/>
+          </a:p>
+          <a:p>
+            <a:pPr marL="342900" indent="-342900">
+              <a:spcAft>
+                <a:spcPts val="800"/>
+              </a:spcAft>
+              <a:buSzPct val="100000"/>
+              <a:buChar char="•"/>
+            </a:pPr>
+            <a:r>
+              <a:rPr lang="en-US" sz="1350" dirty="0">
+                <a:solidFill>
+                  <a:schemeClr val="tx1"/>
+                </a:solidFill>
+              </a:rPr>
+              <a:t>Enquirer, TripleS, Bursary, UnitE and iTrent feed Power BI through the SQL Server connector.</a:t>
+            </a:r>
+            <a:endParaRPr lang="en-US" sz="1350" dirty="0"/>
+          </a:p>
+        </p:txBody>
+      </p:sp>
+      <p:sp>
+        <p:nvSpPr>
+          <p:cNvPr id="7" name="Text 4"/>
           <p:cNvSpPr txBox="1"/>
           <p:nvPr/>
         </p:nvSpPr>
         <p:spPr>
           <a:xfrm>
-            <a:off x="594360" y="1600200"/>
-            <a:ext cx="2148840" cy="777240"/>
-          </a:xfrm>
-          <a:prstGeom prst="rect">
-            <a:avLst/>
-          </a:prstGeom>
-          <a:noFill/>
-          <a:ln/>
-        </p:spPr>
-        <p:txBody>
-          <a:bodyPr wrap="square" lIns="25400" tIns="25400" rIns="25400" bIns="25400" rtlCol="0" anchor="ctr"/>
-          <a:lstStyle/>
-          <a:p>
-            <a:pPr algn="ctr" indent="0" marL="0">
-              <a:buNone/>
-            </a:pPr>
-            <a:r>
-              <a:rPr lang="en-US" sz="1200" b="1" dirty="0">
-                <a:solidFill>
-                  <a:schemeClr val="tx1"/>
-                </a:solidFill>
-              </a:rPr>
-              <a:t>Timetable &amp; Attendance</a:t>
-            </a:r>
-            <a:endParaRPr lang="en-US" sz="1200" dirty="0"/>
-          </a:p>
-          <a:p>
-            <a:pPr algn="ctr" indent="0" marL="0">
-              <a:buNone/>
-            </a:pPr>
-            <a:r>
-              <a:rPr lang="en-US" sz="1000" dirty="0">
-                <a:solidFill>
-                  <a:schemeClr val="tx1"/>
-                </a:solidFill>
-              </a:rPr>
-              <a:t>Celcat · timetable, attendance</a:t>
-            </a:r>
-            <a:endParaRPr lang="en-US" sz="1200" dirty="0"/>
-          </a:p>
-        </p:txBody>
-      </p:sp>
-      <p:sp>
-        <p:nvSpPr>
-          <p:cNvPr id="8" name="Shape 6"/>
-          <p:cNvSpPr/>
-          <p:nvPr/>
-        </p:nvSpPr>
-        <p:spPr>
-          <a:xfrm flipH="1" flipV="1">
-            <a:off x="2734287" y="2423160"/>
-            <a:ext cx="2130321" cy="868397"/>
-          </a:xfrm>
-          <a:prstGeom prst="line">
-            <a:avLst/>
-          </a:prstGeom>
-          <a:noFill/>
-          <a:ln w="22225">
-            <a:solidFill>
-              <a:schemeClr val="accent1"/>
-            </a:solidFill>
-            <a:prstDash val="solid"/>
-            <a:tailEnd type="triangle"/>
-          </a:ln>
-        </p:spPr>
-      </p:sp>
-      <p:sp>
-        <p:nvSpPr>
-          <p:cNvPr id="9" name="spoke Enquiry Management"/>
-          <p:cNvSpPr/>
-          <p:nvPr/>
-        </p:nvSpPr>
-        <p:spPr>
-          <a:xfrm>
-            <a:off x="3794760" y="1600200"/>
-            <a:ext cx="2240280" cy="777240"/>
-          </a:xfrm>
-          <a:prstGeom prst="roundRect">
-            <a:avLst>
-              <a:gd name="adj" fmla="val 9412"/>
-            </a:avLst>
-          </a:prstGeom>
-          <a:solidFill>
-            <a:schemeClr val="accent5"/>
-          </a:solidFill>
-          <a:ln w="12700">
-            <a:solidFill>
-              <a:schemeClr val="accent5"/>
-            </a:solidFill>
-            <a:prstDash val="solid"/>
-          </a:ln>
-        </p:spPr>
-      </p:sp>
-      <p:sp>
-        <p:nvSpPr>
-          <p:cNvPr id="10" name="spoke Enquiry Management text"/>
-          <p:cNvSpPr txBox="1"/>
-          <p:nvPr/>
-        </p:nvSpPr>
-        <p:spPr>
-          <a:xfrm>
-            <a:off x="3840480" y="1600200"/>
-            <a:ext cx="2148840" cy="777240"/>
-          </a:xfrm>
-          <a:prstGeom prst="rect">
-            <a:avLst/>
-          </a:prstGeom>
-          <a:noFill/>
-          <a:ln/>
-        </p:spPr>
-        <p:txBody>
-          <a:bodyPr wrap="square" lIns="25400" tIns="25400" rIns="25400" bIns="25400" rtlCol="0" anchor="ctr"/>
-          <a:lstStyle/>
-          <a:p>
-            <a:pPr algn="ctr" indent="0" marL="0">
-              <a:buNone/>
-            </a:pPr>
-            <a:r>
-              <a:rPr lang="en-US" sz="1200" b="1" dirty="0">
-                <a:solidFill>
-                  <a:schemeClr val="tx1"/>
-                </a:solidFill>
-              </a:rPr>
-              <a:t>Enquiry Management</a:t>
-            </a:r>
-            <a:endParaRPr lang="en-US" sz="1200" dirty="0"/>
-          </a:p>
-          <a:p>
-            <a:pPr algn="ctr" indent="0" marL="0">
-              <a:buNone/>
-            </a:pPr>
-            <a:r>
-              <a:rPr lang="en-US" sz="1000" dirty="0">
-                <a:solidFill>
-                  <a:schemeClr val="tx1"/>
-                </a:solidFill>
-              </a:rPr>
-              <a:t>Enquirer · application status</a:t>
-            </a:r>
-            <a:endParaRPr lang="en-US" sz="1200" dirty="0"/>
-          </a:p>
-        </p:txBody>
-      </p:sp>
-      <p:sp>
-        <p:nvSpPr>
-          <p:cNvPr id="11" name="Shape 9"/>
-          <p:cNvSpPr/>
-          <p:nvPr/>
-        </p:nvSpPr>
-        <p:spPr>
-          <a:xfrm flipH="1" flipV="1">
-            <a:off x="5146168" y="2458258"/>
-            <a:ext cx="509633" cy="777240"/>
-          </a:xfrm>
-          <a:prstGeom prst="line">
-            <a:avLst/>
-          </a:prstGeom>
-          <a:noFill/>
-          <a:ln w="22225">
-            <a:solidFill>
-              <a:schemeClr val="accent1"/>
-            </a:solidFill>
-            <a:prstDash val="solid"/>
-            <a:tailEnd type="triangle"/>
-          </a:ln>
-        </p:spPr>
-      </p:sp>
-      <p:sp>
-        <p:nvSpPr>
-          <p:cNvPr id="12" name="Shape 10"/>
-          <p:cNvSpPr/>
-          <p:nvPr/>
-        </p:nvSpPr>
-        <p:spPr>
-          <a:xfrm>
-            <a:off x="5253222" y="2388062"/>
-            <a:ext cx="509633" cy="777240"/>
-          </a:xfrm>
-          <a:prstGeom prst="line">
-            <a:avLst/>
-          </a:prstGeom>
-          <a:noFill/>
-          <a:ln w="22225">
-            <a:solidFill>
-              <a:schemeClr val="accent3"/>
-            </a:solidFill>
-            <a:prstDash val="dash"/>
-            <a:tailEnd type="triangle"/>
-          </a:ln>
-        </p:spPr>
-      </p:sp>
-      <p:sp>
-        <p:nvSpPr>
-          <p:cNvPr id="13" name="spoke Student Support"/>
-          <p:cNvSpPr/>
-          <p:nvPr/>
-        </p:nvSpPr>
-        <p:spPr>
-          <a:xfrm>
-            <a:off x="7040880" y="1600200"/>
-            <a:ext cx="2240280" cy="777240"/>
-          </a:xfrm>
-          <a:prstGeom prst="roundRect">
-            <a:avLst>
-              <a:gd name="adj" fmla="val 9412"/>
-            </a:avLst>
-          </a:prstGeom>
-          <a:solidFill>
-            <a:schemeClr val="accent5"/>
-          </a:solidFill>
-          <a:ln w="12700">
-            <a:solidFill>
-              <a:schemeClr val="accent5"/>
-            </a:solidFill>
-            <a:prstDash val="solid"/>
-          </a:ln>
-        </p:spPr>
-      </p:sp>
-      <p:sp>
-        <p:nvSpPr>
-          <p:cNvPr id="14" name="spoke Student Support text"/>
-          <p:cNvSpPr txBox="1"/>
-          <p:nvPr/>
-        </p:nvSpPr>
-        <p:spPr>
-          <a:xfrm>
-            <a:off x="7086600" y="1600200"/>
-            <a:ext cx="2148840" cy="777240"/>
-          </a:xfrm>
-          <a:prstGeom prst="rect">
-            <a:avLst/>
-          </a:prstGeom>
-          <a:noFill/>
-          <a:ln/>
-        </p:spPr>
-        <p:txBody>
-          <a:bodyPr wrap="square" lIns="25400" tIns="25400" rIns="25400" bIns="25400" rtlCol="0" anchor="ctr"/>
-          <a:lstStyle/>
-          <a:p>
-            <a:pPr algn="ctr" indent="0" marL="0">
-              <a:buNone/>
-            </a:pPr>
-            <a:r>
-              <a:rPr lang="en-US" sz="1200" b="1" dirty="0">
-                <a:solidFill>
-                  <a:schemeClr val="tx1"/>
-                </a:solidFill>
-              </a:rPr>
-              <a:t>Student Support</a:t>
-            </a:r>
-            <a:endParaRPr lang="en-US" sz="1200" dirty="0"/>
-          </a:p>
-          <a:p>
-            <a:pPr algn="ctr" indent="0" marL="0">
-              <a:buNone/>
-            </a:pPr>
-            <a:r>
-              <a:rPr lang="en-US" sz="1000" dirty="0">
-                <a:solidFill>
-                  <a:schemeClr val="tx1"/>
-                </a:solidFill>
-              </a:rPr>
-              <a:t>TripleS · ASN, school transition</a:t>
-            </a:r>
-            <a:endParaRPr lang="en-US" sz="1200" dirty="0"/>
-          </a:p>
-        </p:txBody>
-      </p:sp>
-      <p:sp>
-        <p:nvSpPr>
-          <p:cNvPr id="15" name="Shape 13"/>
-          <p:cNvSpPr/>
-          <p:nvPr/>
-        </p:nvSpPr>
-        <p:spPr>
-          <a:xfrm flipV="1">
-            <a:off x="6777672" y="2423160"/>
-            <a:ext cx="887431" cy="777240"/>
-          </a:xfrm>
-          <a:prstGeom prst="line">
-            <a:avLst/>
-          </a:prstGeom>
-          <a:noFill/>
-          <a:ln w="22225">
-            <a:solidFill>
-              <a:schemeClr val="accent1"/>
-            </a:solidFill>
-            <a:prstDash val="solid"/>
-            <a:tailEnd type="triangle"/>
-          </a:ln>
-        </p:spPr>
-      </p:sp>
-      <p:sp>
-        <p:nvSpPr>
-          <p:cNvPr id="16" name="spoke Student Funding"/>
-          <p:cNvSpPr/>
-          <p:nvPr/>
-        </p:nvSpPr>
-        <p:spPr>
-          <a:xfrm>
-            <a:off x="9372600" y="2514600"/>
-            <a:ext cx="2240280" cy="777240"/>
-          </a:xfrm>
-          <a:prstGeom prst="roundRect">
-            <a:avLst>
-              <a:gd name="adj" fmla="val 9412"/>
-            </a:avLst>
-          </a:prstGeom>
-          <a:solidFill>
-            <a:schemeClr val="accent5"/>
-          </a:solidFill>
-          <a:ln w="12700">
-            <a:solidFill>
-              <a:schemeClr val="accent5"/>
-            </a:solidFill>
-            <a:prstDash val="solid"/>
-          </a:ln>
-        </p:spPr>
-      </p:sp>
-      <p:sp>
-        <p:nvSpPr>
-          <p:cNvPr id="17" name="spoke Student Funding text"/>
-          <p:cNvSpPr txBox="1"/>
-          <p:nvPr/>
-        </p:nvSpPr>
-        <p:spPr>
-          <a:xfrm>
-            <a:off x="9418320" y="2514600"/>
-            <a:ext cx="2148840" cy="777240"/>
-          </a:xfrm>
-          <a:prstGeom prst="rect">
-            <a:avLst/>
-          </a:prstGeom>
-          <a:noFill/>
-          <a:ln/>
-        </p:spPr>
-        <p:txBody>
-          <a:bodyPr wrap="square" lIns="25400" tIns="25400" rIns="25400" bIns="25400" rtlCol="0" anchor="ctr"/>
-          <a:lstStyle/>
-          <a:p>
-            <a:pPr algn="ctr" indent="0" marL="0">
-              <a:buNone/>
-            </a:pPr>
-            <a:r>
-              <a:rPr lang="en-US" sz="1200" b="1" dirty="0">
-                <a:solidFill>
-                  <a:schemeClr val="tx1"/>
-                </a:solidFill>
-              </a:rPr>
-              <a:t>Student Funding</a:t>
-            </a:r>
-            <a:endParaRPr lang="en-US" sz="1200" dirty="0"/>
-          </a:p>
-          <a:p>
-            <a:pPr algn="ctr" indent="0" marL="0">
-              <a:buNone/>
-            </a:pPr>
-            <a:r>
-              <a:rPr lang="en-US" sz="1000" dirty="0">
-                <a:solidFill>
-                  <a:schemeClr val="tx1"/>
-                </a:solidFill>
-              </a:rPr>
-              <a:t>Bursary · detail, award, evidence</a:t>
-            </a:r>
-            <a:endParaRPr lang="en-US" sz="1200" dirty="0"/>
-          </a:p>
-        </p:txBody>
-      </p:sp>
-      <p:sp>
-        <p:nvSpPr>
-          <p:cNvPr id="18" name="Shape 16"/>
-          <p:cNvSpPr/>
-          <p:nvPr/>
-        </p:nvSpPr>
-        <p:spPr>
-          <a:xfrm flipV="1">
-            <a:off x="7320759" y="3077059"/>
-            <a:ext cx="1993392" cy="404486"/>
-          </a:xfrm>
-          <a:prstGeom prst="line">
-            <a:avLst/>
-          </a:prstGeom>
-          <a:noFill/>
-          <a:ln w="22225">
-            <a:solidFill>
-              <a:schemeClr val="accent1"/>
-            </a:solidFill>
-            <a:prstDash val="solid"/>
-            <a:tailEnd type="triangle"/>
-          </a:ln>
-        </p:spPr>
-      </p:sp>
-      <p:sp>
-        <p:nvSpPr>
-          <p:cNvPr id="19" name="Shape 17"/>
-          <p:cNvSpPr/>
-          <p:nvPr/>
-        </p:nvSpPr>
-        <p:spPr>
-          <a:xfrm flipH="1">
-            <a:off x="7346217" y="3202519"/>
-            <a:ext cx="1993392" cy="404486"/>
-          </a:xfrm>
-          <a:prstGeom prst="line">
-            <a:avLst/>
-          </a:prstGeom>
-          <a:noFill/>
-          <a:ln w="22225">
-            <a:solidFill>
-              <a:schemeClr val="accent3"/>
-            </a:solidFill>
-            <a:prstDash val="dash"/>
-            <a:tailEnd type="triangle"/>
-          </a:ln>
-        </p:spPr>
-      </p:sp>
-      <p:sp>
-        <p:nvSpPr>
-          <p:cNvPr id="20" name="spoke Student Self-Service"/>
-          <p:cNvSpPr/>
-          <p:nvPr/>
-        </p:nvSpPr>
-        <p:spPr>
-          <a:xfrm>
-            <a:off x="9372600" y="3931920"/>
-            <a:ext cx="2240280" cy="777240"/>
-          </a:xfrm>
-          <a:prstGeom prst="roundRect">
-            <a:avLst>
-              <a:gd name="adj" fmla="val 9412"/>
-            </a:avLst>
-          </a:prstGeom>
-          <a:solidFill>
-            <a:schemeClr val="accent5"/>
-          </a:solidFill>
-          <a:ln w="12700">
-            <a:solidFill>
-              <a:schemeClr val="accent5"/>
-            </a:solidFill>
-            <a:prstDash val="solid"/>
-          </a:ln>
-        </p:spPr>
-      </p:sp>
-      <p:sp>
-        <p:nvSpPr>
-          <p:cNvPr id="21" name="spoke Student Self-Service text"/>
-          <p:cNvSpPr txBox="1"/>
-          <p:nvPr/>
-        </p:nvSpPr>
-        <p:spPr>
-          <a:xfrm>
-            <a:off x="9418320" y="3931920"/>
-            <a:ext cx="2148840" cy="777240"/>
-          </a:xfrm>
-          <a:prstGeom prst="rect">
-            <a:avLst/>
-          </a:prstGeom>
-          <a:noFill/>
-          <a:ln/>
-        </p:spPr>
-        <p:txBody>
-          <a:bodyPr wrap="square" lIns="25400" tIns="25400" rIns="25400" bIns="25400" rtlCol="0" anchor="ctr"/>
-          <a:lstStyle/>
-          <a:p>
-            <a:pPr algn="ctr" indent="0" marL="0">
-              <a:buNone/>
-            </a:pPr>
-            <a:r>
-              <a:rPr lang="en-US" sz="1200" b="1" dirty="0">
-                <a:solidFill>
-                  <a:schemeClr val="tx1"/>
-                </a:solidFill>
-              </a:rPr>
-              <a:t>Student Self-Service</a:t>
-            </a:r>
-            <a:endParaRPr lang="en-US" sz="1200" dirty="0"/>
-          </a:p>
-          <a:p>
-            <a:pPr algn="ctr" indent="0" marL="0">
-              <a:buNone/>
-            </a:pPr>
-            <a:r>
-              <a:rPr lang="en-US" sz="1000" dirty="0">
-                <a:solidFill>
-                  <a:schemeClr val="tx1"/>
-                </a:solidFill>
-              </a:rPr>
-              <a:t>Student Portal · enrolment, course</a:t>
-            </a:r>
-            <a:endParaRPr lang="en-US" sz="1200" dirty="0"/>
-          </a:p>
-        </p:txBody>
-      </p:sp>
-      <p:sp>
-        <p:nvSpPr>
-          <p:cNvPr id="22" name="Shape 20"/>
-          <p:cNvSpPr/>
-          <p:nvPr/>
-        </p:nvSpPr>
-        <p:spPr>
-          <a:xfrm>
-            <a:off x="7341093" y="3878927"/>
-            <a:ext cx="1993392" cy="238543"/>
-          </a:xfrm>
-          <a:prstGeom prst="line">
-            <a:avLst/>
-          </a:prstGeom>
-          <a:noFill/>
-          <a:ln w="22225">
-            <a:solidFill>
-              <a:schemeClr val="accent1"/>
-            </a:solidFill>
-            <a:prstDash val="solid"/>
-            <a:tailEnd type="triangle"/>
-          </a:ln>
-        </p:spPr>
-      </p:sp>
-      <p:sp>
-        <p:nvSpPr>
-          <p:cNvPr id="23" name="Shape 21"/>
-          <p:cNvSpPr/>
-          <p:nvPr/>
-        </p:nvSpPr>
-        <p:spPr>
-          <a:xfrm flipH="1" flipV="1">
-            <a:off x="7325883" y="4006036"/>
-            <a:ext cx="1993392" cy="238543"/>
-          </a:xfrm>
-          <a:prstGeom prst="line">
-            <a:avLst/>
-          </a:prstGeom>
-          <a:noFill/>
-          <a:ln w="22225">
-            <a:solidFill>
-              <a:schemeClr val="accent3"/>
-            </a:solidFill>
-            <a:prstDash val="dash"/>
-            <a:tailEnd type="triangle"/>
-          </a:ln>
-        </p:spPr>
-      </p:sp>
-      <p:sp>
-        <p:nvSpPr>
-          <p:cNvPr id="24" name="spoke Data Connector"/>
-          <p:cNvSpPr/>
-          <p:nvPr/>
-        </p:nvSpPr>
-        <p:spPr>
-          <a:xfrm>
-            <a:off x="9372600" y="5120640"/>
-            <a:ext cx="2240280" cy="777240"/>
-          </a:xfrm>
-          <a:prstGeom prst="roundRect">
-            <a:avLst>
-              <a:gd name="adj" fmla="val 9412"/>
-            </a:avLst>
-          </a:prstGeom>
-          <a:solidFill>
-            <a:schemeClr val="accent5"/>
-          </a:solidFill>
-          <a:ln w="12700">
-            <a:solidFill>
-              <a:schemeClr val="accent5"/>
-            </a:solidFill>
-            <a:prstDash val="solid"/>
-          </a:ln>
-        </p:spPr>
-      </p:sp>
-      <p:sp>
-        <p:nvSpPr>
-          <p:cNvPr id="25" name="spoke Data Connector text"/>
-          <p:cNvSpPr txBox="1"/>
-          <p:nvPr/>
-        </p:nvSpPr>
-        <p:spPr>
-          <a:xfrm>
-            <a:off x="9418320" y="5120640"/>
-            <a:ext cx="2148840" cy="777240"/>
-          </a:xfrm>
-          <a:prstGeom prst="rect">
-            <a:avLst/>
-          </a:prstGeom>
-          <a:noFill/>
-          <a:ln/>
-        </p:spPr>
-        <p:txBody>
-          <a:bodyPr wrap="square" lIns="25400" tIns="25400" rIns="25400" bIns="25400" rtlCol="0" anchor="ctr"/>
-          <a:lstStyle/>
-          <a:p>
-            <a:pPr algn="ctr" indent="0" marL="0">
-              <a:buNone/>
-            </a:pPr>
-            <a:r>
-              <a:rPr lang="en-US" sz="1200" b="1" dirty="0">
-                <a:solidFill>
-                  <a:schemeClr val="tx1"/>
-                </a:solidFill>
-              </a:rPr>
-              <a:t>Data Connector</a:t>
-            </a:r>
-            <a:endParaRPr lang="en-US" sz="1200" dirty="0"/>
-          </a:p>
-          <a:p>
-            <a:pPr algn="ctr" indent="0" marL="0">
-              <a:buNone/>
-            </a:pPr>
-            <a:r>
-              <a:rPr lang="en-US" sz="1000" dirty="0">
-                <a:solidFill>
-                  <a:schemeClr val="tx1"/>
-                </a:solidFill>
-              </a:rPr>
-              <a:t>SQL Server → Power BI</a:t>
-            </a:r>
-            <a:endParaRPr lang="en-US" sz="1200" dirty="0"/>
-          </a:p>
-        </p:txBody>
-      </p:sp>
-      <p:sp>
-        <p:nvSpPr>
-          <p:cNvPr id="26" name="Shape 24"/>
-          <p:cNvSpPr/>
-          <p:nvPr/>
-        </p:nvSpPr>
-        <p:spPr>
-          <a:xfrm>
-            <a:off x="7333488" y="4276461"/>
-            <a:ext cx="2046183" cy="798459"/>
-          </a:xfrm>
-          <a:prstGeom prst="line">
-            <a:avLst/>
-          </a:prstGeom>
-          <a:noFill/>
-          <a:ln w="22225">
-            <a:solidFill>
-              <a:schemeClr val="accent1"/>
-            </a:solidFill>
-            <a:prstDash val="solid"/>
-            <a:tailEnd type="triangle"/>
-          </a:ln>
-        </p:spPr>
-      </p:sp>
-      <p:sp>
-        <p:nvSpPr>
-          <p:cNvPr id="27" name="spoke Student Record"/>
-          <p:cNvSpPr/>
-          <p:nvPr/>
-        </p:nvSpPr>
-        <p:spPr>
-          <a:xfrm>
-            <a:off x="6400800" y="5120640"/>
-            <a:ext cx="2240280" cy="777240"/>
-          </a:xfrm>
-          <a:prstGeom prst="roundRect">
-            <a:avLst>
-              <a:gd name="adj" fmla="val 9412"/>
-            </a:avLst>
-          </a:prstGeom>
-          <a:solidFill>
-            <a:schemeClr val="accent5"/>
-          </a:solidFill>
-          <a:ln w="12700">
-            <a:solidFill>
-              <a:schemeClr val="accent5"/>
-            </a:solidFill>
-            <a:prstDash val="solid"/>
-          </a:ln>
-        </p:spPr>
-      </p:sp>
-      <p:sp>
-        <p:nvSpPr>
-          <p:cNvPr id="28" name="spoke Student Record text"/>
-          <p:cNvSpPr txBox="1"/>
-          <p:nvPr/>
-        </p:nvSpPr>
-        <p:spPr>
-          <a:xfrm>
-            <a:off x="6446520" y="5120640"/>
-            <a:ext cx="2148840" cy="777240"/>
-          </a:xfrm>
-          <a:prstGeom prst="rect">
-            <a:avLst/>
-          </a:prstGeom>
-          <a:noFill/>
-          <a:ln/>
-        </p:spPr>
-        <p:txBody>
-          <a:bodyPr wrap="square" lIns="25400" tIns="25400" rIns="25400" bIns="25400" rtlCol="0" anchor="ctr"/>
-          <a:lstStyle/>
-          <a:p>
-            <a:pPr algn="ctr" indent="0" marL="0">
-              <a:buNone/>
-            </a:pPr>
-            <a:r>
-              <a:rPr lang="en-US" sz="1200" b="1" dirty="0">
-                <a:solidFill>
-                  <a:schemeClr val="tx1"/>
-                </a:solidFill>
-              </a:rPr>
-              <a:t>Student Record</a:t>
-            </a:r>
-            <a:endParaRPr lang="en-US" sz="1200" dirty="0"/>
-          </a:p>
-          <a:p>
-            <a:pPr algn="ctr" indent="0" marL="0">
-              <a:buNone/>
-            </a:pPr>
-            <a:r>
-              <a:rPr lang="en-US" sz="1000" dirty="0">
-                <a:solidFill>
-                  <a:schemeClr val="tx1"/>
-                </a:solidFill>
-              </a:rPr>
-              <a:t>Dataserve</a:t>
-            </a:r>
-            <a:endParaRPr lang="en-US" sz="1200" dirty="0"/>
-          </a:p>
-        </p:txBody>
-      </p:sp>
-      <p:sp>
-        <p:nvSpPr>
-          <p:cNvPr id="29" name="Shape 27"/>
-          <p:cNvSpPr/>
-          <p:nvPr/>
-        </p:nvSpPr>
-        <p:spPr>
-          <a:xfrm>
-            <a:off x="6591971" y="4389120"/>
-            <a:ext cx="568757" cy="685800"/>
-          </a:xfrm>
-          <a:prstGeom prst="line">
-            <a:avLst/>
-          </a:prstGeom>
-          <a:noFill/>
-          <a:ln w="22225">
-            <a:solidFill>
-              <a:schemeClr val="accent1"/>
-            </a:solidFill>
-            <a:prstDash val="solid"/>
-            <a:tailEnd type="triangle"/>
-          </a:ln>
-        </p:spPr>
-      </p:sp>
-      <p:sp>
-        <p:nvSpPr>
-          <p:cNvPr id="30" name="spoke Apprenticeship E-portfolio"/>
-          <p:cNvSpPr/>
-          <p:nvPr/>
-        </p:nvSpPr>
-        <p:spPr>
-          <a:xfrm>
-            <a:off x="3703320" y="5120640"/>
-            <a:ext cx="2240280" cy="777240"/>
-          </a:xfrm>
-          <a:prstGeom prst="roundRect">
-            <a:avLst>
-              <a:gd name="adj" fmla="val 9412"/>
-            </a:avLst>
-          </a:prstGeom>
-          <a:solidFill>
-            <a:srgbClr val="FDF0DF"/>
-          </a:solidFill>
-          <a:ln w="12700">
-            <a:solidFill>
-              <a:srgbClr val="FDF0DF"/>
-            </a:solidFill>
-            <a:prstDash val="solid"/>
-          </a:ln>
-        </p:spPr>
-      </p:sp>
-      <p:sp>
-        <p:nvSpPr>
-          <p:cNvPr id="31" name="spoke Apprenticeship E-portfolio text"/>
-          <p:cNvSpPr txBox="1"/>
-          <p:nvPr/>
-        </p:nvSpPr>
-        <p:spPr>
-          <a:xfrm>
-            <a:off x="3749040" y="5120640"/>
-            <a:ext cx="2148840" cy="777240"/>
-          </a:xfrm>
-          <a:prstGeom prst="rect">
-            <a:avLst/>
-          </a:prstGeom>
-          <a:noFill/>
-          <a:ln/>
-        </p:spPr>
-        <p:txBody>
-          <a:bodyPr wrap="square" lIns="25400" tIns="25400" rIns="25400" bIns="25400" rtlCol="0" anchor="ctr"/>
-          <a:lstStyle/>
-          <a:p>
-            <a:pPr algn="ctr" indent="0" marL="0">
-              <a:buNone/>
-            </a:pPr>
-            <a:r>
-              <a:rPr lang="en-US" sz="1200" b="1" dirty="0">
-                <a:solidFill>
-                  <a:schemeClr val="tx1"/>
-                </a:solidFill>
-              </a:rPr>
-              <a:t>Apprenticeship E-portfolio</a:t>
-            </a:r>
-            <a:endParaRPr lang="en-US" sz="1200" dirty="0"/>
-          </a:p>
-          <a:p>
-            <a:pPr algn="ctr" indent="0" marL="0">
-              <a:buNone/>
-            </a:pPr>
-            <a:r>
-              <a:rPr lang="en-US" sz="1000" dirty="0">
-                <a:solidFill>
-                  <a:schemeClr val="tx1"/>
-                </a:solidFill>
-              </a:rPr>
-              <a:t>Onefile</a:t>
-            </a:r>
-            <a:endParaRPr lang="en-US" sz="1200" dirty="0"/>
-          </a:p>
-        </p:txBody>
-      </p:sp>
-      <p:sp>
-        <p:nvSpPr>
-          <p:cNvPr id="32" name="Shape 30"/>
-          <p:cNvSpPr/>
-          <p:nvPr/>
-        </p:nvSpPr>
-        <p:spPr>
-          <a:xfrm flipH="1">
-            <a:off x="5146609" y="4389120"/>
-            <a:ext cx="510235" cy="685800"/>
-          </a:xfrm>
-          <a:prstGeom prst="line">
-            <a:avLst/>
-          </a:prstGeom>
-          <a:noFill/>
-          <a:ln w="22225">
-            <a:solidFill>
-              <a:schemeClr val="accent3"/>
-            </a:solidFill>
-            <a:prstDash val="dash"/>
-            <a:tailEnd type="triangle"/>
-          </a:ln>
-        </p:spPr>
-      </p:sp>
-      <p:sp>
-        <p:nvSpPr>
-          <p:cNvPr id="33" name="spoke HR &amp; Payroll"/>
-          <p:cNvSpPr/>
-          <p:nvPr/>
-        </p:nvSpPr>
-        <p:spPr>
-          <a:xfrm>
-            <a:off x="548640" y="5120640"/>
-            <a:ext cx="2240280" cy="777240"/>
-          </a:xfrm>
-          <a:prstGeom prst="roundRect">
-            <a:avLst>
-              <a:gd name="adj" fmla="val 9412"/>
-            </a:avLst>
-          </a:prstGeom>
-          <a:solidFill>
-            <a:srgbClr val="FDF0DF"/>
-          </a:solidFill>
-          <a:ln w="12700">
-            <a:solidFill>
-              <a:srgbClr val="FDF0DF"/>
-            </a:solidFill>
-            <a:prstDash val="solid"/>
-          </a:ln>
-        </p:spPr>
-      </p:sp>
-      <p:sp>
-        <p:nvSpPr>
-          <p:cNvPr id="34" name="spoke HR &amp; Payroll text"/>
-          <p:cNvSpPr txBox="1"/>
-          <p:nvPr/>
-        </p:nvSpPr>
-        <p:spPr>
-          <a:xfrm>
-            <a:off x="594360" y="5120640"/>
-            <a:ext cx="2148840" cy="777240"/>
-          </a:xfrm>
-          <a:prstGeom prst="rect">
-            <a:avLst/>
-          </a:prstGeom>
-          <a:noFill/>
-          <a:ln/>
-        </p:spPr>
-        <p:txBody>
-          <a:bodyPr wrap="square" lIns="25400" tIns="25400" rIns="25400" bIns="25400" rtlCol="0" anchor="ctr"/>
-          <a:lstStyle/>
-          <a:p>
-            <a:pPr algn="ctr" indent="0" marL="0">
-              <a:buNone/>
-            </a:pPr>
-            <a:r>
-              <a:rPr lang="en-US" sz="1200" b="1" dirty="0">
-                <a:solidFill>
-                  <a:schemeClr val="tx1"/>
-                </a:solidFill>
-              </a:rPr>
-              <a:t>HR &amp; Payroll</a:t>
-            </a:r>
-            <a:endParaRPr lang="en-US" sz="1200" dirty="0"/>
-          </a:p>
-          <a:p>
-            <a:pPr algn="ctr" indent="0" marL="0">
-              <a:buNone/>
-            </a:pPr>
-            <a:r>
-              <a:rPr lang="en-US" sz="1000" dirty="0">
-                <a:solidFill>
-                  <a:schemeClr val="tx1"/>
-                </a:solidFill>
-              </a:rPr>
-              <a:t>iTrent · new / transfer / leaver</a:t>
-            </a:r>
-            <a:endParaRPr lang="en-US" sz="1200" dirty="0"/>
-          </a:p>
-        </p:txBody>
-      </p:sp>
-      <p:sp>
-        <p:nvSpPr>
-          <p:cNvPr id="35" name="Shape 33"/>
-          <p:cNvSpPr/>
-          <p:nvPr/>
-        </p:nvSpPr>
-        <p:spPr>
-          <a:xfrm flipV="1">
-            <a:off x="2791115" y="4272484"/>
-            <a:ext cx="2073493" cy="802436"/>
-          </a:xfrm>
-          <a:prstGeom prst="line">
-            <a:avLst/>
-          </a:prstGeom>
-          <a:noFill/>
-          <a:ln w="22225">
-            <a:solidFill>
-              <a:schemeClr val="accent3"/>
-            </a:solidFill>
-            <a:prstDash val="dash"/>
-            <a:tailEnd type="triangle"/>
-          </a:ln>
-        </p:spPr>
-      </p:sp>
-      <p:sp>
-        <p:nvSpPr>
-          <p:cNvPr id="36" name="spoke Manual data entry"/>
-          <p:cNvSpPr/>
-          <p:nvPr/>
-        </p:nvSpPr>
-        <p:spPr>
-          <a:xfrm>
-            <a:off x="548640" y="3931920"/>
-            <a:ext cx="2240280" cy="777240"/>
-          </a:xfrm>
-          <a:prstGeom prst="roundRect">
-            <a:avLst>
-              <a:gd name="adj" fmla="val 9412"/>
-            </a:avLst>
-          </a:prstGeom>
-          <a:solidFill>
-            <a:srgbClr val="FDF0DF"/>
-          </a:solidFill>
-          <a:ln w="12700">
-            <a:solidFill>
-              <a:srgbClr val="FDF0DF"/>
-            </a:solidFill>
-            <a:prstDash val="solid"/>
-          </a:ln>
-        </p:spPr>
-      </p:sp>
-      <p:sp>
-        <p:nvSpPr>
-          <p:cNvPr id="37" name="spoke Manual data entry text"/>
-          <p:cNvSpPr txBox="1"/>
-          <p:nvPr/>
-        </p:nvSpPr>
-        <p:spPr>
-          <a:xfrm>
-            <a:off x="594360" y="3931920"/>
-            <a:ext cx="2148840" cy="777240"/>
-          </a:xfrm>
-          <a:prstGeom prst="rect">
-            <a:avLst/>
-          </a:prstGeom>
-          <a:noFill/>
-          <a:ln/>
-        </p:spPr>
-        <p:txBody>
-          <a:bodyPr wrap="square" lIns="25400" tIns="25400" rIns="25400" bIns="25400" rtlCol="0" anchor="ctr"/>
-          <a:lstStyle/>
-          <a:p>
-            <a:pPr algn="ctr" indent="0" marL="0">
-              <a:buNone/>
-            </a:pPr>
-            <a:r>
-              <a:rPr lang="en-US" sz="1200" b="1" dirty="0">
-                <a:solidFill>
-                  <a:schemeClr val="tx1"/>
-                </a:solidFill>
-              </a:rPr>
-              <a:t>Manual data entry</a:t>
-            </a:r>
-            <a:endParaRPr lang="en-US" sz="1200" dirty="0"/>
-          </a:p>
-          <a:p>
-            <a:pPr algn="ctr" indent="0" marL="0">
-              <a:buNone/>
-            </a:pPr>
-            <a:r>
-              <a:rPr lang="en-US" sz="1000" dirty="0">
-                <a:solidFill>
-                  <a:schemeClr val="tx1"/>
-                </a:solidFill>
-              </a:rPr>
-              <a:t>Forms keyed in by staff</a:t>
-            </a:r>
-            <a:endParaRPr lang="en-US" sz="1200" dirty="0"/>
-          </a:p>
-        </p:txBody>
-      </p:sp>
-      <p:sp>
-        <p:nvSpPr>
-          <p:cNvPr id="38" name="Shape 36"/>
-          <p:cNvSpPr/>
-          <p:nvPr/>
-        </p:nvSpPr>
-        <p:spPr>
-          <a:xfrm flipV="1">
-            <a:off x="2834640" y="3941262"/>
-            <a:ext cx="2029968" cy="240915"/>
-          </a:xfrm>
-          <a:prstGeom prst="line">
-            <a:avLst/>
-          </a:prstGeom>
-          <a:noFill/>
-          <a:ln w="22225">
-            <a:solidFill>
-              <a:schemeClr val="accent3"/>
-            </a:solidFill>
-            <a:prstDash val="dash"/>
-            <a:tailEnd type="triangle"/>
-          </a:ln>
-        </p:spPr>
-      </p:sp>
-      <p:sp>
-        <p:nvSpPr>
-          <p:cNvPr id="39" name="spoke School &amp; Employer Portal"/>
-          <p:cNvSpPr/>
-          <p:nvPr/>
-        </p:nvSpPr>
-        <p:spPr>
-          <a:xfrm>
-            <a:off x="548640" y="2606040"/>
-            <a:ext cx="2240280" cy="777240"/>
-          </a:xfrm>
-          <a:prstGeom prst="roundRect">
-            <a:avLst>
-              <a:gd name="adj" fmla="val 9412"/>
-            </a:avLst>
-          </a:prstGeom>
-          <a:solidFill>
-            <a:schemeClr val="accent5"/>
-          </a:solidFill>
-          <a:ln w="12700">
-            <a:solidFill>
-              <a:schemeClr val="accent5"/>
-            </a:solidFill>
-            <a:prstDash val="solid"/>
-          </a:ln>
-        </p:spPr>
-      </p:sp>
-      <p:sp>
-        <p:nvSpPr>
-          <p:cNvPr id="40" name="spoke School &amp; Employer Portal text"/>
-          <p:cNvSpPr txBox="1"/>
-          <p:nvPr/>
-        </p:nvSpPr>
-        <p:spPr>
-          <a:xfrm>
-            <a:off x="594360" y="2606040"/>
-            <a:ext cx="2148840" cy="777240"/>
-          </a:xfrm>
-          <a:prstGeom prst="rect">
-            <a:avLst/>
-          </a:prstGeom>
-          <a:noFill/>
-          <a:ln/>
-        </p:spPr>
-        <p:txBody>
-          <a:bodyPr wrap="square" lIns="25400" tIns="25400" rIns="25400" bIns="25400" rtlCol="0" anchor="ctr"/>
-          <a:lstStyle/>
-          <a:p>
-            <a:pPr algn="ctr" indent="0" marL="0">
-              <a:buNone/>
-            </a:pPr>
-            <a:r>
-              <a:rPr lang="en-US" sz="1200" b="1" dirty="0">
-                <a:solidFill>
-                  <a:schemeClr val="tx1"/>
-                </a:solidFill>
-              </a:rPr>
-              <a:t>School &amp; Employer Portal</a:t>
-            </a:r>
-            <a:endParaRPr lang="en-US" sz="1200" dirty="0"/>
-          </a:p>
-          <a:p>
-            <a:pPr algn="ctr" indent="0" marL="0">
-              <a:buNone/>
-            </a:pPr>
-            <a:r>
-              <a:rPr lang="en-US" sz="1000" dirty="0">
-                <a:solidFill>
-                  <a:schemeClr val="tx1"/>
-                </a:solidFill>
-              </a:rPr>
-              <a:t>FVC Portal · school transition</a:t>
-            </a:r>
-            <a:endParaRPr lang="en-US" sz="1200" dirty="0"/>
-          </a:p>
-        </p:txBody>
-      </p:sp>
-      <p:sp>
-        <p:nvSpPr>
-          <p:cNvPr id="41" name="Shape 39"/>
-          <p:cNvSpPr/>
-          <p:nvPr/>
-        </p:nvSpPr>
-        <p:spPr>
-          <a:xfrm flipH="1" flipV="1">
-            <a:off x="2823264" y="3268202"/>
-            <a:ext cx="2029968" cy="366609"/>
-          </a:xfrm>
-          <a:prstGeom prst="line">
-            <a:avLst/>
-          </a:prstGeom>
-          <a:noFill/>
-          <a:ln w="22225">
-            <a:solidFill>
-              <a:schemeClr val="accent1"/>
-            </a:solidFill>
-            <a:prstDash val="solid"/>
-            <a:tailEnd type="triangle"/>
-          </a:ln>
-        </p:spPr>
-      </p:sp>
-      <p:sp>
-        <p:nvSpPr>
-          <p:cNvPr id="42" name="Shape 40"/>
-          <p:cNvSpPr/>
-          <p:nvPr/>
-        </p:nvSpPr>
-        <p:spPr>
-          <a:xfrm>
-            <a:off x="2846016" y="3142224"/>
-            <a:ext cx="2029968" cy="366609"/>
-          </a:xfrm>
-          <a:prstGeom prst="line">
-            <a:avLst/>
-          </a:prstGeom>
-          <a:noFill/>
-          <a:ln w="22225">
-            <a:solidFill>
-              <a:schemeClr val="accent3"/>
-            </a:solidFill>
-            <a:prstDash val="dash"/>
-            <a:tailEnd type="triangle"/>
-          </a:ln>
-        </p:spPr>
-      </p:sp>
-      <p:sp>
-        <p:nvSpPr>
-          <p:cNvPr id="43" name="Shape 41"/>
-          <p:cNvSpPr/>
-          <p:nvPr/>
-        </p:nvSpPr>
-        <p:spPr>
-          <a:xfrm>
-            <a:off x="548640" y="6217920"/>
-            <a:ext cx="548640" cy="914"/>
-          </a:xfrm>
-          <a:prstGeom prst="line">
-            <a:avLst/>
-          </a:prstGeom>
-          <a:noFill/>
-          <a:ln w="22225">
-            <a:solidFill>
-              <a:schemeClr val="accent1"/>
-            </a:solidFill>
-            <a:prstDash val="solid"/>
-            <a:tailEnd type="triangle"/>
-          </a:ln>
-        </p:spPr>
-      </p:sp>
-      <p:sp>
-        <p:nvSpPr>
-          <p:cNvPr id="44" name="Text 42"/>
-          <p:cNvSpPr txBox="1"/>
-          <p:nvPr/>
-        </p:nvSpPr>
-        <p:spPr>
-          <a:xfrm>
-            <a:off x="1188720" y="6080760"/>
-            <a:ext cx="1463040" cy="274320"/>
-          </a:xfrm>
-          <a:prstGeom prst="rect">
-            <a:avLst/>
-          </a:prstGeom>
-          <a:noFill/>
-          <a:ln/>
-        </p:spPr>
-        <p:txBody>
-          <a:bodyPr wrap="square" lIns="0" tIns="0" rIns="0" bIns="0" rtlCol="0" anchor="ctr"/>
+            <a:off x="7315200" y="5760720"/>
+            <a:ext cx="4114800" cy="457200"/>
+          </a:xfrm>
+          <a:prstGeom prst="rect">
+            <a:avLst/>
+          </a:prstGeom>
+          <a:noFill/>
+          <a:ln/>
+        </p:spPr>
+        <p:txBody>
+          <a:bodyPr wrap="square" lIns="0" tIns="0" rIns="0" bIns="0" rtlCol="0" anchor="b"/>
           <a:lstStyle/>
           <a:p>
             <a:pPr indent="0" marL="0">
               <a:buNone/>
             </a:pPr>
             <a:r>
-              <a:rPr lang="en-US" sz="1100" dirty="0">
-                <a:solidFill>
-                  <a:schemeClr val="tx1"/>
-                </a:solidFill>
-              </a:rPr>
-              <a:t>Automated feed</a:t>
-            </a:r>
-            <a:endParaRPr lang="en-US" sz="1100" dirty="0"/>
-          </a:p>
-        </p:txBody>
-      </p:sp>
-      <p:sp>
-        <p:nvSpPr>
-          <p:cNvPr id="45" name="Shape 43"/>
-          <p:cNvSpPr/>
-          <p:nvPr/>
-        </p:nvSpPr>
-        <p:spPr>
-          <a:xfrm>
-            <a:off x="2743200" y="6217920"/>
-            <a:ext cx="548640" cy="914"/>
-          </a:xfrm>
-          <a:prstGeom prst="line">
-            <a:avLst/>
-          </a:prstGeom>
-          <a:noFill/>
-          <a:ln w="22225">
-            <a:solidFill>
-              <a:schemeClr val="accent3"/>
-            </a:solidFill>
-            <a:prstDash val="dash"/>
-            <a:tailEnd type="triangle"/>
-          </a:ln>
-        </p:spPr>
-      </p:sp>
-      <p:sp>
-        <p:nvSpPr>
-          <p:cNvPr id="46" name="Text 44"/>
-          <p:cNvSpPr txBox="1"/>
-          <p:nvPr/>
-        </p:nvSpPr>
-        <p:spPr>
-          <a:xfrm>
-            <a:off x="3383280" y="6080760"/>
-            <a:ext cx="1828800" cy="274320"/>
-          </a:xfrm>
-          <a:prstGeom prst="rect">
-            <a:avLst/>
-          </a:prstGeom>
-          <a:noFill/>
-          <a:ln/>
-        </p:spPr>
-        <p:txBody>
-          <a:bodyPr wrap="square" lIns="0" tIns="0" rIns="0" bIns="0" rtlCol="0" anchor="ctr"/>
-          <a:lstStyle/>
-          <a:p>
-            <a:pPr indent="0" marL="0">
-              <a:buNone/>
-            </a:pPr>
-            <a:r>
-              <a:rPr lang="en-US" sz="1100" dirty="0">
-                <a:solidFill>
-                  <a:schemeClr val="tx1"/>
-                </a:solidFill>
-              </a:rPr>
-              <a:t>Manual / file hand-off</a:t>
-            </a:r>
-            <a:endParaRPr lang="en-US" sz="1100" dirty="0"/>
+              <a:rPr lang="en-US" sz="1050" i="1" dirty="0">
+                <a:solidFill>
+                  <a:srgbClr val="6B6F80"/>
+                </a:solidFill>
+              </a:rPr>
+              <a:t>Full detail stays in the Lucid working file.</a:t>
+            </a:r>
+            <a:endParaRPr lang="en-US" sz="1050" dirty="0"/>
           </a:p>
         </p:txBody>
       </p:sp>
@@ -8519,7 +8182,7 @@
                   <a:schemeClr val="tx2"/>
                 </a:solidFill>
               </a:rPr>
-              <a:t>Following the student: which system holds what, when</a:t>
+              <a:t>UnitE is the hub: what goes in and out</a:t>
             </a:r>
             <a:endParaRPr lang="en-US" sz="3200" dirty="0"/>
           </a:p>
@@ -8557,7 +8220,7 @@
                   <a:schemeClr val="tx1"/>
                 </a:solidFill>
               </a:rPr>
-              <a:t>The same student record travels through six stages, touching a different system at each</a:t>
+              <a:t>Every core student system exchanges data with UnitE; amber lines are still done by hand</a:t>
             </a:r>
             <a:endParaRPr lang="en-US" sz="1500" dirty="0"/>
           </a:p>
@@ -8565,79 +8228,102 @@
       </p:sp>
       <p:sp>
         <p:nvSpPr>
-          <p:cNvPr id="4" name="stage 1"/>
-          <p:cNvSpPr/>
-          <p:nvPr/>
-        </p:nvSpPr>
-        <p:spPr>
-          <a:xfrm>
-            <a:off x="548640" y="1691640"/>
-            <a:ext cx="1892808" cy="731520"/>
-          </a:xfrm>
-          <a:prstGeom prst="homePlate">
-            <a:avLst/>
+          <p:cNvPr id="4" name="hub UnitE"/>
+          <p:cNvSpPr/>
+          <p:nvPr/>
+        </p:nvSpPr>
+        <p:spPr>
+          <a:xfrm>
+            <a:off x="4910328" y="3246120"/>
+            <a:ext cx="2377440" cy="1097280"/>
+          </a:xfrm>
+          <a:prstGeom prst="roundRect">
+            <a:avLst>
+              <a:gd name="adj" fmla="val 6667"/>
+            </a:avLst>
           </a:prstGeom>
           <a:solidFill>
-            <a:schemeClr val="tx2"/>
+            <a:schemeClr val="accent1"/>
           </a:solidFill>
           <a:ln w="12700">
             <a:solidFill>
-              <a:schemeClr val="tx2"/>
+              <a:schemeClr val="accent1"/>
             </a:solidFill>
             <a:prstDash val="solid"/>
           </a:ln>
-        </p:spPr>
-      </p:sp>
-      <p:sp>
-        <p:nvSpPr>
-          <p:cNvPr id="5" name="Text 3"/>
+          <a:effectLst>
+            <a:outerShdw sx="100000" sy="100000" kx="0" ky="0" algn="bl" rotWithShape="0" blurRad="50800" dist="25400" dir="5400000">
+              <a:srgbClr val="000000">
+                <a:alpha val="15000"/>
+              </a:srgbClr>
+            </a:outerShdw>
+          </a:effectLst>
+        </p:spPr>
+      </p:sp>
+      <p:sp>
+        <p:nvSpPr>
+          <p:cNvPr id="5" name="hub UnitE text"/>
           <p:cNvSpPr txBox="1"/>
           <p:nvPr/>
         </p:nvSpPr>
         <p:spPr>
           <a:xfrm>
-            <a:off x="822960" y="1691640"/>
-            <a:ext cx="1417320" cy="731520"/>
-          </a:xfrm>
-          <a:prstGeom prst="rect">
-            <a:avLst/>
-          </a:prstGeom>
-          <a:noFill/>
-          <a:ln/>
-        </p:spPr>
-        <p:txBody>
-          <a:bodyPr wrap="square" lIns="0" tIns="0" rIns="0" bIns="0" rtlCol="0" anchor="ctr"/>
+            <a:off x="4956048" y="3246120"/>
+            <a:ext cx="2286000" cy="1097280"/>
+          </a:xfrm>
+          <a:prstGeom prst="rect">
+            <a:avLst/>
+          </a:prstGeom>
+          <a:noFill/>
+          <a:ln/>
+        </p:spPr>
+        <p:txBody>
+          <a:bodyPr wrap="square" lIns="25400" tIns="25400" rIns="25400" bIns="25400" rtlCol="0" anchor="ctr"/>
           <a:lstStyle/>
           <a:p>
             <a:pPr algn="ctr" indent="0" marL="0">
               <a:buNone/>
             </a:pPr>
             <a:r>
-              <a:rPr lang="en-US" sz="1300" b="1" dirty="0">
+              <a:rPr lang="en-US" sz="2000" b="1" dirty="0">
                 <a:solidFill>
                   <a:schemeClr val="bg1"/>
                 </a:solidFill>
               </a:rPr>
-              <a:t>Attract &amp; enquire</a:t>
-            </a:r>
-            <a:endParaRPr lang="en-US" sz="1300" dirty="0"/>
-          </a:p>
-        </p:txBody>
-      </p:sp>
-      <p:sp>
-        <p:nvSpPr>
-          <p:cNvPr id="6" name="stage systems 1"/>
-          <p:cNvSpPr/>
-          <p:nvPr/>
-        </p:nvSpPr>
-        <p:spPr>
-          <a:xfrm>
-            <a:off x="548640" y="2651760"/>
-            <a:ext cx="1737360" cy="1600200"/>
+              <a:t>UnitE</a:t>
+            </a:r>
+            <a:endParaRPr lang="en-US" sz="2000" dirty="0"/>
+          </a:p>
+          <a:p>
+            <a:pPr algn="ctr" indent="0" marL="0">
+              <a:buNone/>
+            </a:pPr>
+            <a:r>
+              <a:rPr lang="en-US" sz="1100" dirty="0">
+                <a:solidFill>
+                  <a:schemeClr val="bg1"/>
+                </a:solidFill>
+              </a:rPr>
+              <a:t>Core MIS (student &amp; staff)</a:t>
+            </a:r>
+            <a:endParaRPr lang="en-US" sz="2000" dirty="0"/>
+          </a:p>
+        </p:txBody>
+      </p:sp>
+      <p:sp>
+        <p:nvSpPr>
+          <p:cNvPr id="6" name="spoke Timetable &amp; Attendance"/>
+          <p:cNvSpPr/>
+          <p:nvPr/>
+        </p:nvSpPr>
+        <p:spPr>
+          <a:xfrm>
+            <a:off x="548640" y="1600200"/>
+            <a:ext cx="2240280" cy="777240"/>
           </a:xfrm>
           <a:prstGeom prst="roundRect">
             <a:avLst>
-              <a:gd name="adj" fmla="val 4571"/>
+              <a:gd name="adj" fmla="val 9412"/>
             </a:avLst>
           </a:prstGeom>
           <a:solidFill>
@@ -8653,234 +8339,92 @@
       </p:sp>
       <p:sp>
         <p:nvSpPr>
-          <p:cNvPr id="7" name="Text 5"/>
+          <p:cNvPr id="7" name="spoke Timetable &amp; Attendance text"/>
           <p:cNvSpPr txBox="1"/>
           <p:nvPr/>
         </p:nvSpPr>
         <p:spPr>
           <a:xfrm>
-            <a:off x="658368" y="2697480"/>
-            <a:ext cx="1554480" cy="1508760"/>
-          </a:xfrm>
-          <a:prstGeom prst="rect">
-            <a:avLst/>
-          </a:prstGeom>
-          <a:noFill/>
-          <a:ln/>
-        </p:spPr>
-        <p:txBody>
-          <a:bodyPr wrap="square" lIns="0" tIns="0" rIns="0" bIns="0" rtlCol="0" anchor="t"/>
-          <a:lstStyle/>
-          <a:p>
-            <a:pPr indent="0" marL="0">
-              <a:buNone/>
-            </a:pPr>
-            <a:r>
-              <a:rPr lang="en-US" sz="1000" b="1" dirty="0">
-                <a:solidFill>
-                  <a:srgbClr val="6B6F80"/>
-                </a:solidFill>
-              </a:rPr>
-              <a:t>Systems</a:t>
-            </a:r>
-            <a:endParaRPr lang="en-US" sz="1000" dirty="0"/>
-          </a:p>
-          <a:p>
-            <a:pPr indent="0" marL="0">
-              <a:buNone/>
-            </a:pPr>
-            <a:r>
-              <a:rPr lang="en-US" sz="1200" dirty="0">
+            <a:off x="594360" y="1600200"/>
+            <a:ext cx="2148840" cy="777240"/>
+          </a:xfrm>
+          <a:prstGeom prst="rect">
+            <a:avLst/>
+          </a:prstGeom>
+          <a:noFill/>
+          <a:ln/>
+        </p:spPr>
+        <p:txBody>
+          <a:bodyPr wrap="square" lIns="25400" tIns="25400" rIns="25400" bIns="25400" rtlCol="0" anchor="ctr"/>
+          <a:lstStyle/>
+          <a:p>
+            <a:pPr algn="ctr" indent="0" marL="0">
+              <a:buNone/>
+            </a:pPr>
+            <a:r>
+              <a:rPr lang="en-US" sz="1200" b="1" dirty="0">
                 <a:solidFill>
                   <a:schemeClr val="tx1"/>
                 </a:solidFill>
               </a:rPr>
-              <a:t>FVC Website</a:t>
-            </a:r>
-            <a:endParaRPr lang="en-US" sz="1000" dirty="0"/>
-          </a:p>
-          <a:p>
-            <a:pPr indent="0" marL="0">
-              <a:buNone/>
-            </a:pPr>
-            <a:r>
-              <a:rPr lang="en-US" sz="1200" dirty="0">
+              <a:t>Timetable &amp; Attendance</a:t>
+            </a:r>
+            <a:endParaRPr lang="en-US" sz="1200" dirty="0"/>
+          </a:p>
+          <a:p>
+            <a:pPr algn="ctr" indent="0" marL="0">
+              <a:buNone/>
+            </a:pPr>
+            <a:r>
+              <a:rPr lang="en-US" sz="1000" dirty="0">
                 <a:solidFill>
                   <a:schemeClr val="tx1"/>
                 </a:solidFill>
               </a:rPr>
-              <a:t>CRM (RUBI)</a:t>
-            </a:r>
-            <a:endParaRPr lang="en-US" sz="1000" dirty="0"/>
-          </a:p>
-          <a:p>
-            <a:pPr indent="0" marL="0">
-              <a:buNone/>
-            </a:pPr>
-            <a:r>
-              <a:rPr lang="en-US" sz="1200" dirty="0">
-                <a:solidFill>
-                  <a:schemeClr val="tx1"/>
-                </a:solidFill>
-              </a:rPr>
-              <a:t>Enquirer</a:t>
-            </a:r>
-            <a:endParaRPr lang="en-US" sz="1000" dirty="0"/>
-          </a:p>
-        </p:txBody>
-      </p:sp>
-      <p:sp>
-        <p:nvSpPr>
-          <p:cNvPr id="8" name="stage data 1"/>
-          <p:cNvSpPr/>
-          <p:nvPr/>
-        </p:nvSpPr>
-        <p:spPr>
-          <a:xfrm>
-            <a:off x="548640" y="4389120"/>
-            <a:ext cx="1737360" cy="960120"/>
+              <a:t>Celcat · timetable, attendance</a:t>
+            </a:r>
+            <a:endParaRPr lang="en-US" sz="1200" dirty="0"/>
+          </a:p>
+        </p:txBody>
+      </p:sp>
+      <p:sp>
+        <p:nvSpPr>
+          <p:cNvPr id="8" name="Shape 6"/>
+          <p:cNvSpPr/>
+          <p:nvPr/>
+        </p:nvSpPr>
+        <p:spPr>
+          <a:xfrm flipH="1" flipV="1">
+            <a:off x="2734287" y="2423160"/>
+            <a:ext cx="2130321" cy="868397"/>
+          </a:xfrm>
+          <a:prstGeom prst="line">
+            <a:avLst/>
+          </a:prstGeom>
+          <a:noFill/>
+          <a:ln w="22225">
+            <a:solidFill>
+              <a:schemeClr val="accent1"/>
+            </a:solidFill>
+            <a:prstDash val="solid"/>
+            <a:tailEnd type="triangle"/>
+          </a:ln>
+        </p:spPr>
+      </p:sp>
+      <p:sp>
+        <p:nvSpPr>
+          <p:cNvPr id="9" name="spoke Enquiry Management"/>
+          <p:cNvSpPr/>
+          <p:nvPr/>
+        </p:nvSpPr>
+        <p:spPr>
+          <a:xfrm>
+            <a:off x="3794760" y="1600200"/>
+            <a:ext cx="2240280" cy="777240"/>
           </a:xfrm>
           <a:prstGeom prst="roundRect">
             <a:avLst>
-              <a:gd name="adj" fmla="val 7619"/>
-            </a:avLst>
-          </a:prstGeom>
-          <a:solidFill>
-            <a:schemeClr val="bg2"/>
-          </a:solidFill>
-          <a:ln w="12700">
-            <a:solidFill>
-              <a:schemeClr val="bg2"/>
-            </a:solidFill>
-            <a:prstDash val="solid"/>
-          </a:ln>
-        </p:spPr>
-      </p:sp>
-      <p:sp>
-        <p:nvSpPr>
-          <p:cNvPr id="9" name="Text 7"/>
-          <p:cNvSpPr txBox="1"/>
-          <p:nvPr/>
-        </p:nvSpPr>
-        <p:spPr>
-          <a:xfrm>
-            <a:off x="658368" y="4434840"/>
-            <a:ext cx="1554480" cy="868680"/>
-          </a:xfrm>
-          <a:prstGeom prst="rect">
-            <a:avLst/>
-          </a:prstGeom>
-          <a:noFill/>
-          <a:ln/>
-        </p:spPr>
-        <p:txBody>
-          <a:bodyPr wrap="square" lIns="0" tIns="0" rIns="0" bIns="0" rtlCol="0" anchor="t"/>
-          <a:lstStyle/>
-          <a:p>
-            <a:pPr indent="0" marL="0">
-              <a:buNone/>
-            </a:pPr>
-            <a:r>
-              <a:rPr lang="en-US" sz="1000" b="1" dirty="0">
-                <a:solidFill>
-                  <a:srgbClr val="6B6F80"/>
-                </a:solidFill>
-              </a:rPr>
-              <a:t>Data</a:t>
-            </a:r>
-            <a:endParaRPr lang="en-US" sz="1000" dirty="0"/>
-          </a:p>
-          <a:p>
-            <a:pPr indent="0" marL="0">
-              <a:buNone/>
-            </a:pPr>
-            <a:r>
-              <a:rPr lang="en-US" sz="1200" dirty="0">
-                <a:solidFill>
-                  <a:schemeClr val="tx1"/>
-                </a:solidFill>
-              </a:rPr>
-              <a:t>Enquiry, contact details</a:t>
-            </a:r>
-            <a:endParaRPr lang="en-US" sz="1000" dirty="0"/>
-          </a:p>
-        </p:txBody>
-      </p:sp>
-      <p:sp>
-        <p:nvSpPr>
-          <p:cNvPr id="10" name="stage 2"/>
-          <p:cNvSpPr/>
-          <p:nvPr/>
-        </p:nvSpPr>
-        <p:spPr>
-          <a:xfrm>
-            <a:off x="2404872" y="1691640"/>
-            <a:ext cx="1892808" cy="731520"/>
-          </a:xfrm>
-          <a:prstGeom prst="chevron">
-            <a:avLst/>
-          </a:prstGeom>
-          <a:solidFill>
-            <a:schemeClr val="tx2"/>
-          </a:solidFill>
-          <a:ln w="12700">
-            <a:solidFill>
-              <a:schemeClr val="tx2"/>
-            </a:solidFill>
-            <a:prstDash val="solid"/>
-          </a:ln>
-        </p:spPr>
-      </p:sp>
-      <p:sp>
-        <p:nvSpPr>
-          <p:cNvPr id="11" name="Text 9"/>
-          <p:cNvSpPr txBox="1"/>
-          <p:nvPr/>
-        </p:nvSpPr>
-        <p:spPr>
-          <a:xfrm>
-            <a:off x="2679192" y="1691640"/>
-            <a:ext cx="1417320" cy="731520"/>
-          </a:xfrm>
-          <a:prstGeom prst="rect">
-            <a:avLst/>
-          </a:prstGeom>
-          <a:noFill/>
-          <a:ln/>
-        </p:spPr>
-        <p:txBody>
-          <a:bodyPr wrap="square" lIns="0" tIns="0" rIns="0" bIns="0" rtlCol="0" anchor="ctr"/>
-          <a:lstStyle/>
-          <a:p>
-            <a:pPr algn="ctr" indent="0" marL="0">
-              <a:buNone/>
-            </a:pPr>
-            <a:r>
-              <a:rPr lang="en-US" sz="1300" b="1" dirty="0">
-                <a:solidFill>
-                  <a:schemeClr val="bg1"/>
-                </a:solidFill>
-              </a:rPr>
-              <a:t>Apply</a:t>
-            </a:r>
-            <a:endParaRPr lang="en-US" sz="1300" dirty="0"/>
-          </a:p>
-        </p:txBody>
-      </p:sp>
-      <p:sp>
-        <p:nvSpPr>
-          <p:cNvPr id="12" name="stage systems 2"/>
-          <p:cNvSpPr/>
-          <p:nvPr/>
-        </p:nvSpPr>
-        <p:spPr>
-          <a:xfrm>
-            <a:off x="2404872" y="2651760"/>
-            <a:ext cx="1737360" cy="1600200"/>
-          </a:xfrm>
-          <a:prstGeom prst="roundRect">
-            <a:avLst>
-              <a:gd name="adj" fmla="val 4571"/>
+              <a:gd name="adj" fmla="val 9412"/>
             </a:avLst>
           </a:prstGeom>
           <a:solidFill>
@@ -8896,234 +8440,116 @@
       </p:sp>
       <p:sp>
         <p:nvSpPr>
-          <p:cNvPr id="13" name="Text 11"/>
+          <p:cNvPr id="10" name="spoke Enquiry Management text"/>
           <p:cNvSpPr txBox="1"/>
           <p:nvPr/>
         </p:nvSpPr>
         <p:spPr>
           <a:xfrm>
-            <a:off x="2514600" y="2697480"/>
-            <a:ext cx="1554480" cy="1508760"/>
-          </a:xfrm>
-          <a:prstGeom prst="rect">
-            <a:avLst/>
-          </a:prstGeom>
-          <a:noFill/>
-          <a:ln/>
-        </p:spPr>
-        <p:txBody>
-          <a:bodyPr wrap="square" lIns="0" tIns="0" rIns="0" bIns="0" rtlCol="0" anchor="t"/>
-          <a:lstStyle/>
-          <a:p>
-            <a:pPr indent="0" marL="0">
-              <a:buNone/>
-            </a:pPr>
-            <a:r>
-              <a:rPr lang="en-US" sz="1000" b="1" dirty="0">
-                <a:solidFill>
-                  <a:srgbClr val="6B6F80"/>
-                </a:solidFill>
-              </a:rPr>
-              <a:t>Systems</a:t>
-            </a:r>
-            <a:endParaRPr lang="en-US" sz="1000" dirty="0"/>
-          </a:p>
-          <a:p>
-            <a:pPr indent="0" marL="0">
-              <a:buNone/>
-            </a:pPr>
-            <a:r>
-              <a:rPr lang="en-US" sz="1200" dirty="0">
+            <a:off x="3840480" y="1600200"/>
+            <a:ext cx="2148840" cy="777240"/>
+          </a:xfrm>
+          <a:prstGeom prst="rect">
+            <a:avLst/>
+          </a:prstGeom>
+          <a:noFill/>
+          <a:ln/>
+        </p:spPr>
+        <p:txBody>
+          <a:bodyPr wrap="square" lIns="25400" tIns="25400" rIns="25400" bIns="25400" rtlCol="0" anchor="ctr"/>
+          <a:lstStyle/>
+          <a:p>
+            <a:pPr algn="ctr" indent="0" marL="0">
+              <a:buNone/>
+            </a:pPr>
+            <a:r>
+              <a:rPr lang="en-US" sz="1200" b="1" dirty="0">
                 <a:solidFill>
                   <a:schemeClr val="tx1"/>
                 </a:solidFill>
               </a:rPr>
-              <a:t>Student Registration</a:t>
-            </a:r>
-            <a:endParaRPr lang="en-US" sz="1000" dirty="0"/>
-          </a:p>
-          <a:p>
-            <a:pPr indent="0" marL="0">
-              <a:buNone/>
-            </a:pPr>
-            <a:r>
-              <a:rPr lang="en-US" sz="1200" dirty="0">
+              <a:t>Enquiry Management</a:t>
+            </a:r>
+            <a:endParaRPr lang="en-US" sz="1200" dirty="0"/>
+          </a:p>
+          <a:p>
+            <a:pPr algn="ctr" indent="0" marL="0">
+              <a:buNone/>
+            </a:pPr>
+            <a:r>
+              <a:rPr lang="en-US" sz="1000" dirty="0">
                 <a:solidFill>
                   <a:schemeClr val="tx1"/>
                 </a:solidFill>
               </a:rPr>
-              <a:t>FVC Portal (schools)</a:t>
-            </a:r>
-            <a:endParaRPr lang="en-US" sz="1000" dirty="0"/>
-          </a:p>
-          <a:p>
-            <a:pPr indent="0" marL="0">
-              <a:buNone/>
-            </a:pPr>
-            <a:r>
-              <a:rPr lang="en-US" sz="1200" dirty="0">
-                <a:solidFill>
-                  <a:schemeClr val="tx1"/>
-                </a:solidFill>
-              </a:rPr>
-              <a:t>Dante (commercial)</a:t>
-            </a:r>
-            <a:endParaRPr lang="en-US" sz="1000" dirty="0"/>
-          </a:p>
-        </p:txBody>
-      </p:sp>
-      <p:sp>
-        <p:nvSpPr>
-          <p:cNvPr id="14" name="stage data 2"/>
-          <p:cNvSpPr/>
-          <p:nvPr/>
-        </p:nvSpPr>
-        <p:spPr>
-          <a:xfrm>
-            <a:off x="2404872" y="4389120"/>
-            <a:ext cx="1737360" cy="960120"/>
-          </a:xfrm>
-          <a:prstGeom prst="roundRect">
-            <a:avLst>
-              <a:gd name="adj" fmla="val 7619"/>
-            </a:avLst>
-          </a:prstGeom>
-          <a:solidFill>
-            <a:schemeClr val="bg2"/>
-          </a:solidFill>
-          <a:ln w="12700">
-            <a:solidFill>
-              <a:schemeClr val="bg2"/>
-            </a:solidFill>
-            <a:prstDash val="solid"/>
-          </a:ln>
-        </p:spPr>
-      </p:sp>
-      <p:sp>
-        <p:nvSpPr>
-          <p:cNvPr id="15" name="Text 13"/>
-          <p:cNvSpPr txBox="1"/>
-          <p:nvPr/>
-        </p:nvSpPr>
-        <p:spPr>
-          <a:xfrm>
-            <a:off x="2514600" y="4434840"/>
-            <a:ext cx="1554480" cy="868680"/>
-          </a:xfrm>
-          <a:prstGeom prst="rect">
-            <a:avLst/>
-          </a:prstGeom>
-          <a:noFill/>
-          <a:ln/>
-        </p:spPr>
-        <p:txBody>
-          <a:bodyPr wrap="square" lIns="0" tIns="0" rIns="0" bIns="0" rtlCol="0" anchor="t"/>
-          <a:lstStyle/>
-          <a:p>
-            <a:pPr indent="0" marL="0">
-              <a:buNone/>
-            </a:pPr>
-            <a:r>
-              <a:rPr lang="en-US" sz="1000" b="1" dirty="0">
-                <a:solidFill>
-                  <a:srgbClr val="6B6F80"/>
-                </a:solidFill>
-              </a:rPr>
-              <a:t>Data</a:t>
-            </a:r>
-            <a:endParaRPr lang="en-US" sz="1000" dirty="0"/>
-          </a:p>
-          <a:p>
-            <a:pPr indent="0" marL="0">
-              <a:buNone/>
-            </a:pPr>
-            <a:r>
-              <a:rPr lang="en-US" sz="1200" dirty="0">
-                <a:solidFill>
-                  <a:schemeClr val="tx1"/>
-                </a:solidFill>
-              </a:rPr>
-              <a:t>Application, school transition</a:t>
-            </a:r>
-            <a:endParaRPr lang="en-US" sz="1000" dirty="0"/>
-          </a:p>
-        </p:txBody>
-      </p:sp>
-      <p:sp>
-        <p:nvSpPr>
-          <p:cNvPr id="16" name="stage 3"/>
-          <p:cNvSpPr/>
-          <p:nvPr/>
-        </p:nvSpPr>
-        <p:spPr>
-          <a:xfrm>
-            <a:off x="4261104" y="1691640"/>
-            <a:ext cx="1892808" cy="731520"/>
-          </a:xfrm>
-          <a:prstGeom prst="chevron">
-            <a:avLst/>
-          </a:prstGeom>
-          <a:solidFill>
-            <a:schemeClr val="accent1"/>
-          </a:solidFill>
-          <a:ln w="12700">
+              <a:t>Enquirer · application status</a:t>
+            </a:r>
+            <a:endParaRPr lang="en-US" sz="1200" dirty="0"/>
+          </a:p>
+        </p:txBody>
+      </p:sp>
+      <p:sp>
+        <p:nvSpPr>
+          <p:cNvPr id="11" name="Shape 9"/>
+          <p:cNvSpPr/>
+          <p:nvPr/>
+        </p:nvSpPr>
+        <p:spPr>
+          <a:xfrm flipH="1" flipV="1">
+            <a:off x="5146168" y="2458258"/>
+            <a:ext cx="509633" cy="777240"/>
+          </a:xfrm>
+          <a:prstGeom prst="line">
+            <a:avLst/>
+          </a:prstGeom>
+          <a:noFill/>
+          <a:ln w="22225">
             <a:solidFill>
               <a:schemeClr val="accent1"/>
             </a:solidFill>
             <a:prstDash val="solid"/>
+            <a:tailEnd type="triangle"/>
           </a:ln>
         </p:spPr>
       </p:sp>
       <p:sp>
         <p:nvSpPr>
-          <p:cNvPr id="17" name="Text 15"/>
-          <p:cNvSpPr txBox="1"/>
-          <p:nvPr/>
-        </p:nvSpPr>
-        <p:spPr>
-          <a:xfrm>
-            <a:off x="4535424" y="1691640"/>
-            <a:ext cx="1417320" cy="731520"/>
-          </a:xfrm>
-          <a:prstGeom prst="rect">
-            <a:avLst/>
-          </a:prstGeom>
-          <a:noFill/>
-          <a:ln/>
-        </p:spPr>
-        <p:txBody>
-          <a:bodyPr wrap="square" lIns="0" tIns="0" rIns="0" bIns="0" rtlCol="0" anchor="ctr"/>
-          <a:lstStyle/>
-          <a:p>
-            <a:pPr algn="ctr" indent="0" marL="0">
-              <a:buNone/>
-            </a:pPr>
-            <a:r>
-              <a:rPr lang="en-US" sz="1300" b="1" dirty="0">
-                <a:solidFill>
-                  <a:schemeClr val="bg1"/>
-                </a:solidFill>
-              </a:rPr>
-              <a:t>Enrol</a:t>
-            </a:r>
-            <a:endParaRPr lang="en-US" sz="1300" dirty="0"/>
-          </a:p>
-        </p:txBody>
-      </p:sp>
-      <p:sp>
-        <p:nvSpPr>
-          <p:cNvPr id="18" name="stage systems 3"/>
-          <p:cNvSpPr/>
-          <p:nvPr/>
-        </p:nvSpPr>
-        <p:spPr>
-          <a:xfrm>
-            <a:off x="4261104" y="2651760"/>
-            <a:ext cx="1737360" cy="1600200"/>
+          <p:cNvPr id="12" name="Shape 10"/>
+          <p:cNvSpPr/>
+          <p:nvPr/>
+        </p:nvSpPr>
+        <p:spPr>
+          <a:xfrm>
+            <a:off x="5253222" y="2388062"/>
+            <a:ext cx="509633" cy="777240"/>
+          </a:xfrm>
+          <a:prstGeom prst="line">
+            <a:avLst/>
+          </a:prstGeom>
+          <a:noFill/>
+          <a:ln w="22225">
+            <a:solidFill>
+              <a:schemeClr val="accent3"/>
+            </a:solidFill>
+            <a:prstDash val="dash"/>
+            <a:tailEnd type="triangle"/>
+          </a:ln>
+        </p:spPr>
+      </p:sp>
+      <p:sp>
+        <p:nvSpPr>
+          <p:cNvPr id="13" name="spoke Student Support"/>
+          <p:cNvSpPr/>
+          <p:nvPr/>
+        </p:nvSpPr>
+        <p:spPr>
+          <a:xfrm>
+            <a:off x="7040880" y="1600200"/>
+            <a:ext cx="2240280" cy="777240"/>
           </a:xfrm>
           <a:prstGeom prst="roundRect">
             <a:avLst>
-              <a:gd name="adj" fmla="val 4571"/>
+              <a:gd name="adj" fmla="val 9412"/>
             </a:avLst>
           </a:prstGeom>
           <a:solidFill>
@@ -9139,206 +8565,92 @@
       </p:sp>
       <p:sp>
         <p:nvSpPr>
-          <p:cNvPr id="19" name="Text 17"/>
+          <p:cNvPr id="14" name="spoke Student Support text"/>
           <p:cNvSpPr txBox="1"/>
           <p:nvPr/>
         </p:nvSpPr>
         <p:spPr>
           <a:xfrm>
-            <a:off x="4370832" y="2697480"/>
-            <a:ext cx="1554480" cy="1508760"/>
-          </a:xfrm>
-          <a:prstGeom prst="rect">
-            <a:avLst/>
-          </a:prstGeom>
-          <a:noFill/>
-          <a:ln/>
-        </p:spPr>
-        <p:txBody>
-          <a:bodyPr wrap="square" lIns="0" tIns="0" rIns="0" bIns="0" rtlCol="0" anchor="t"/>
-          <a:lstStyle/>
-          <a:p>
-            <a:pPr indent="0" marL="0">
-              <a:buNone/>
-            </a:pPr>
-            <a:r>
-              <a:rPr lang="en-US" sz="1000" b="1" dirty="0">
-                <a:solidFill>
-                  <a:srgbClr val="6B6F80"/>
-                </a:solidFill>
-              </a:rPr>
-              <a:t>Systems</a:t>
-            </a:r>
-            <a:endParaRPr lang="en-US" sz="1000" dirty="0"/>
-          </a:p>
-          <a:p>
-            <a:pPr indent="0" marL="0">
-              <a:buNone/>
-            </a:pPr>
-            <a:r>
-              <a:rPr lang="en-US" sz="1200" dirty="0">
+            <a:off x="7086600" y="1600200"/>
+            <a:ext cx="2148840" cy="777240"/>
+          </a:xfrm>
+          <a:prstGeom prst="rect">
+            <a:avLst/>
+          </a:prstGeom>
+          <a:noFill/>
+          <a:ln/>
+        </p:spPr>
+        <p:txBody>
+          <a:bodyPr wrap="square" lIns="25400" tIns="25400" rIns="25400" bIns="25400" rtlCol="0" anchor="ctr"/>
+          <a:lstStyle/>
+          <a:p>
+            <a:pPr algn="ctr" indent="0" marL="0">
+              <a:buNone/>
+            </a:pPr>
+            <a:r>
+              <a:rPr lang="en-US" sz="1200" b="1" dirty="0">
                 <a:solidFill>
                   <a:schemeClr val="tx1"/>
                 </a:solidFill>
               </a:rPr>
-              <a:t>UnitE</a:t>
-            </a:r>
-            <a:endParaRPr lang="en-US" sz="1000" dirty="0"/>
-          </a:p>
-        </p:txBody>
-      </p:sp>
-      <p:sp>
-        <p:nvSpPr>
-          <p:cNvPr id="20" name="stage data 3"/>
-          <p:cNvSpPr/>
-          <p:nvPr/>
-        </p:nvSpPr>
-        <p:spPr>
-          <a:xfrm>
-            <a:off x="4261104" y="4389120"/>
-            <a:ext cx="1737360" cy="960120"/>
+              <a:t>Student Support</a:t>
+            </a:r>
+            <a:endParaRPr lang="en-US" sz="1200" dirty="0"/>
+          </a:p>
+          <a:p>
+            <a:pPr algn="ctr" indent="0" marL="0">
+              <a:buNone/>
+            </a:pPr>
+            <a:r>
+              <a:rPr lang="en-US" sz="1000" dirty="0">
+                <a:solidFill>
+                  <a:schemeClr val="tx1"/>
+                </a:solidFill>
+              </a:rPr>
+              <a:t>TripleS · ASN, school transition</a:t>
+            </a:r>
+            <a:endParaRPr lang="en-US" sz="1200" dirty="0"/>
+          </a:p>
+        </p:txBody>
+      </p:sp>
+      <p:sp>
+        <p:nvSpPr>
+          <p:cNvPr id="15" name="Shape 13"/>
+          <p:cNvSpPr/>
+          <p:nvPr/>
+        </p:nvSpPr>
+        <p:spPr>
+          <a:xfrm flipV="1">
+            <a:off x="6777672" y="2423160"/>
+            <a:ext cx="887431" cy="777240"/>
+          </a:xfrm>
+          <a:prstGeom prst="line">
+            <a:avLst/>
+          </a:prstGeom>
+          <a:noFill/>
+          <a:ln w="22225">
+            <a:solidFill>
+              <a:schemeClr val="accent1"/>
+            </a:solidFill>
+            <a:prstDash val="solid"/>
+            <a:tailEnd type="triangle"/>
+          </a:ln>
+        </p:spPr>
+      </p:sp>
+      <p:sp>
+        <p:nvSpPr>
+          <p:cNvPr id="16" name="spoke Student Funding"/>
+          <p:cNvSpPr/>
+          <p:nvPr/>
+        </p:nvSpPr>
+        <p:spPr>
+          <a:xfrm>
+            <a:off x="9372600" y="2514600"/>
+            <a:ext cx="2240280" cy="777240"/>
           </a:xfrm>
           <a:prstGeom prst="roundRect">
             <a:avLst>
-              <a:gd name="adj" fmla="val 7619"/>
-            </a:avLst>
-          </a:prstGeom>
-          <a:solidFill>
-            <a:schemeClr val="bg2"/>
-          </a:solidFill>
-          <a:ln w="12700">
-            <a:solidFill>
-              <a:schemeClr val="bg2"/>
-            </a:solidFill>
-            <a:prstDash val="solid"/>
-          </a:ln>
-        </p:spPr>
-      </p:sp>
-      <p:sp>
-        <p:nvSpPr>
-          <p:cNvPr id="21" name="Text 19"/>
-          <p:cNvSpPr txBox="1"/>
-          <p:nvPr/>
-        </p:nvSpPr>
-        <p:spPr>
-          <a:xfrm>
-            <a:off x="4370832" y="4434840"/>
-            <a:ext cx="1554480" cy="868680"/>
-          </a:xfrm>
-          <a:prstGeom prst="rect">
-            <a:avLst/>
-          </a:prstGeom>
-          <a:noFill/>
-          <a:ln/>
-        </p:spPr>
-        <p:txBody>
-          <a:bodyPr wrap="square" lIns="0" tIns="0" rIns="0" bIns="0" rtlCol="0" anchor="t"/>
-          <a:lstStyle/>
-          <a:p>
-            <a:pPr indent="0" marL="0">
-              <a:buNone/>
-            </a:pPr>
-            <a:r>
-              <a:rPr lang="en-US" sz="1000" b="1" dirty="0">
-                <a:solidFill>
-                  <a:srgbClr val="6B6F80"/>
-                </a:solidFill>
-              </a:rPr>
-              <a:t>Data</a:t>
-            </a:r>
-            <a:endParaRPr lang="en-US" sz="1000" dirty="0"/>
-          </a:p>
-          <a:p>
-            <a:pPr indent="0" marL="0">
-              <a:buNone/>
-            </a:pPr>
-            <a:r>
-              <a:rPr lang="en-US" sz="1200" dirty="0">
-                <a:solidFill>
-                  <a:schemeClr val="tx1"/>
-                </a:solidFill>
-              </a:rPr>
-              <a:t>Student, course, enrolment</a:t>
-            </a:r>
-            <a:endParaRPr lang="en-US" sz="1000" dirty="0"/>
-          </a:p>
-        </p:txBody>
-      </p:sp>
-      <p:sp>
-        <p:nvSpPr>
-          <p:cNvPr id="22" name="stage 4"/>
-          <p:cNvSpPr/>
-          <p:nvPr/>
-        </p:nvSpPr>
-        <p:spPr>
-          <a:xfrm>
-            <a:off x="6117336" y="1691640"/>
-            <a:ext cx="1892808" cy="731520"/>
-          </a:xfrm>
-          <a:prstGeom prst="chevron">
-            <a:avLst/>
-          </a:prstGeom>
-          <a:solidFill>
-            <a:schemeClr val="tx2"/>
-          </a:solidFill>
-          <a:ln w="12700">
-            <a:solidFill>
-              <a:schemeClr val="tx2"/>
-            </a:solidFill>
-            <a:prstDash val="solid"/>
-          </a:ln>
-        </p:spPr>
-      </p:sp>
-      <p:sp>
-        <p:nvSpPr>
-          <p:cNvPr id="23" name="Text 21"/>
-          <p:cNvSpPr txBox="1"/>
-          <p:nvPr/>
-        </p:nvSpPr>
-        <p:spPr>
-          <a:xfrm>
-            <a:off x="6391656" y="1691640"/>
-            <a:ext cx="1417320" cy="731520"/>
-          </a:xfrm>
-          <a:prstGeom prst="rect">
-            <a:avLst/>
-          </a:prstGeom>
-          <a:noFill/>
-          <a:ln/>
-        </p:spPr>
-        <p:txBody>
-          <a:bodyPr wrap="square" lIns="0" tIns="0" rIns="0" bIns="0" rtlCol="0" anchor="ctr"/>
-          <a:lstStyle/>
-          <a:p>
-            <a:pPr algn="ctr" indent="0" marL="0">
-              <a:buNone/>
-            </a:pPr>
-            <a:r>
-              <a:rPr lang="en-US" sz="1300" b="1" dirty="0">
-                <a:solidFill>
-                  <a:schemeClr val="bg1"/>
-                </a:solidFill>
-              </a:rPr>
-              <a:t>Learn &amp; attend</a:t>
-            </a:r>
-            <a:endParaRPr lang="en-US" sz="1300" dirty="0"/>
-          </a:p>
-        </p:txBody>
-      </p:sp>
-      <p:sp>
-        <p:nvSpPr>
-          <p:cNvPr id="24" name="stage systems 4"/>
-          <p:cNvSpPr/>
-          <p:nvPr/>
-        </p:nvSpPr>
-        <p:spPr>
-          <a:xfrm>
-            <a:off x="6117336" y="2651760"/>
-            <a:ext cx="1737360" cy="1600200"/>
-          </a:xfrm>
-          <a:prstGeom prst="roundRect">
-            <a:avLst>
-              <a:gd name="adj" fmla="val 4571"/>
+              <a:gd name="adj" fmla="val 9412"/>
             </a:avLst>
           </a:prstGeom>
           <a:solidFill>
@@ -9354,234 +8666,116 @@
       </p:sp>
       <p:sp>
         <p:nvSpPr>
-          <p:cNvPr id="25" name="Text 23"/>
+          <p:cNvPr id="17" name="spoke Student Funding text"/>
           <p:cNvSpPr txBox="1"/>
           <p:nvPr/>
         </p:nvSpPr>
         <p:spPr>
           <a:xfrm>
-            <a:off x="6227064" y="2697480"/>
-            <a:ext cx="1554480" cy="1508760"/>
-          </a:xfrm>
-          <a:prstGeom prst="rect">
-            <a:avLst/>
-          </a:prstGeom>
-          <a:noFill/>
-          <a:ln/>
-        </p:spPr>
-        <p:txBody>
-          <a:bodyPr wrap="square" lIns="0" tIns="0" rIns="0" bIns="0" rtlCol="0" anchor="t"/>
-          <a:lstStyle/>
-          <a:p>
-            <a:pPr indent="0" marL="0">
-              <a:buNone/>
-            </a:pPr>
-            <a:r>
-              <a:rPr lang="en-US" sz="1000" b="1" dirty="0">
-                <a:solidFill>
-                  <a:srgbClr val="6B6F80"/>
-                </a:solidFill>
-              </a:rPr>
-              <a:t>Systems</a:t>
-            </a:r>
-            <a:endParaRPr lang="en-US" sz="1000" dirty="0"/>
-          </a:p>
-          <a:p>
-            <a:pPr indent="0" marL="0">
-              <a:buNone/>
-            </a:pPr>
-            <a:r>
-              <a:rPr lang="en-US" sz="1200" dirty="0">
+            <a:off x="9418320" y="2514600"/>
+            <a:ext cx="2148840" cy="777240"/>
+          </a:xfrm>
+          <a:prstGeom prst="rect">
+            <a:avLst/>
+          </a:prstGeom>
+          <a:noFill/>
+          <a:ln/>
+        </p:spPr>
+        <p:txBody>
+          <a:bodyPr wrap="square" lIns="25400" tIns="25400" rIns="25400" bIns="25400" rtlCol="0" anchor="ctr"/>
+          <a:lstStyle/>
+          <a:p>
+            <a:pPr algn="ctr" indent="0" marL="0">
+              <a:buNone/>
+            </a:pPr>
+            <a:r>
+              <a:rPr lang="en-US" sz="1200" b="1" dirty="0">
                 <a:solidFill>
                   <a:schemeClr val="tx1"/>
                 </a:solidFill>
               </a:rPr>
-              <a:t>Celcat</a:t>
-            </a:r>
-            <a:endParaRPr lang="en-US" sz="1000" dirty="0"/>
-          </a:p>
-          <a:p>
-            <a:pPr indent="0" marL="0">
-              <a:buNone/>
-            </a:pPr>
-            <a:r>
-              <a:rPr lang="en-US" sz="1200" dirty="0">
+              <a:t>Student Funding</a:t>
+            </a:r>
+            <a:endParaRPr lang="en-US" sz="1200" dirty="0"/>
+          </a:p>
+          <a:p>
+            <a:pPr algn="ctr" indent="0" marL="0">
+              <a:buNone/>
+            </a:pPr>
+            <a:r>
+              <a:rPr lang="en-US" sz="1000" dirty="0">
                 <a:solidFill>
                   <a:schemeClr val="tx1"/>
                 </a:solidFill>
               </a:rPr>
-              <a:t>Moodle (VLE)</a:t>
-            </a:r>
-            <a:endParaRPr lang="en-US" sz="1000" dirty="0"/>
-          </a:p>
-          <a:p>
-            <a:pPr indent="0" marL="0">
-              <a:buNone/>
-            </a:pPr>
-            <a:r>
-              <a:rPr lang="en-US" sz="1200" dirty="0">
-                <a:solidFill>
-                  <a:schemeClr val="tx1"/>
-                </a:solidFill>
-              </a:rPr>
-              <a:t>Onefile / JTL</a:t>
-            </a:r>
-            <a:endParaRPr lang="en-US" sz="1000" dirty="0"/>
-          </a:p>
-        </p:txBody>
-      </p:sp>
-      <p:sp>
-        <p:nvSpPr>
-          <p:cNvPr id="26" name="stage data 4"/>
-          <p:cNvSpPr/>
-          <p:nvPr/>
-        </p:nvSpPr>
-        <p:spPr>
-          <a:xfrm>
-            <a:off x="6117336" y="4389120"/>
-            <a:ext cx="1737360" cy="960120"/>
+              <a:t>Bursary · detail, award, evidence</a:t>
+            </a:r>
+            <a:endParaRPr lang="en-US" sz="1200" dirty="0"/>
+          </a:p>
+        </p:txBody>
+      </p:sp>
+      <p:sp>
+        <p:nvSpPr>
+          <p:cNvPr id="18" name="Shape 16"/>
+          <p:cNvSpPr/>
+          <p:nvPr/>
+        </p:nvSpPr>
+        <p:spPr>
+          <a:xfrm flipV="1">
+            <a:off x="7320759" y="3077059"/>
+            <a:ext cx="1993392" cy="404486"/>
+          </a:xfrm>
+          <a:prstGeom prst="line">
+            <a:avLst/>
+          </a:prstGeom>
+          <a:noFill/>
+          <a:ln w="22225">
+            <a:solidFill>
+              <a:schemeClr val="accent1"/>
+            </a:solidFill>
+            <a:prstDash val="solid"/>
+            <a:tailEnd type="triangle"/>
+          </a:ln>
+        </p:spPr>
+      </p:sp>
+      <p:sp>
+        <p:nvSpPr>
+          <p:cNvPr id="19" name="Shape 17"/>
+          <p:cNvSpPr/>
+          <p:nvPr/>
+        </p:nvSpPr>
+        <p:spPr>
+          <a:xfrm flipH="1">
+            <a:off x="7346217" y="3202519"/>
+            <a:ext cx="1993392" cy="404486"/>
+          </a:xfrm>
+          <a:prstGeom prst="line">
+            <a:avLst/>
+          </a:prstGeom>
+          <a:noFill/>
+          <a:ln w="22225">
+            <a:solidFill>
+              <a:schemeClr val="accent3"/>
+            </a:solidFill>
+            <a:prstDash val="dash"/>
+            <a:tailEnd type="triangle"/>
+          </a:ln>
+        </p:spPr>
+      </p:sp>
+      <p:sp>
+        <p:nvSpPr>
+          <p:cNvPr id="20" name="spoke Student Self-Service"/>
+          <p:cNvSpPr/>
+          <p:nvPr/>
+        </p:nvSpPr>
+        <p:spPr>
+          <a:xfrm>
+            <a:off x="9372600" y="3931920"/>
+            <a:ext cx="2240280" cy="777240"/>
           </a:xfrm>
           <a:prstGeom prst="roundRect">
             <a:avLst>
-              <a:gd name="adj" fmla="val 7619"/>
-            </a:avLst>
-          </a:prstGeom>
-          <a:solidFill>
-            <a:schemeClr val="bg2"/>
-          </a:solidFill>
-          <a:ln w="12700">
-            <a:solidFill>
-              <a:schemeClr val="bg2"/>
-            </a:solidFill>
-            <a:prstDash val="solid"/>
-          </a:ln>
-        </p:spPr>
-      </p:sp>
-      <p:sp>
-        <p:nvSpPr>
-          <p:cNvPr id="27" name="Text 25"/>
-          <p:cNvSpPr txBox="1"/>
-          <p:nvPr/>
-        </p:nvSpPr>
-        <p:spPr>
-          <a:xfrm>
-            <a:off x="6227064" y="4434840"/>
-            <a:ext cx="1554480" cy="868680"/>
-          </a:xfrm>
-          <a:prstGeom prst="rect">
-            <a:avLst/>
-          </a:prstGeom>
-          <a:noFill/>
-          <a:ln/>
-        </p:spPr>
-        <p:txBody>
-          <a:bodyPr wrap="square" lIns="0" tIns="0" rIns="0" bIns="0" rtlCol="0" anchor="t"/>
-          <a:lstStyle/>
-          <a:p>
-            <a:pPr indent="0" marL="0">
-              <a:buNone/>
-            </a:pPr>
-            <a:r>
-              <a:rPr lang="en-US" sz="1000" b="1" dirty="0">
-                <a:solidFill>
-                  <a:srgbClr val="6B6F80"/>
-                </a:solidFill>
-              </a:rPr>
-              <a:t>Data</a:t>
-            </a:r>
-            <a:endParaRPr lang="en-US" sz="1000" dirty="0"/>
-          </a:p>
-          <a:p>
-            <a:pPr indent="0" marL="0">
-              <a:buNone/>
-            </a:pPr>
-            <a:r>
-              <a:rPr lang="en-US" sz="1200" dirty="0">
-                <a:solidFill>
-                  <a:schemeClr val="tx1"/>
-                </a:solidFill>
-              </a:rPr>
-              <a:t>Timetable, attendance, e-portfolio</a:t>
-            </a:r>
-            <a:endParaRPr lang="en-US" sz="1000" dirty="0"/>
-          </a:p>
-        </p:txBody>
-      </p:sp>
-      <p:sp>
-        <p:nvSpPr>
-          <p:cNvPr id="28" name="stage 5"/>
-          <p:cNvSpPr/>
-          <p:nvPr/>
-        </p:nvSpPr>
-        <p:spPr>
-          <a:xfrm>
-            <a:off x="7973568" y="1691640"/>
-            <a:ext cx="1892808" cy="731520"/>
-          </a:xfrm>
-          <a:prstGeom prst="chevron">
-            <a:avLst/>
-          </a:prstGeom>
-          <a:solidFill>
-            <a:schemeClr val="tx2"/>
-          </a:solidFill>
-          <a:ln w="12700">
-            <a:solidFill>
-              <a:schemeClr val="tx2"/>
-            </a:solidFill>
-            <a:prstDash val="solid"/>
-          </a:ln>
-        </p:spPr>
-      </p:sp>
-      <p:sp>
-        <p:nvSpPr>
-          <p:cNvPr id="29" name="Text 27"/>
-          <p:cNvSpPr txBox="1"/>
-          <p:nvPr/>
-        </p:nvSpPr>
-        <p:spPr>
-          <a:xfrm>
-            <a:off x="8247888" y="1691640"/>
-            <a:ext cx="1417320" cy="731520"/>
-          </a:xfrm>
-          <a:prstGeom prst="rect">
-            <a:avLst/>
-          </a:prstGeom>
-          <a:noFill/>
-          <a:ln/>
-        </p:spPr>
-        <p:txBody>
-          <a:bodyPr wrap="square" lIns="0" tIns="0" rIns="0" bIns="0" rtlCol="0" anchor="ctr"/>
-          <a:lstStyle/>
-          <a:p>
-            <a:pPr algn="ctr" indent="0" marL="0">
-              <a:buNone/>
-            </a:pPr>
-            <a:r>
-              <a:rPr lang="en-US" sz="1300" b="1" dirty="0">
-                <a:solidFill>
-                  <a:schemeClr val="bg1"/>
-                </a:solidFill>
-              </a:rPr>
-              <a:t>Support &amp; fund</a:t>
-            </a:r>
-            <a:endParaRPr lang="en-US" sz="1300" dirty="0"/>
-          </a:p>
-        </p:txBody>
-      </p:sp>
-      <p:sp>
-        <p:nvSpPr>
-          <p:cNvPr id="30" name="stage systems 5"/>
-          <p:cNvSpPr/>
-          <p:nvPr/>
-        </p:nvSpPr>
-        <p:spPr>
-          <a:xfrm>
-            <a:off x="7973568" y="2651760"/>
-            <a:ext cx="1737360" cy="1600200"/>
-          </a:xfrm>
-          <a:prstGeom prst="roundRect">
-            <a:avLst>
-              <a:gd name="adj" fmla="val 4571"/>
+              <a:gd name="adj" fmla="val 9412"/>
             </a:avLst>
           </a:prstGeom>
           <a:solidFill>
@@ -9597,234 +8791,116 @@
       </p:sp>
       <p:sp>
         <p:nvSpPr>
-          <p:cNvPr id="31" name="Text 29"/>
+          <p:cNvPr id="21" name="spoke Student Self-Service text"/>
           <p:cNvSpPr txBox="1"/>
           <p:nvPr/>
         </p:nvSpPr>
         <p:spPr>
           <a:xfrm>
-            <a:off x="8083296" y="2697480"/>
-            <a:ext cx="1554480" cy="1508760"/>
-          </a:xfrm>
-          <a:prstGeom prst="rect">
-            <a:avLst/>
-          </a:prstGeom>
-          <a:noFill/>
-          <a:ln/>
-        </p:spPr>
-        <p:txBody>
-          <a:bodyPr wrap="square" lIns="0" tIns="0" rIns="0" bIns="0" rtlCol="0" anchor="t"/>
-          <a:lstStyle/>
-          <a:p>
-            <a:pPr indent="0" marL="0">
-              <a:buNone/>
-            </a:pPr>
-            <a:r>
-              <a:rPr lang="en-US" sz="1000" b="1" dirty="0">
-                <a:solidFill>
-                  <a:srgbClr val="6B6F80"/>
-                </a:solidFill>
-              </a:rPr>
-              <a:t>Systems</a:t>
-            </a:r>
-            <a:endParaRPr lang="en-US" sz="1000" dirty="0"/>
-          </a:p>
-          <a:p>
-            <a:pPr indent="0" marL="0">
-              <a:buNone/>
-            </a:pPr>
-            <a:r>
-              <a:rPr lang="en-US" sz="1200" dirty="0">
+            <a:off x="9418320" y="3931920"/>
+            <a:ext cx="2148840" cy="777240"/>
+          </a:xfrm>
+          <a:prstGeom prst="rect">
+            <a:avLst/>
+          </a:prstGeom>
+          <a:noFill/>
+          <a:ln/>
+        </p:spPr>
+        <p:txBody>
+          <a:bodyPr wrap="square" lIns="25400" tIns="25400" rIns="25400" bIns="25400" rtlCol="0" anchor="ctr"/>
+          <a:lstStyle/>
+          <a:p>
+            <a:pPr algn="ctr" indent="0" marL="0">
+              <a:buNone/>
+            </a:pPr>
+            <a:r>
+              <a:rPr lang="en-US" sz="1200" b="1" dirty="0">
                 <a:solidFill>
                   <a:schemeClr val="tx1"/>
                 </a:solidFill>
               </a:rPr>
-              <a:t>TripleS</a:t>
-            </a:r>
-            <a:endParaRPr lang="en-US" sz="1000" dirty="0"/>
-          </a:p>
-          <a:p>
-            <a:pPr indent="0" marL="0">
-              <a:buNone/>
-            </a:pPr>
-            <a:r>
-              <a:rPr lang="en-US" sz="1200" dirty="0">
+              <a:t>Student Self-Service</a:t>
+            </a:r>
+            <a:endParaRPr lang="en-US" sz="1200" dirty="0"/>
+          </a:p>
+          <a:p>
+            <a:pPr algn="ctr" indent="0" marL="0">
+              <a:buNone/>
+            </a:pPr>
+            <a:r>
+              <a:rPr lang="en-US" sz="1000" dirty="0">
                 <a:solidFill>
                   <a:schemeClr val="tx1"/>
                 </a:solidFill>
               </a:rPr>
-              <a:t>Bursary</a:t>
-            </a:r>
-            <a:endParaRPr lang="en-US" sz="1000" dirty="0"/>
-          </a:p>
-          <a:p>
-            <a:pPr indent="0" marL="0">
-              <a:buNone/>
-            </a:pPr>
-            <a:r>
-              <a:rPr lang="en-US" sz="1200" dirty="0">
-                <a:solidFill>
-                  <a:schemeClr val="tx1"/>
-                </a:solidFill>
-              </a:rPr>
-              <a:t>SAAS (external)</a:t>
-            </a:r>
-            <a:endParaRPr lang="en-US" sz="1000" dirty="0"/>
-          </a:p>
-        </p:txBody>
-      </p:sp>
-      <p:sp>
-        <p:nvSpPr>
-          <p:cNvPr id="32" name="stage data 5"/>
-          <p:cNvSpPr/>
-          <p:nvPr/>
-        </p:nvSpPr>
-        <p:spPr>
-          <a:xfrm>
-            <a:off x="7973568" y="4389120"/>
-            <a:ext cx="1737360" cy="960120"/>
+              <a:t>Student Portal · enrolment, course</a:t>
+            </a:r>
+            <a:endParaRPr lang="en-US" sz="1200" dirty="0"/>
+          </a:p>
+        </p:txBody>
+      </p:sp>
+      <p:sp>
+        <p:nvSpPr>
+          <p:cNvPr id="22" name="Shape 20"/>
+          <p:cNvSpPr/>
+          <p:nvPr/>
+        </p:nvSpPr>
+        <p:spPr>
+          <a:xfrm>
+            <a:off x="7341093" y="3878927"/>
+            <a:ext cx="1993392" cy="238543"/>
+          </a:xfrm>
+          <a:prstGeom prst="line">
+            <a:avLst/>
+          </a:prstGeom>
+          <a:noFill/>
+          <a:ln w="22225">
+            <a:solidFill>
+              <a:schemeClr val="accent1"/>
+            </a:solidFill>
+            <a:prstDash val="solid"/>
+            <a:tailEnd type="triangle"/>
+          </a:ln>
+        </p:spPr>
+      </p:sp>
+      <p:sp>
+        <p:nvSpPr>
+          <p:cNvPr id="23" name="Shape 21"/>
+          <p:cNvSpPr/>
+          <p:nvPr/>
+        </p:nvSpPr>
+        <p:spPr>
+          <a:xfrm flipH="1" flipV="1">
+            <a:off x="7325883" y="4006036"/>
+            <a:ext cx="1993392" cy="238543"/>
+          </a:xfrm>
+          <a:prstGeom prst="line">
+            <a:avLst/>
+          </a:prstGeom>
+          <a:noFill/>
+          <a:ln w="22225">
+            <a:solidFill>
+              <a:schemeClr val="accent3"/>
+            </a:solidFill>
+            <a:prstDash val="dash"/>
+            <a:tailEnd type="triangle"/>
+          </a:ln>
+        </p:spPr>
+      </p:sp>
+      <p:sp>
+        <p:nvSpPr>
+          <p:cNvPr id="24" name="spoke Data Connector"/>
+          <p:cNvSpPr/>
+          <p:nvPr/>
+        </p:nvSpPr>
+        <p:spPr>
+          <a:xfrm>
+            <a:off x="9372600" y="5120640"/>
+            <a:ext cx="2240280" cy="777240"/>
           </a:xfrm>
           <a:prstGeom prst="roundRect">
             <a:avLst>
-              <a:gd name="adj" fmla="val 7619"/>
-            </a:avLst>
-          </a:prstGeom>
-          <a:solidFill>
-            <a:schemeClr val="bg2"/>
-          </a:solidFill>
-          <a:ln w="12700">
-            <a:solidFill>
-              <a:schemeClr val="bg2"/>
-            </a:solidFill>
-            <a:prstDash val="solid"/>
-          </a:ln>
-        </p:spPr>
-      </p:sp>
-      <p:sp>
-        <p:nvSpPr>
-          <p:cNvPr id="33" name="Text 31"/>
-          <p:cNvSpPr txBox="1"/>
-          <p:nvPr/>
-        </p:nvSpPr>
-        <p:spPr>
-          <a:xfrm>
-            <a:off x="8083296" y="4434840"/>
-            <a:ext cx="1554480" cy="868680"/>
-          </a:xfrm>
-          <a:prstGeom prst="rect">
-            <a:avLst/>
-          </a:prstGeom>
-          <a:noFill/>
-          <a:ln/>
-        </p:spPr>
-        <p:txBody>
-          <a:bodyPr wrap="square" lIns="0" tIns="0" rIns="0" bIns="0" rtlCol="0" anchor="t"/>
-          <a:lstStyle/>
-          <a:p>
-            <a:pPr indent="0" marL="0">
-              <a:buNone/>
-            </a:pPr>
-            <a:r>
-              <a:rPr lang="en-US" sz="1000" b="1" dirty="0">
-                <a:solidFill>
-                  <a:srgbClr val="6B6F80"/>
-                </a:solidFill>
-              </a:rPr>
-              <a:t>Data</a:t>
-            </a:r>
-            <a:endParaRPr lang="en-US" sz="1000" dirty="0"/>
-          </a:p>
-          <a:p>
-            <a:pPr indent="0" marL="0">
-              <a:buNone/>
-            </a:pPr>
-            <a:r>
-              <a:rPr lang="en-US" sz="1200" dirty="0">
-                <a:solidFill>
-                  <a:schemeClr val="tx1"/>
-                </a:solidFill>
-              </a:rPr>
-              <a:t>ASN, PEEP, bursary awards</a:t>
-            </a:r>
-            <a:endParaRPr lang="en-US" sz="1000" dirty="0"/>
-          </a:p>
-        </p:txBody>
-      </p:sp>
-      <p:sp>
-        <p:nvSpPr>
-          <p:cNvPr id="34" name="stage 6"/>
-          <p:cNvSpPr/>
-          <p:nvPr/>
-        </p:nvSpPr>
-        <p:spPr>
-          <a:xfrm>
-            <a:off x="9829800" y="1691640"/>
-            <a:ext cx="1892808" cy="731520"/>
-          </a:xfrm>
-          <a:prstGeom prst="chevron">
-            <a:avLst/>
-          </a:prstGeom>
-          <a:solidFill>
-            <a:schemeClr val="tx2"/>
-          </a:solidFill>
-          <a:ln w="12700">
-            <a:solidFill>
-              <a:schemeClr val="tx2"/>
-            </a:solidFill>
-            <a:prstDash val="solid"/>
-          </a:ln>
-        </p:spPr>
-      </p:sp>
-      <p:sp>
-        <p:nvSpPr>
-          <p:cNvPr id="35" name="Text 33"/>
-          <p:cNvSpPr txBox="1"/>
-          <p:nvPr/>
-        </p:nvSpPr>
-        <p:spPr>
-          <a:xfrm>
-            <a:off x="10104120" y="1691640"/>
-            <a:ext cx="1417320" cy="731520"/>
-          </a:xfrm>
-          <a:prstGeom prst="rect">
-            <a:avLst/>
-          </a:prstGeom>
-          <a:noFill/>
-          <a:ln/>
-        </p:spPr>
-        <p:txBody>
-          <a:bodyPr wrap="square" lIns="0" tIns="0" rIns="0" bIns="0" rtlCol="0" anchor="ctr"/>
-          <a:lstStyle/>
-          <a:p>
-            <a:pPr algn="ctr" indent="0" marL="0">
-              <a:buNone/>
-            </a:pPr>
-            <a:r>
-              <a:rPr lang="en-US" sz="1300" b="1" dirty="0">
-                <a:solidFill>
-                  <a:schemeClr val="bg1"/>
-                </a:solidFill>
-              </a:rPr>
-              <a:t>Achieve &amp; progress</a:t>
-            </a:r>
-            <a:endParaRPr lang="en-US" sz="1300" dirty="0"/>
-          </a:p>
-        </p:txBody>
-      </p:sp>
-      <p:sp>
-        <p:nvSpPr>
-          <p:cNvPr id="36" name="stage systems 6"/>
-          <p:cNvSpPr/>
-          <p:nvPr/>
-        </p:nvSpPr>
-        <p:spPr>
-          <a:xfrm>
-            <a:off x="9829800" y="2651760"/>
-            <a:ext cx="1737360" cy="1600200"/>
-          </a:xfrm>
-          <a:prstGeom prst="roundRect">
-            <a:avLst>
-              <a:gd name="adj" fmla="val 4571"/>
+              <a:gd name="adj" fmla="val 9412"/>
             </a:avLst>
           </a:prstGeom>
           <a:solidFill>
@@ -9840,104 +8916,100 @@
       </p:sp>
       <p:sp>
         <p:nvSpPr>
-          <p:cNvPr id="37" name="Text 35"/>
+          <p:cNvPr id="25" name="spoke Data Connector text"/>
           <p:cNvSpPr txBox="1"/>
           <p:nvPr/>
         </p:nvSpPr>
         <p:spPr>
           <a:xfrm>
-            <a:off x="9939528" y="2697480"/>
-            <a:ext cx="1554480" cy="1508760"/>
-          </a:xfrm>
-          <a:prstGeom prst="rect">
-            <a:avLst/>
-          </a:prstGeom>
-          <a:noFill/>
-          <a:ln/>
-        </p:spPr>
-        <p:txBody>
-          <a:bodyPr wrap="square" lIns="0" tIns="0" rIns="0" bIns="0" rtlCol="0" anchor="t"/>
-          <a:lstStyle/>
-          <a:p>
-            <a:pPr indent="0" marL="0">
-              <a:buNone/>
-            </a:pPr>
-            <a:r>
-              <a:rPr lang="en-US" sz="1000" b="1" dirty="0">
-                <a:solidFill>
-                  <a:srgbClr val="6B6F80"/>
-                </a:solidFill>
-              </a:rPr>
-              <a:t>Systems</a:t>
-            </a:r>
-            <a:endParaRPr lang="en-US" sz="1000" dirty="0"/>
-          </a:p>
-          <a:p>
-            <a:pPr indent="0" marL="0">
-              <a:buNone/>
-            </a:pPr>
-            <a:r>
-              <a:rPr lang="en-US" sz="1200" dirty="0">
+            <a:off x="9418320" y="5120640"/>
+            <a:ext cx="2148840" cy="777240"/>
+          </a:xfrm>
+          <a:prstGeom prst="rect">
+            <a:avLst/>
+          </a:prstGeom>
+          <a:noFill/>
+          <a:ln/>
+        </p:spPr>
+        <p:txBody>
+          <a:bodyPr wrap="square" lIns="25400" tIns="25400" rIns="25400" bIns="25400" rtlCol="0" anchor="ctr"/>
+          <a:lstStyle/>
+          <a:p>
+            <a:pPr algn="ctr" indent="0" marL="0">
+              <a:buNone/>
+            </a:pPr>
+            <a:r>
+              <a:rPr lang="en-US" sz="1200" b="1" dirty="0">
                 <a:solidFill>
                   <a:schemeClr val="tx1"/>
                 </a:solidFill>
               </a:rPr>
-              <a:t>Dataserve</a:t>
-            </a:r>
-            <a:endParaRPr lang="en-US" sz="1000" dirty="0"/>
-          </a:p>
-          <a:p>
-            <a:pPr indent="0" marL="0">
-              <a:buNone/>
-            </a:pPr>
-            <a:r>
-              <a:rPr lang="en-US" sz="1200" dirty="0">
+              <a:t>Data Connector</a:t>
+            </a:r>
+            <a:endParaRPr lang="en-US" sz="1200" dirty="0"/>
+          </a:p>
+          <a:p>
+            <a:pPr algn="ctr" indent="0" marL="0">
+              <a:buNone/>
+            </a:pPr>
+            <a:r>
+              <a:rPr lang="en-US" sz="1000" dirty="0">
                 <a:solidFill>
                   <a:schemeClr val="tx1"/>
                 </a:solidFill>
               </a:rPr>
-              <a:t>UCAS · NAD</a:t>
-            </a:r>
-            <a:endParaRPr lang="en-US" sz="1000" dirty="0"/>
-          </a:p>
-          <a:p>
-            <a:pPr indent="0" marL="0">
-              <a:buNone/>
-            </a:pPr>
-            <a:r>
-              <a:rPr lang="en-US" sz="1200" dirty="0">
-                <a:solidFill>
-                  <a:schemeClr val="tx1"/>
-                </a:solidFill>
-              </a:rPr>
-              <a:t>Partner universities</a:t>
-            </a:r>
-            <a:endParaRPr lang="en-US" sz="1000" dirty="0"/>
-          </a:p>
-        </p:txBody>
-      </p:sp>
-      <p:sp>
-        <p:nvSpPr>
-          <p:cNvPr id="38" name="stage data 6"/>
-          <p:cNvSpPr/>
-          <p:nvPr/>
-        </p:nvSpPr>
-        <p:spPr>
-          <a:xfrm>
-            <a:off x="9829800" y="4389120"/>
-            <a:ext cx="1737360" cy="960120"/>
+              <a:t>SQL Server → Power BI</a:t>
+            </a:r>
+            <a:endParaRPr lang="en-US" sz="1200" dirty="0"/>
+          </a:p>
+        </p:txBody>
+      </p:sp>
+      <p:sp>
+        <p:nvSpPr>
+          <p:cNvPr id="26" name="Shape 24"/>
+          <p:cNvSpPr/>
+          <p:nvPr/>
+        </p:nvSpPr>
+        <p:spPr>
+          <a:xfrm>
+            <a:off x="7333488" y="4276461"/>
+            <a:ext cx="2046183" cy="798459"/>
+          </a:xfrm>
+          <a:prstGeom prst="line">
+            <a:avLst/>
+          </a:prstGeom>
+          <a:noFill/>
+          <a:ln w="22225">
+            <a:solidFill>
+              <a:schemeClr val="accent1"/>
+            </a:solidFill>
+            <a:prstDash val="solid"/>
+            <a:tailEnd type="triangle"/>
+          </a:ln>
+        </p:spPr>
+      </p:sp>
+      <p:sp>
+        <p:nvSpPr>
+          <p:cNvPr id="27" name="spoke Student Record"/>
+          <p:cNvSpPr/>
+          <p:nvPr/>
+        </p:nvSpPr>
+        <p:spPr>
+          <a:xfrm>
+            <a:off x="6400800" y="5120640"/>
+            <a:ext cx="2240280" cy="777240"/>
           </a:xfrm>
           <a:prstGeom prst="roundRect">
             <a:avLst>
-              <a:gd name="adj" fmla="val 7619"/>
+              <a:gd name="adj" fmla="val 9412"/>
             </a:avLst>
           </a:prstGeom>
           <a:solidFill>
-            <a:schemeClr val="bg2"/>
+            <a:schemeClr val="accent5"/>
           </a:solidFill>
           <a:ln w="12700">
             <a:solidFill>
-              <a:schemeClr val="bg2"/>
+              <a:schemeClr val="accent5"/>
             </a:solidFill>
             <a:prstDash val="solid"/>
           </a:ln>
@@ -9945,76 +9017,100 @@
       </p:sp>
       <p:sp>
         <p:nvSpPr>
-          <p:cNvPr id="39" name="Text 37"/>
+          <p:cNvPr id="28" name="spoke Student Record text"/>
           <p:cNvSpPr txBox="1"/>
           <p:nvPr/>
         </p:nvSpPr>
         <p:spPr>
           <a:xfrm>
-            <a:off x="9939528" y="4434840"/>
-            <a:ext cx="1554480" cy="868680"/>
-          </a:xfrm>
-          <a:prstGeom prst="rect">
-            <a:avLst/>
-          </a:prstGeom>
-          <a:noFill/>
-          <a:ln/>
-        </p:spPr>
-        <p:txBody>
-          <a:bodyPr wrap="square" lIns="0" tIns="0" rIns="0" bIns="0" rtlCol="0" anchor="t"/>
-          <a:lstStyle/>
-          <a:p>
-            <a:pPr indent="0" marL="0">
-              <a:buNone/>
-            </a:pPr>
-            <a:r>
-              <a:rPr lang="en-US" sz="1000" b="1" dirty="0">
-                <a:solidFill>
-                  <a:srgbClr val="6B6F80"/>
-                </a:solidFill>
-              </a:rPr>
-              <a:t>Data</a:t>
-            </a:r>
-            <a:endParaRPr lang="en-US" sz="1000" dirty="0"/>
-          </a:p>
-          <a:p>
-            <a:pPr indent="0" marL="0">
-              <a:buNone/>
-            </a:pPr>
-            <a:r>
-              <a:rPr lang="en-US" sz="1200" dirty="0">
+            <a:off x="6446520" y="5120640"/>
+            <a:ext cx="2148840" cy="777240"/>
+          </a:xfrm>
+          <a:prstGeom prst="rect">
+            <a:avLst/>
+          </a:prstGeom>
+          <a:noFill/>
+          <a:ln/>
+        </p:spPr>
+        <p:txBody>
+          <a:bodyPr wrap="square" lIns="25400" tIns="25400" rIns="25400" bIns="25400" rtlCol="0" anchor="ctr"/>
+          <a:lstStyle/>
+          <a:p>
+            <a:pPr algn="ctr" indent="0" marL="0">
+              <a:buNone/>
+            </a:pPr>
+            <a:r>
+              <a:rPr lang="en-US" sz="1200" b="1" dirty="0">
                 <a:solidFill>
                   <a:schemeClr val="tx1"/>
                 </a:solidFill>
               </a:rPr>
-              <a:t>Results, destinations</a:t>
-            </a:r>
-            <a:endParaRPr lang="en-US" sz="1000" dirty="0"/>
-          </a:p>
-        </p:txBody>
-      </p:sp>
-      <p:sp>
-        <p:nvSpPr>
-          <p:cNvPr id="40" name="reporting band"/>
-          <p:cNvSpPr/>
-          <p:nvPr/>
-        </p:nvSpPr>
-        <p:spPr>
-          <a:xfrm>
-            <a:off x="548640" y="5532120"/>
-            <a:ext cx="11064240" cy="685800"/>
+              <a:t>Student Record</a:t>
+            </a:r>
+            <a:endParaRPr lang="en-US" sz="1200" dirty="0"/>
+          </a:p>
+          <a:p>
+            <a:pPr algn="ctr" indent="0" marL="0">
+              <a:buNone/>
+            </a:pPr>
+            <a:r>
+              <a:rPr lang="en-US" sz="1000" dirty="0">
+                <a:solidFill>
+                  <a:schemeClr val="tx1"/>
+                </a:solidFill>
+              </a:rPr>
+              <a:t>Dataserve</a:t>
+            </a:r>
+            <a:endParaRPr lang="en-US" sz="1200" dirty="0"/>
+          </a:p>
+        </p:txBody>
+      </p:sp>
+      <p:sp>
+        <p:nvSpPr>
+          <p:cNvPr id="29" name="Shape 27"/>
+          <p:cNvSpPr/>
+          <p:nvPr/>
+        </p:nvSpPr>
+        <p:spPr>
+          <a:xfrm>
+            <a:off x="6591971" y="4389120"/>
+            <a:ext cx="568757" cy="685800"/>
+          </a:xfrm>
+          <a:prstGeom prst="line">
+            <a:avLst/>
+          </a:prstGeom>
+          <a:noFill/>
+          <a:ln w="22225">
+            <a:solidFill>
+              <a:schemeClr val="accent1"/>
+            </a:solidFill>
+            <a:prstDash val="solid"/>
+            <a:tailEnd type="triangle"/>
+          </a:ln>
+        </p:spPr>
+      </p:sp>
+      <p:sp>
+        <p:nvSpPr>
+          <p:cNvPr id="30" name="spoke Apprenticeship E-portfolio"/>
+          <p:cNvSpPr/>
+          <p:nvPr/>
+        </p:nvSpPr>
+        <p:spPr>
+          <a:xfrm>
+            <a:off x="3703320" y="5120640"/>
+            <a:ext cx="2240280" cy="777240"/>
           </a:xfrm>
           <a:prstGeom prst="roundRect">
             <a:avLst>
-              <a:gd name="adj" fmla="val 13333"/>
+              <a:gd name="adj" fmla="val 9412"/>
             </a:avLst>
           </a:prstGeom>
           <a:solidFill>
-            <a:schemeClr val="accent4"/>
+            <a:srgbClr val="FDF0DF"/>
           </a:solidFill>
           <a:ln w="12700">
             <a:solidFill>
-              <a:schemeClr val="accent4"/>
+              <a:srgbClr val="FDF0DF"/>
             </a:solidFill>
             <a:prstDash val="solid"/>
           </a:ln>
@@ -10022,14 +9118,439 @@
       </p:sp>
       <p:sp>
         <p:nvSpPr>
-          <p:cNvPr id="41" name="Text 39"/>
+          <p:cNvPr id="31" name="spoke Apprenticeship E-portfolio text"/>
           <p:cNvSpPr txBox="1"/>
           <p:nvPr/>
         </p:nvSpPr>
         <p:spPr>
           <a:xfrm>
-            <a:off x="777240" y="5532120"/>
-            <a:ext cx="10607040" cy="685800"/>
+            <a:off x="3749040" y="5120640"/>
+            <a:ext cx="2148840" cy="777240"/>
+          </a:xfrm>
+          <a:prstGeom prst="rect">
+            <a:avLst/>
+          </a:prstGeom>
+          <a:noFill/>
+          <a:ln/>
+        </p:spPr>
+        <p:txBody>
+          <a:bodyPr wrap="square" lIns="25400" tIns="25400" rIns="25400" bIns="25400" rtlCol="0" anchor="ctr"/>
+          <a:lstStyle/>
+          <a:p>
+            <a:pPr algn="ctr" indent="0" marL="0">
+              <a:buNone/>
+            </a:pPr>
+            <a:r>
+              <a:rPr lang="en-US" sz="1200" b="1" dirty="0">
+                <a:solidFill>
+                  <a:schemeClr val="tx1"/>
+                </a:solidFill>
+              </a:rPr>
+              <a:t>Apprenticeship E-portfolio</a:t>
+            </a:r>
+            <a:endParaRPr lang="en-US" sz="1200" dirty="0"/>
+          </a:p>
+          <a:p>
+            <a:pPr algn="ctr" indent="0" marL="0">
+              <a:buNone/>
+            </a:pPr>
+            <a:r>
+              <a:rPr lang="en-US" sz="1000" dirty="0">
+                <a:solidFill>
+                  <a:schemeClr val="tx1"/>
+                </a:solidFill>
+              </a:rPr>
+              <a:t>Onefile</a:t>
+            </a:r>
+            <a:endParaRPr lang="en-US" sz="1200" dirty="0"/>
+          </a:p>
+        </p:txBody>
+      </p:sp>
+      <p:sp>
+        <p:nvSpPr>
+          <p:cNvPr id="32" name="Shape 30"/>
+          <p:cNvSpPr/>
+          <p:nvPr/>
+        </p:nvSpPr>
+        <p:spPr>
+          <a:xfrm flipH="1">
+            <a:off x="5146609" y="4389120"/>
+            <a:ext cx="510235" cy="685800"/>
+          </a:xfrm>
+          <a:prstGeom prst="line">
+            <a:avLst/>
+          </a:prstGeom>
+          <a:noFill/>
+          <a:ln w="22225">
+            <a:solidFill>
+              <a:schemeClr val="accent3"/>
+            </a:solidFill>
+            <a:prstDash val="dash"/>
+            <a:tailEnd type="triangle"/>
+          </a:ln>
+        </p:spPr>
+      </p:sp>
+      <p:sp>
+        <p:nvSpPr>
+          <p:cNvPr id="33" name="spoke HR &amp; Payroll"/>
+          <p:cNvSpPr/>
+          <p:nvPr/>
+        </p:nvSpPr>
+        <p:spPr>
+          <a:xfrm>
+            <a:off x="548640" y="5120640"/>
+            <a:ext cx="2240280" cy="777240"/>
+          </a:xfrm>
+          <a:prstGeom prst="roundRect">
+            <a:avLst>
+              <a:gd name="adj" fmla="val 9412"/>
+            </a:avLst>
+          </a:prstGeom>
+          <a:solidFill>
+            <a:srgbClr val="FDF0DF"/>
+          </a:solidFill>
+          <a:ln w="12700">
+            <a:solidFill>
+              <a:srgbClr val="FDF0DF"/>
+            </a:solidFill>
+            <a:prstDash val="solid"/>
+          </a:ln>
+        </p:spPr>
+      </p:sp>
+      <p:sp>
+        <p:nvSpPr>
+          <p:cNvPr id="34" name="spoke HR &amp; Payroll text"/>
+          <p:cNvSpPr txBox="1"/>
+          <p:nvPr/>
+        </p:nvSpPr>
+        <p:spPr>
+          <a:xfrm>
+            <a:off x="594360" y="5120640"/>
+            <a:ext cx="2148840" cy="777240"/>
+          </a:xfrm>
+          <a:prstGeom prst="rect">
+            <a:avLst/>
+          </a:prstGeom>
+          <a:noFill/>
+          <a:ln/>
+        </p:spPr>
+        <p:txBody>
+          <a:bodyPr wrap="square" lIns="25400" tIns="25400" rIns="25400" bIns="25400" rtlCol="0" anchor="ctr"/>
+          <a:lstStyle/>
+          <a:p>
+            <a:pPr algn="ctr" indent="0" marL="0">
+              <a:buNone/>
+            </a:pPr>
+            <a:r>
+              <a:rPr lang="en-US" sz="1200" b="1" dirty="0">
+                <a:solidFill>
+                  <a:schemeClr val="tx1"/>
+                </a:solidFill>
+              </a:rPr>
+              <a:t>HR &amp; Payroll</a:t>
+            </a:r>
+            <a:endParaRPr lang="en-US" sz="1200" dirty="0"/>
+          </a:p>
+          <a:p>
+            <a:pPr algn="ctr" indent="0" marL="0">
+              <a:buNone/>
+            </a:pPr>
+            <a:r>
+              <a:rPr lang="en-US" sz="1000" dirty="0">
+                <a:solidFill>
+                  <a:schemeClr val="tx1"/>
+                </a:solidFill>
+              </a:rPr>
+              <a:t>iTrent · new / transfer / leaver</a:t>
+            </a:r>
+            <a:endParaRPr lang="en-US" sz="1200" dirty="0"/>
+          </a:p>
+        </p:txBody>
+      </p:sp>
+      <p:sp>
+        <p:nvSpPr>
+          <p:cNvPr id="35" name="Shape 33"/>
+          <p:cNvSpPr/>
+          <p:nvPr/>
+        </p:nvSpPr>
+        <p:spPr>
+          <a:xfrm flipV="1">
+            <a:off x="2791115" y="4272484"/>
+            <a:ext cx="2073493" cy="802436"/>
+          </a:xfrm>
+          <a:prstGeom prst="line">
+            <a:avLst/>
+          </a:prstGeom>
+          <a:noFill/>
+          <a:ln w="22225">
+            <a:solidFill>
+              <a:schemeClr val="accent3"/>
+            </a:solidFill>
+            <a:prstDash val="dash"/>
+            <a:tailEnd type="triangle"/>
+          </a:ln>
+        </p:spPr>
+      </p:sp>
+      <p:sp>
+        <p:nvSpPr>
+          <p:cNvPr id="36" name="spoke Manual data entry"/>
+          <p:cNvSpPr/>
+          <p:nvPr/>
+        </p:nvSpPr>
+        <p:spPr>
+          <a:xfrm>
+            <a:off x="548640" y="3931920"/>
+            <a:ext cx="2240280" cy="777240"/>
+          </a:xfrm>
+          <a:prstGeom prst="roundRect">
+            <a:avLst>
+              <a:gd name="adj" fmla="val 9412"/>
+            </a:avLst>
+          </a:prstGeom>
+          <a:solidFill>
+            <a:srgbClr val="FDF0DF"/>
+          </a:solidFill>
+          <a:ln w="12700">
+            <a:solidFill>
+              <a:srgbClr val="FDF0DF"/>
+            </a:solidFill>
+            <a:prstDash val="solid"/>
+          </a:ln>
+        </p:spPr>
+      </p:sp>
+      <p:sp>
+        <p:nvSpPr>
+          <p:cNvPr id="37" name="spoke Manual data entry text"/>
+          <p:cNvSpPr txBox="1"/>
+          <p:nvPr/>
+        </p:nvSpPr>
+        <p:spPr>
+          <a:xfrm>
+            <a:off x="594360" y="3931920"/>
+            <a:ext cx="2148840" cy="777240"/>
+          </a:xfrm>
+          <a:prstGeom prst="rect">
+            <a:avLst/>
+          </a:prstGeom>
+          <a:noFill/>
+          <a:ln/>
+        </p:spPr>
+        <p:txBody>
+          <a:bodyPr wrap="square" lIns="25400" tIns="25400" rIns="25400" bIns="25400" rtlCol="0" anchor="ctr"/>
+          <a:lstStyle/>
+          <a:p>
+            <a:pPr algn="ctr" indent="0" marL="0">
+              <a:buNone/>
+            </a:pPr>
+            <a:r>
+              <a:rPr lang="en-US" sz="1200" b="1" dirty="0">
+                <a:solidFill>
+                  <a:schemeClr val="tx1"/>
+                </a:solidFill>
+              </a:rPr>
+              <a:t>Manual data entry</a:t>
+            </a:r>
+            <a:endParaRPr lang="en-US" sz="1200" dirty="0"/>
+          </a:p>
+          <a:p>
+            <a:pPr algn="ctr" indent="0" marL="0">
+              <a:buNone/>
+            </a:pPr>
+            <a:r>
+              <a:rPr lang="en-US" sz="1000" dirty="0">
+                <a:solidFill>
+                  <a:schemeClr val="tx1"/>
+                </a:solidFill>
+              </a:rPr>
+              <a:t>Forms keyed in by staff</a:t>
+            </a:r>
+            <a:endParaRPr lang="en-US" sz="1200" dirty="0"/>
+          </a:p>
+        </p:txBody>
+      </p:sp>
+      <p:sp>
+        <p:nvSpPr>
+          <p:cNvPr id="38" name="Shape 36"/>
+          <p:cNvSpPr/>
+          <p:nvPr/>
+        </p:nvSpPr>
+        <p:spPr>
+          <a:xfrm flipV="1">
+            <a:off x="2834640" y="3941262"/>
+            <a:ext cx="2029968" cy="240915"/>
+          </a:xfrm>
+          <a:prstGeom prst="line">
+            <a:avLst/>
+          </a:prstGeom>
+          <a:noFill/>
+          <a:ln w="22225">
+            <a:solidFill>
+              <a:schemeClr val="accent3"/>
+            </a:solidFill>
+            <a:prstDash val="dash"/>
+            <a:tailEnd type="triangle"/>
+          </a:ln>
+        </p:spPr>
+      </p:sp>
+      <p:sp>
+        <p:nvSpPr>
+          <p:cNvPr id="39" name="spoke School &amp; Employer Portal"/>
+          <p:cNvSpPr/>
+          <p:nvPr/>
+        </p:nvSpPr>
+        <p:spPr>
+          <a:xfrm>
+            <a:off x="548640" y="2606040"/>
+            <a:ext cx="2240280" cy="777240"/>
+          </a:xfrm>
+          <a:prstGeom prst="roundRect">
+            <a:avLst>
+              <a:gd name="adj" fmla="val 9412"/>
+            </a:avLst>
+          </a:prstGeom>
+          <a:solidFill>
+            <a:schemeClr val="accent5"/>
+          </a:solidFill>
+          <a:ln w="12700">
+            <a:solidFill>
+              <a:schemeClr val="accent5"/>
+            </a:solidFill>
+            <a:prstDash val="solid"/>
+          </a:ln>
+        </p:spPr>
+      </p:sp>
+      <p:sp>
+        <p:nvSpPr>
+          <p:cNvPr id="40" name="spoke School &amp; Employer Portal text"/>
+          <p:cNvSpPr txBox="1"/>
+          <p:nvPr/>
+        </p:nvSpPr>
+        <p:spPr>
+          <a:xfrm>
+            <a:off x="594360" y="2606040"/>
+            <a:ext cx="2148840" cy="777240"/>
+          </a:xfrm>
+          <a:prstGeom prst="rect">
+            <a:avLst/>
+          </a:prstGeom>
+          <a:noFill/>
+          <a:ln/>
+        </p:spPr>
+        <p:txBody>
+          <a:bodyPr wrap="square" lIns="25400" tIns="25400" rIns="25400" bIns="25400" rtlCol="0" anchor="ctr"/>
+          <a:lstStyle/>
+          <a:p>
+            <a:pPr algn="ctr" indent="0" marL="0">
+              <a:buNone/>
+            </a:pPr>
+            <a:r>
+              <a:rPr lang="en-US" sz="1200" b="1" dirty="0">
+                <a:solidFill>
+                  <a:schemeClr val="tx1"/>
+                </a:solidFill>
+              </a:rPr>
+              <a:t>School &amp; Employer Portal</a:t>
+            </a:r>
+            <a:endParaRPr lang="en-US" sz="1200" dirty="0"/>
+          </a:p>
+          <a:p>
+            <a:pPr algn="ctr" indent="0" marL="0">
+              <a:buNone/>
+            </a:pPr>
+            <a:r>
+              <a:rPr lang="en-US" sz="1000" dirty="0">
+                <a:solidFill>
+                  <a:schemeClr val="tx1"/>
+                </a:solidFill>
+              </a:rPr>
+              <a:t>FVC Portal · school transition</a:t>
+            </a:r>
+            <a:endParaRPr lang="en-US" sz="1200" dirty="0"/>
+          </a:p>
+        </p:txBody>
+      </p:sp>
+      <p:sp>
+        <p:nvSpPr>
+          <p:cNvPr id="41" name="Shape 39"/>
+          <p:cNvSpPr/>
+          <p:nvPr/>
+        </p:nvSpPr>
+        <p:spPr>
+          <a:xfrm flipH="1" flipV="1">
+            <a:off x="2823264" y="3268202"/>
+            <a:ext cx="2029968" cy="366609"/>
+          </a:xfrm>
+          <a:prstGeom prst="line">
+            <a:avLst/>
+          </a:prstGeom>
+          <a:noFill/>
+          <a:ln w="22225">
+            <a:solidFill>
+              <a:schemeClr val="accent1"/>
+            </a:solidFill>
+            <a:prstDash val="solid"/>
+            <a:tailEnd type="triangle"/>
+          </a:ln>
+        </p:spPr>
+      </p:sp>
+      <p:sp>
+        <p:nvSpPr>
+          <p:cNvPr id="42" name="Shape 40"/>
+          <p:cNvSpPr/>
+          <p:nvPr/>
+        </p:nvSpPr>
+        <p:spPr>
+          <a:xfrm>
+            <a:off x="2846016" y="3142224"/>
+            <a:ext cx="2029968" cy="366609"/>
+          </a:xfrm>
+          <a:prstGeom prst="line">
+            <a:avLst/>
+          </a:prstGeom>
+          <a:noFill/>
+          <a:ln w="22225">
+            <a:solidFill>
+              <a:schemeClr val="accent3"/>
+            </a:solidFill>
+            <a:prstDash val="dash"/>
+            <a:tailEnd type="triangle"/>
+          </a:ln>
+        </p:spPr>
+      </p:sp>
+      <p:sp>
+        <p:nvSpPr>
+          <p:cNvPr id="43" name="Shape 41"/>
+          <p:cNvSpPr/>
+          <p:nvPr/>
+        </p:nvSpPr>
+        <p:spPr>
+          <a:xfrm>
+            <a:off x="548640" y="6217920"/>
+            <a:ext cx="548640" cy="914"/>
+          </a:xfrm>
+          <a:prstGeom prst="line">
+            <a:avLst/>
+          </a:prstGeom>
+          <a:noFill/>
+          <a:ln w="22225">
+            <a:solidFill>
+              <a:schemeClr val="accent1"/>
+            </a:solidFill>
+            <a:prstDash val="solid"/>
+            <a:tailEnd type="triangle"/>
+          </a:ln>
+        </p:spPr>
+      </p:sp>
+      <p:sp>
+        <p:nvSpPr>
+          <p:cNvPr id="44" name="Text 42"/>
+          <p:cNvSpPr txBox="1"/>
+          <p:nvPr/>
+        </p:nvSpPr>
+        <p:spPr>
+          <a:xfrm>
+            <a:off x="1188720" y="6080760"/>
+            <a:ext cx="1463040" cy="274320"/>
           </a:xfrm>
           <a:prstGeom prst="rect">
             <a:avLst/>
@@ -10045,25 +9566,74 @@
               <a:buNone/>
             </a:pPr>
             <a:r>
-              <a:rPr lang="en-US" sz="1300" b="1" dirty="0">
-                <a:solidFill>
-                  <a:schemeClr val="bg1"/>
-                </a:solidFill>
-              </a:rPr>
-              <a:t>Across every stage:  </a:t>
-            </a:r>
+              <a:rPr lang="en-US" sz="1100" dirty="0">
+                <a:solidFill>
+                  <a:schemeClr val="tx1"/>
+                </a:solidFill>
+              </a:rPr>
+              <a:t>Automated feed</a:t>
+            </a:r>
+            <a:endParaRPr lang="en-US" sz="1100" dirty="0"/>
+          </a:p>
+        </p:txBody>
+      </p:sp>
+      <p:sp>
+        <p:nvSpPr>
+          <p:cNvPr id="45" name="Shape 43"/>
+          <p:cNvSpPr/>
+          <p:nvPr/>
+        </p:nvSpPr>
+        <p:spPr>
+          <a:xfrm>
+            <a:off x="2743200" y="6217920"/>
+            <a:ext cx="548640" cy="914"/>
+          </a:xfrm>
+          <a:prstGeom prst="line">
+            <a:avLst/>
+          </a:prstGeom>
+          <a:noFill/>
+          <a:ln w="22225">
+            <a:solidFill>
+              <a:schemeClr val="accent3"/>
+            </a:solidFill>
+            <a:prstDash val="dash"/>
+            <a:tailEnd type="triangle"/>
+          </a:ln>
+        </p:spPr>
+      </p:sp>
+      <p:sp>
+        <p:nvSpPr>
+          <p:cNvPr id="46" name="Text 44"/>
+          <p:cNvSpPr txBox="1"/>
+          <p:nvPr/>
+        </p:nvSpPr>
+        <p:spPr>
+          <a:xfrm>
+            <a:off x="3383280" y="6080760"/>
+            <a:ext cx="1828800" cy="274320"/>
+          </a:xfrm>
+          <a:prstGeom prst="rect">
+            <a:avLst/>
+          </a:prstGeom>
+          <a:noFill/>
+          <a:ln/>
+        </p:spPr>
+        <p:txBody>
+          <a:bodyPr wrap="square" lIns="0" tIns="0" rIns="0" bIns="0" rtlCol="0" anchor="ctr"/>
+          <a:lstStyle/>
+          <a:p>
             <a:pPr indent="0" marL="0">
               <a:buNone/>
             </a:pPr>
             <a:r>
-              <a:rPr lang="en-US" sz="1300" dirty="0">
-                <a:solidFill>
-                  <a:schemeClr val="bg1"/>
-                </a:solidFill>
-              </a:rPr>
-              <a:t>UnitE, Enquirer, TripleS, Bursary and iTrent feed the SQL Server data connector, which powers Power BI reporting</a:t>
-            </a:r>
-            <a:endParaRPr lang="en-US" sz="1300" dirty="0"/>
+              <a:rPr lang="en-US" sz="1100" dirty="0">
+                <a:solidFill>
+                  <a:schemeClr val="tx1"/>
+                </a:solidFill>
+              </a:rPr>
+              <a:t>Manual / file hand-off</a:t>
+            </a:r>
+            <a:endParaRPr lang="en-US" sz="1100" dirty="0"/>
           </a:p>
         </p:txBody>
       </p:sp>
@@ -10169,7 +9739,7 @@
                   <a:schemeClr val="tx2"/>
                 </a:solidFill>
               </a:rPr>
-              <a:t>Reporting: five systems feed one Power BI layer</a:t>
+              <a:t>Following the student: which system holds what, when</a:t>
             </a:r>
             <a:endParaRPr lang="en-US" sz="3200" dirty="0"/>
           </a:p>
@@ -10207,7 +9777,7 @@
                   <a:schemeClr val="tx1"/>
                 </a:solidFill>
               </a:rPr>
-              <a:t>All automated feeds land in the SQL Server data connector before reaching Power BI</a:t>
+              <a:t>The same student record travels through six stages, touching a different system at each</a:t>
             </a:r>
             <a:endParaRPr lang="en-US" sz="1500" dirty="0"/>
           </a:p>
@@ -10215,19 +9785,503 @@
       </p:sp>
       <p:sp>
         <p:nvSpPr>
-          <p:cNvPr id="4" name="feed UnitE"/>
+          <p:cNvPr id="4" name="stage 1"/>
           <p:cNvSpPr/>
           <p:nvPr/>
         </p:nvSpPr>
         <p:spPr>
           <a:xfrm>
             <a:off x="548640" y="1691640"/>
-            <a:ext cx="1463040" cy="713232"/>
+            <a:ext cx="1892808" cy="731520"/>
+          </a:xfrm>
+          <a:prstGeom prst="homePlate">
+            <a:avLst/>
+          </a:prstGeom>
+          <a:solidFill>
+            <a:schemeClr val="tx2"/>
+          </a:solidFill>
+          <a:ln w="12700">
+            <a:solidFill>
+              <a:schemeClr val="tx2"/>
+            </a:solidFill>
+            <a:prstDash val="solid"/>
+          </a:ln>
+        </p:spPr>
+      </p:sp>
+      <p:sp>
+        <p:nvSpPr>
+          <p:cNvPr id="5" name="Text 3"/>
+          <p:cNvSpPr txBox="1"/>
+          <p:nvPr/>
+        </p:nvSpPr>
+        <p:spPr>
+          <a:xfrm>
+            <a:off x="822960" y="1691640"/>
+            <a:ext cx="1417320" cy="731520"/>
+          </a:xfrm>
+          <a:prstGeom prst="rect">
+            <a:avLst/>
+          </a:prstGeom>
+          <a:noFill/>
+          <a:ln/>
+        </p:spPr>
+        <p:txBody>
+          <a:bodyPr wrap="square" lIns="0" tIns="0" rIns="0" bIns="0" rtlCol="0" anchor="ctr"/>
+          <a:lstStyle/>
+          <a:p>
+            <a:pPr algn="ctr" indent="0" marL="0">
+              <a:buNone/>
+            </a:pPr>
+            <a:r>
+              <a:rPr lang="en-US" sz="1300" b="1" dirty="0">
+                <a:solidFill>
+                  <a:schemeClr val="bg1"/>
+                </a:solidFill>
+              </a:rPr>
+              <a:t>Attract &amp; enquire</a:t>
+            </a:r>
+            <a:endParaRPr lang="en-US" sz="1300" dirty="0"/>
+          </a:p>
+        </p:txBody>
+      </p:sp>
+      <p:sp>
+        <p:nvSpPr>
+          <p:cNvPr id="6" name="stage systems 1"/>
+          <p:cNvSpPr/>
+          <p:nvPr/>
+        </p:nvSpPr>
+        <p:spPr>
+          <a:xfrm>
+            <a:off x="548640" y="2651760"/>
+            <a:ext cx="1737360" cy="1600200"/>
           </a:xfrm>
           <a:prstGeom prst="roundRect">
             <a:avLst>
-              <a:gd name="adj" fmla="val 10256"/>
+              <a:gd name="adj" fmla="val 4571"/>
             </a:avLst>
+          </a:prstGeom>
+          <a:solidFill>
+            <a:schemeClr val="accent5"/>
+          </a:solidFill>
+          <a:ln w="12700">
+            <a:solidFill>
+              <a:schemeClr val="accent5"/>
+            </a:solidFill>
+            <a:prstDash val="solid"/>
+          </a:ln>
+        </p:spPr>
+      </p:sp>
+      <p:sp>
+        <p:nvSpPr>
+          <p:cNvPr id="7" name="Text 5"/>
+          <p:cNvSpPr txBox="1"/>
+          <p:nvPr/>
+        </p:nvSpPr>
+        <p:spPr>
+          <a:xfrm>
+            <a:off x="658368" y="2697480"/>
+            <a:ext cx="1554480" cy="1508760"/>
+          </a:xfrm>
+          <a:prstGeom prst="rect">
+            <a:avLst/>
+          </a:prstGeom>
+          <a:noFill/>
+          <a:ln/>
+        </p:spPr>
+        <p:txBody>
+          <a:bodyPr wrap="square" lIns="0" tIns="0" rIns="0" bIns="0" rtlCol="0" anchor="t"/>
+          <a:lstStyle/>
+          <a:p>
+            <a:pPr indent="0" marL="0">
+              <a:buNone/>
+            </a:pPr>
+            <a:r>
+              <a:rPr lang="en-US" sz="1000" b="1" dirty="0">
+                <a:solidFill>
+                  <a:srgbClr val="6B6F80"/>
+                </a:solidFill>
+              </a:rPr>
+              <a:t>Systems</a:t>
+            </a:r>
+            <a:endParaRPr lang="en-US" sz="1000" dirty="0"/>
+          </a:p>
+          <a:p>
+            <a:pPr indent="0" marL="0">
+              <a:buNone/>
+            </a:pPr>
+            <a:r>
+              <a:rPr lang="en-US" sz="1200" dirty="0">
+                <a:solidFill>
+                  <a:schemeClr val="tx1"/>
+                </a:solidFill>
+              </a:rPr>
+              <a:t>FVC Website</a:t>
+            </a:r>
+            <a:endParaRPr lang="en-US" sz="1000" dirty="0"/>
+          </a:p>
+          <a:p>
+            <a:pPr indent="0" marL="0">
+              <a:buNone/>
+            </a:pPr>
+            <a:r>
+              <a:rPr lang="en-US" sz="1200" dirty="0">
+                <a:solidFill>
+                  <a:schemeClr val="tx1"/>
+                </a:solidFill>
+              </a:rPr>
+              <a:t>CRM (RUBI)</a:t>
+            </a:r>
+            <a:endParaRPr lang="en-US" sz="1000" dirty="0"/>
+          </a:p>
+          <a:p>
+            <a:pPr indent="0" marL="0">
+              <a:buNone/>
+            </a:pPr>
+            <a:r>
+              <a:rPr lang="en-US" sz="1200" dirty="0">
+                <a:solidFill>
+                  <a:schemeClr val="tx1"/>
+                </a:solidFill>
+              </a:rPr>
+              <a:t>Enquirer</a:t>
+            </a:r>
+            <a:endParaRPr lang="en-US" sz="1000" dirty="0"/>
+          </a:p>
+        </p:txBody>
+      </p:sp>
+      <p:sp>
+        <p:nvSpPr>
+          <p:cNvPr id="8" name="stage data 1"/>
+          <p:cNvSpPr/>
+          <p:nvPr/>
+        </p:nvSpPr>
+        <p:spPr>
+          <a:xfrm>
+            <a:off x="548640" y="4389120"/>
+            <a:ext cx="1737360" cy="960120"/>
+          </a:xfrm>
+          <a:prstGeom prst="roundRect">
+            <a:avLst>
+              <a:gd name="adj" fmla="val 7619"/>
+            </a:avLst>
+          </a:prstGeom>
+          <a:solidFill>
+            <a:schemeClr val="bg2"/>
+          </a:solidFill>
+          <a:ln w="12700">
+            <a:solidFill>
+              <a:schemeClr val="bg2"/>
+            </a:solidFill>
+            <a:prstDash val="solid"/>
+          </a:ln>
+        </p:spPr>
+      </p:sp>
+      <p:sp>
+        <p:nvSpPr>
+          <p:cNvPr id="9" name="Text 7"/>
+          <p:cNvSpPr txBox="1"/>
+          <p:nvPr/>
+        </p:nvSpPr>
+        <p:spPr>
+          <a:xfrm>
+            <a:off x="658368" y="4434840"/>
+            <a:ext cx="1554480" cy="868680"/>
+          </a:xfrm>
+          <a:prstGeom prst="rect">
+            <a:avLst/>
+          </a:prstGeom>
+          <a:noFill/>
+          <a:ln/>
+        </p:spPr>
+        <p:txBody>
+          <a:bodyPr wrap="square" lIns="0" tIns="0" rIns="0" bIns="0" rtlCol="0" anchor="t"/>
+          <a:lstStyle/>
+          <a:p>
+            <a:pPr indent="0" marL="0">
+              <a:buNone/>
+            </a:pPr>
+            <a:r>
+              <a:rPr lang="en-US" sz="1000" b="1" dirty="0">
+                <a:solidFill>
+                  <a:srgbClr val="6B6F80"/>
+                </a:solidFill>
+              </a:rPr>
+              <a:t>Data</a:t>
+            </a:r>
+            <a:endParaRPr lang="en-US" sz="1000" dirty="0"/>
+          </a:p>
+          <a:p>
+            <a:pPr indent="0" marL="0">
+              <a:buNone/>
+            </a:pPr>
+            <a:r>
+              <a:rPr lang="en-US" sz="1200" dirty="0">
+                <a:solidFill>
+                  <a:schemeClr val="tx1"/>
+                </a:solidFill>
+              </a:rPr>
+              <a:t>Enquiry, contact details</a:t>
+            </a:r>
+            <a:endParaRPr lang="en-US" sz="1000" dirty="0"/>
+          </a:p>
+        </p:txBody>
+      </p:sp>
+      <p:sp>
+        <p:nvSpPr>
+          <p:cNvPr id="10" name="stage 2"/>
+          <p:cNvSpPr/>
+          <p:nvPr/>
+        </p:nvSpPr>
+        <p:spPr>
+          <a:xfrm>
+            <a:off x="2404872" y="1691640"/>
+            <a:ext cx="1892808" cy="731520"/>
+          </a:xfrm>
+          <a:prstGeom prst="chevron">
+            <a:avLst/>
+          </a:prstGeom>
+          <a:solidFill>
+            <a:schemeClr val="tx2"/>
+          </a:solidFill>
+          <a:ln w="12700">
+            <a:solidFill>
+              <a:schemeClr val="tx2"/>
+            </a:solidFill>
+            <a:prstDash val="solid"/>
+          </a:ln>
+        </p:spPr>
+      </p:sp>
+      <p:sp>
+        <p:nvSpPr>
+          <p:cNvPr id="11" name="Text 9"/>
+          <p:cNvSpPr txBox="1"/>
+          <p:nvPr/>
+        </p:nvSpPr>
+        <p:spPr>
+          <a:xfrm>
+            <a:off x="2679192" y="1691640"/>
+            <a:ext cx="1417320" cy="731520"/>
+          </a:xfrm>
+          <a:prstGeom prst="rect">
+            <a:avLst/>
+          </a:prstGeom>
+          <a:noFill/>
+          <a:ln/>
+        </p:spPr>
+        <p:txBody>
+          <a:bodyPr wrap="square" lIns="0" tIns="0" rIns="0" bIns="0" rtlCol="0" anchor="ctr"/>
+          <a:lstStyle/>
+          <a:p>
+            <a:pPr algn="ctr" indent="0" marL="0">
+              <a:buNone/>
+            </a:pPr>
+            <a:r>
+              <a:rPr lang="en-US" sz="1300" b="1" dirty="0">
+                <a:solidFill>
+                  <a:schemeClr val="bg1"/>
+                </a:solidFill>
+              </a:rPr>
+              <a:t>Apply</a:t>
+            </a:r>
+            <a:endParaRPr lang="en-US" sz="1300" dirty="0"/>
+          </a:p>
+        </p:txBody>
+      </p:sp>
+      <p:sp>
+        <p:nvSpPr>
+          <p:cNvPr id="12" name="stage systems 2"/>
+          <p:cNvSpPr/>
+          <p:nvPr/>
+        </p:nvSpPr>
+        <p:spPr>
+          <a:xfrm>
+            <a:off x="2404872" y="2651760"/>
+            <a:ext cx="1737360" cy="1600200"/>
+          </a:xfrm>
+          <a:prstGeom prst="roundRect">
+            <a:avLst>
+              <a:gd name="adj" fmla="val 4571"/>
+            </a:avLst>
+          </a:prstGeom>
+          <a:solidFill>
+            <a:schemeClr val="accent5"/>
+          </a:solidFill>
+          <a:ln w="12700">
+            <a:solidFill>
+              <a:schemeClr val="accent5"/>
+            </a:solidFill>
+            <a:prstDash val="solid"/>
+          </a:ln>
+        </p:spPr>
+      </p:sp>
+      <p:sp>
+        <p:nvSpPr>
+          <p:cNvPr id="13" name="Text 11"/>
+          <p:cNvSpPr txBox="1"/>
+          <p:nvPr/>
+        </p:nvSpPr>
+        <p:spPr>
+          <a:xfrm>
+            <a:off x="2514600" y="2697480"/>
+            <a:ext cx="1554480" cy="1508760"/>
+          </a:xfrm>
+          <a:prstGeom prst="rect">
+            <a:avLst/>
+          </a:prstGeom>
+          <a:noFill/>
+          <a:ln/>
+        </p:spPr>
+        <p:txBody>
+          <a:bodyPr wrap="square" lIns="0" tIns="0" rIns="0" bIns="0" rtlCol="0" anchor="t"/>
+          <a:lstStyle/>
+          <a:p>
+            <a:pPr indent="0" marL="0">
+              <a:buNone/>
+            </a:pPr>
+            <a:r>
+              <a:rPr lang="en-US" sz="1000" b="1" dirty="0">
+                <a:solidFill>
+                  <a:srgbClr val="6B6F80"/>
+                </a:solidFill>
+              </a:rPr>
+              <a:t>Systems</a:t>
+            </a:r>
+            <a:endParaRPr lang="en-US" sz="1000" dirty="0"/>
+          </a:p>
+          <a:p>
+            <a:pPr indent="0" marL="0">
+              <a:buNone/>
+            </a:pPr>
+            <a:r>
+              <a:rPr lang="en-US" sz="1200" dirty="0">
+                <a:solidFill>
+                  <a:schemeClr val="tx1"/>
+                </a:solidFill>
+              </a:rPr>
+              <a:t>Student Registration</a:t>
+            </a:r>
+            <a:endParaRPr lang="en-US" sz="1000" dirty="0"/>
+          </a:p>
+          <a:p>
+            <a:pPr indent="0" marL="0">
+              <a:buNone/>
+            </a:pPr>
+            <a:r>
+              <a:rPr lang="en-US" sz="1200" dirty="0">
+                <a:solidFill>
+                  <a:schemeClr val="tx1"/>
+                </a:solidFill>
+              </a:rPr>
+              <a:t>FVC Portal (schools)</a:t>
+            </a:r>
+            <a:endParaRPr lang="en-US" sz="1000" dirty="0"/>
+          </a:p>
+          <a:p>
+            <a:pPr indent="0" marL="0">
+              <a:buNone/>
+            </a:pPr>
+            <a:r>
+              <a:rPr lang="en-US" sz="1200" dirty="0">
+                <a:solidFill>
+                  <a:schemeClr val="tx1"/>
+                </a:solidFill>
+              </a:rPr>
+              <a:t>Dante (commercial)</a:t>
+            </a:r>
+            <a:endParaRPr lang="en-US" sz="1000" dirty="0"/>
+          </a:p>
+        </p:txBody>
+      </p:sp>
+      <p:sp>
+        <p:nvSpPr>
+          <p:cNvPr id="14" name="stage data 2"/>
+          <p:cNvSpPr/>
+          <p:nvPr/>
+        </p:nvSpPr>
+        <p:spPr>
+          <a:xfrm>
+            <a:off x="2404872" y="4389120"/>
+            <a:ext cx="1737360" cy="960120"/>
+          </a:xfrm>
+          <a:prstGeom prst="roundRect">
+            <a:avLst>
+              <a:gd name="adj" fmla="val 7619"/>
+            </a:avLst>
+          </a:prstGeom>
+          <a:solidFill>
+            <a:schemeClr val="bg2"/>
+          </a:solidFill>
+          <a:ln w="12700">
+            <a:solidFill>
+              <a:schemeClr val="bg2"/>
+            </a:solidFill>
+            <a:prstDash val="solid"/>
+          </a:ln>
+        </p:spPr>
+      </p:sp>
+      <p:sp>
+        <p:nvSpPr>
+          <p:cNvPr id="15" name="Text 13"/>
+          <p:cNvSpPr txBox="1"/>
+          <p:nvPr/>
+        </p:nvSpPr>
+        <p:spPr>
+          <a:xfrm>
+            <a:off x="2514600" y="4434840"/>
+            <a:ext cx="1554480" cy="868680"/>
+          </a:xfrm>
+          <a:prstGeom prst="rect">
+            <a:avLst/>
+          </a:prstGeom>
+          <a:noFill/>
+          <a:ln/>
+        </p:spPr>
+        <p:txBody>
+          <a:bodyPr wrap="square" lIns="0" tIns="0" rIns="0" bIns="0" rtlCol="0" anchor="t"/>
+          <a:lstStyle/>
+          <a:p>
+            <a:pPr indent="0" marL="0">
+              <a:buNone/>
+            </a:pPr>
+            <a:r>
+              <a:rPr lang="en-US" sz="1000" b="1" dirty="0">
+                <a:solidFill>
+                  <a:srgbClr val="6B6F80"/>
+                </a:solidFill>
+              </a:rPr>
+              <a:t>Data</a:t>
+            </a:r>
+            <a:endParaRPr lang="en-US" sz="1000" dirty="0"/>
+          </a:p>
+          <a:p>
+            <a:pPr indent="0" marL="0">
+              <a:buNone/>
+            </a:pPr>
+            <a:r>
+              <a:rPr lang="en-US" sz="1200" dirty="0">
+                <a:solidFill>
+                  <a:schemeClr val="tx1"/>
+                </a:solidFill>
+              </a:rPr>
+              <a:t>Application, school transition</a:t>
+            </a:r>
+            <a:endParaRPr lang="en-US" sz="1000" dirty="0"/>
+          </a:p>
+        </p:txBody>
+      </p:sp>
+      <p:sp>
+        <p:nvSpPr>
+          <p:cNvPr id="16" name="stage 3"/>
+          <p:cNvSpPr/>
+          <p:nvPr/>
+        </p:nvSpPr>
+        <p:spPr>
+          <a:xfrm>
+            <a:off x="4261104" y="1691640"/>
+            <a:ext cx="1892808" cy="731520"/>
+          </a:xfrm>
+          <a:prstGeom prst="chevron">
+            <a:avLst/>
           </a:prstGeom>
           <a:solidFill>
             <a:schemeClr val="accent1"/>
@@ -10242,54 +10296,131 @@
       </p:sp>
       <p:sp>
         <p:nvSpPr>
-          <p:cNvPr id="5" name="feed UnitE text"/>
+          <p:cNvPr id="17" name="Text 15"/>
           <p:cNvSpPr txBox="1"/>
           <p:nvPr/>
         </p:nvSpPr>
         <p:spPr>
           <a:xfrm>
-            <a:off x="594360" y="1691640"/>
-            <a:ext cx="1371600" cy="713232"/>
-          </a:xfrm>
-          <a:prstGeom prst="rect">
-            <a:avLst/>
-          </a:prstGeom>
-          <a:noFill/>
-          <a:ln/>
-        </p:spPr>
-        <p:txBody>
-          <a:bodyPr wrap="square" lIns="25400" tIns="25400" rIns="25400" bIns="25400" rtlCol="0" anchor="ctr"/>
+            <a:off x="4535424" y="1691640"/>
+            <a:ext cx="1417320" cy="731520"/>
+          </a:xfrm>
+          <a:prstGeom prst="rect">
+            <a:avLst/>
+          </a:prstGeom>
+          <a:noFill/>
+          <a:ln/>
+        </p:spPr>
+        <p:txBody>
+          <a:bodyPr wrap="square" lIns="0" tIns="0" rIns="0" bIns="0" rtlCol="0" anchor="ctr"/>
           <a:lstStyle/>
           <a:p>
             <a:pPr algn="ctr" indent="0" marL="0">
               <a:buNone/>
             </a:pPr>
             <a:r>
-              <a:rPr lang="en-US" sz="1500" b="1" dirty="0">
+              <a:rPr lang="en-US" sz="1300" b="1" dirty="0">
                 <a:solidFill>
                   <a:schemeClr val="bg1"/>
                 </a:solidFill>
               </a:rPr>
-              <a:t>UnitE</a:t>
-            </a:r>
-            <a:endParaRPr lang="en-US" sz="1500" dirty="0"/>
-          </a:p>
-        </p:txBody>
-      </p:sp>
-      <p:sp>
-        <p:nvSpPr>
-          <p:cNvPr id="6" name="feed detail UnitE"/>
-          <p:cNvSpPr/>
-          <p:nvPr/>
-        </p:nvSpPr>
-        <p:spPr>
-          <a:xfrm>
-            <a:off x="2103120" y="1691640"/>
-            <a:ext cx="4206240" cy="713232"/>
+              <a:t>Enrol</a:t>
+            </a:r>
+            <a:endParaRPr lang="en-US" sz="1300" dirty="0"/>
+          </a:p>
+        </p:txBody>
+      </p:sp>
+      <p:sp>
+        <p:nvSpPr>
+          <p:cNvPr id="18" name="stage systems 3"/>
+          <p:cNvSpPr/>
+          <p:nvPr/>
+        </p:nvSpPr>
+        <p:spPr>
+          <a:xfrm>
+            <a:off x="4261104" y="2651760"/>
+            <a:ext cx="1737360" cy="1600200"/>
           </a:xfrm>
           <a:prstGeom prst="roundRect">
             <a:avLst>
-              <a:gd name="adj" fmla="val 10256"/>
+              <a:gd name="adj" fmla="val 4571"/>
+            </a:avLst>
+          </a:prstGeom>
+          <a:solidFill>
+            <a:schemeClr val="accent5"/>
+          </a:solidFill>
+          <a:ln w="12700">
+            <a:solidFill>
+              <a:schemeClr val="accent5"/>
+            </a:solidFill>
+            <a:prstDash val="solid"/>
+          </a:ln>
+        </p:spPr>
+      </p:sp>
+      <p:sp>
+        <p:nvSpPr>
+          <p:cNvPr id="19" name="Text 17"/>
+          <p:cNvSpPr txBox="1"/>
+          <p:nvPr/>
+        </p:nvSpPr>
+        <p:spPr>
+          <a:xfrm>
+            <a:off x="4370832" y="2697480"/>
+            <a:ext cx="1554480" cy="1508760"/>
+          </a:xfrm>
+          <a:prstGeom prst="rect">
+            <a:avLst/>
+          </a:prstGeom>
+          <a:noFill/>
+          <a:ln/>
+        </p:spPr>
+        <p:txBody>
+          <a:bodyPr wrap="square" lIns="0" tIns="0" rIns="0" bIns="0" rtlCol="0" anchor="t"/>
+          <a:lstStyle/>
+          <a:p>
+            <a:pPr indent="0" marL="0">
+              <a:buNone/>
+            </a:pPr>
+            <a:r>
+              <a:rPr lang="en-US" sz="1000" b="1" dirty="0">
+                <a:solidFill>
+                  <a:srgbClr val="6B6F80"/>
+                </a:solidFill>
+              </a:rPr>
+              <a:t>Systems</a:t>
+            </a:r>
+            <a:endParaRPr lang="en-US" sz="1000" dirty="0"/>
+          </a:p>
+          <a:p>
+            <a:pPr indent="0" marL="0">
+              <a:buNone/>
+            </a:pPr>
+            <a:r>
+              <a:rPr lang="en-US" sz="1200" dirty="0">
+                <a:solidFill>
+                  <a:schemeClr val="tx1"/>
+                </a:solidFill>
+              </a:rPr>
+              <a:t>UnitE</a:t>
+            </a:r>
+            <a:endParaRPr lang="en-US" sz="1000" dirty="0"/>
+          </a:p>
+        </p:txBody>
+      </p:sp>
+      <p:sp>
+        <p:nvSpPr>
+          <p:cNvPr id="20" name="stage data 3"/>
+          <p:cNvSpPr/>
+          <p:nvPr/>
+        </p:nvSpPr>
+        <p:spPr>
+          <a:xfrm>
+            <a:off x="4261104" y="4389120"/>
+            <a:ext cx="1737360" cy="960120"/>
+          </a:xfrm>
+          <a:prstGeom prst="roundRect">
+            <a:avLst>
+              <a:gd name="adj" fmla="val 7619"/>
             </a:avLst>
           </a:prstGeom>
           <a:solidFill>
@@ -10305,86 +10436,74 @@
       </p:sp>
       <p:sp>
         <p:nvSpPr>
-          <p:cNvPr id="7" name="Text 5"/>
+          <p:cNvPr id="21" name="Text 19"/>
           <p:cNvSpPr txBox="1"/>
           <p:nvPr/>
         </p:nvSpPr>
         <p:spPr>
           <a:xfrm>
-            <a:off x="2240280" y="1691640"/>
-            <a:ext cx="3977640" cy="713232"/>
-          </a:xfrm>
-          <a:prstGeom prst="rect">
-            <a:avLst/>
-          </a:prstGeom>
-          <a:noFill/>
-          <a:ln/>
-        </p:spPr>
-        <p:txBody>
-          <a:bodyPr wrap="square" lIns="0" tIns="0" rIns="0" bIns="0" rtlCol="0" anchor="ctr"/>
+            <a:off x="4370832" y="4434840"/>
+            <a:ext cx="1554480" cy="868680"/>
+          </a:xfrm>
+          <a:prstGeom prst="rect">
+            <a:avLst/>
+          </a:prstGeom>
+          <a:noFill/>
+          <a:ln/>
+        </p:spPr>
+        <p:txBody>
+          <a:bodyPr wrap="square" lIns="0" tIns="0" rIns="0" bIns="0" rtlCol="0" anchor="t"/>
           <a:lstStyle/>
           <a:p>
             <a:pPr indent="0" marL="0">
               <a:buNone/>
             </a:pPr>
             <a:r>
+              <a:rPr lang="en-US" sz="1000" b="1" dirty="0">
+                <a:solidFill>
+                  <a:srgbClr val="6B6F80"/>
+                </a:solidFill>
+              </a:rPr>
+              <a:t>Data</a:t>
+            </a:r>
+            <a:endParaRPr lang="en-US" sz="1000" dirty="0"/>
+          </a:p>
+          <a:p>
+            <a:pPr indent="0" marL="0">
+              <a:buNone/>
+            </a:pPr>
+            <a:r>
               <a:rPr lang="en-US" sz="1200" dirty="0">
                 <a:solidFill>
                   <a:schemeClr val="tx1"/>
                 </a:solidFill>
               </a:rPr>
-              <a:t>Student details, ASN, application, enrolment, course; employee details, organisation</a:t>
-            </a:r>
-            <a:endParaRPr lang="en-US" sz="1200" dirty="0"/>
-          </a:p>
-        </p:txBody>
-      </p:sp>
-      <p:sp>
-        <p:nvSpPr>
-          <p:cNvPr id="8" name="Shape 6"/>
-          <p:cNvSpPr/>
-          <p:nvPr/>
-        </p:nvSpPr>
-        <p:spPr>
-          <a:xfrm>
-            <a:off x="6355080" y="2048256"/>
-            <a:ext cx="731520" cy="1828800"/>
-          </a:xfrm>
-          <a:prstGeom prst="line">
-            <a:avLst/>
-          </a:prstGeom>
-          <a:noFill/>
-          <a:ln w="19050">
-            <a:solidFill>
-              <a:schemeClr val="accent1"/>
-            </a:solidFill>
-            <a:prstDash val="solid"/>
-            <a:tailEnd type="triangle"/>
-          </a:ln>
-        </p:spPr>
-      </p:sp>
-      <p:sp>
-        <p:nvSpPr>
-          <p:cNvPr id="9" name="feed Enquirer"/>
-          <p:cNvSpPr/>
-          <p:nvPr/>
-        </p:nvSpPr>
-        <p:spPr>
-          <a:xfrm>
-            <a:off x="548640" y="2560320"/>
-            <a:ext cx="1463040" cy="713232"/>
-          </a:xfrm>
-          <a:prstGeom prst="roundRect">
-            <a:avLst>
-              <a:gd name="adj" fmla="val 10256"/>
-            </a:avLst>
+              <a:t>Student, course, enrolment</a:t>
+            </a:r>
+            <a:endParaRPr lang="en-US" sz="1000" dirty="0"/>
+          </a:p>
+        </p:txBody>
+      </p:sp>
+      <p:sp>
+        <p:nvSpPr>
+          <p:cNvPr id="22" name="stage 4"/>
+          <p:cNvSpPr/>
+          <p:nvPr/>
+        </p:nvSpPr>
+        <p:spPr>
+          <a:xfrm>
+            <a:off x="6117336" y="1691640"/>
+            <a:ext cx="1892808" cy="731520"/>
+          </a:xfrm>
+          <a:prstGeom prst="chevron">
+            <a:avLst/>
           </a:prstGeom>
           <a:solidFill>
-            <a:schemeClr val="accent1"/>
+            <a:schemeClr val="tx2"/>
           </a:solidFill>
           <a:ln w="12700">
             <a:solidFill>
-              <a:schemeClr val="accent1"/>
+              <a:schemeClr val="tx2"/>
             </a:solidFill>
             <a:prstDash val="solid"/>
           </a:ln>
@@ -10392,54 +10511,159 @@
       </p:sp>
       <p:sp>
         <p:nvSpPr>
-          <p:cNvPr id="10" name="feed Enquirer text"/>
+          <p:cNvPr id="23" name="Text 21"/>
           <p:cNvSpPr txBox="1"/>
           <p:nvPr/>
         </p:nvSpPr>
         <p:spPr>
           <a:xfrm>
-            <a:off x="594360" y="2560320"/>
-            <a:ext cx="1371600" cy="713232"/>
-          </a:xfrm>
-          <a:prstGeom prst="rect">
-            <a:avLst/>
-          </a:prstGeom>
-          <a:noFill/>
-          <a:ln/>
-        </p:spPr>
-        <p:txBody>
-          <a:bodyPr wrap="square" lIns="25400" tIns="25400" rIns="25400" bIns="25400" rtlCol="0" anchor="ctr"/>
+            <a:off x="6391656" y="1691640"/>
+            <a:ext cx="1417320" cy="731520"/>
+          </a:xfrm>
+          <a:prstGeom prst="rect">
+            <a:avLst/>
+          </a:prstGeom>
+          <a:noFill/>
+          <a:ln/>
+        </p:spPr>
+        <p:txBody>
+          <a:bodyPr wrap="square" lIns="0" tIns="0" rIns="0" bIns="0" rtlCol="0" anchor="ctr"/>
           <a:lstStyle/>
           <a:p>
             <a:pPr algn="ctr" indent="0" marL="0">
               <a:buNone/>
             </a:pPr>
             <a:r>
-              <a:rPr lang="en-US" sz="1500" b="1" dirty="0">
+              <a:rPr lang="en-US" sz="1300" b="1" dirty="0">
                 <a:solidFill>
                   <a:schemeClr val="bg1"/>
                 </a:solidFill>
               </a:rPr>
-              <a:t>Enquirer</a:t>
-            </a:r>
-            <a:endParaRPr lang="en-US" sz="1500" dirty="0"/>
-          </a:p>
-        </p:txBody>
-      </p:sp>
-      <p:sp>
-        <p:nvSpPr>
-          <p:cNvPr id="11" name="feed detail Enquirer"/>
-          <p:cNvSpPr/>
-          <p:nvPr/>
-        </p:nvSpPr>
-        <p:spPr>
-          <a:xfrm>
-            <a:off x="2103120" y="2560320"/>
-            <a:ext cx="4206240" cy="713232"/>
+              <a:t>Learn &amp; attend</a:t>
+            </a:r>
+            <a:endParaRPr lang="en-US" sz="1300" dirty="0"/>
+          </a:p>
+        </p:txBody>
+      </p:sp>
+      <p:sp>
+        <p:nvSpPr>
+          <p:cNvPr id="24" name="stage systems 4"/>
+          <p:cNvSpPr/>
+          <p:nvPr/>
+        </p:nvSpPr>
+        <p:spPr>
+          <a:xfrm>
+            <a:off x="6117336" y="2651760"/>
+            <a:ext cx="1737360" cy="1600200"/>
           </a:xfrm>
           <a:prstGeom prst="roundRect">
             <a:avLst>
-              <a:gd name="adj" fmla="val 10256"/>
+              <a:gd name="adj" fmla="val 4571"/>
+            </a:avLst>
+          </a:prstGeom>
+          <a:solidFill>
+            <a:schemeClr val="accent5"/>
+          </a:solidFill>
+          <a:ln w="12700">
+            <a:solidFill>
+              <a:schemeClr val="accent5"/>
+            </a:solidFill>
+            <a:prstDash val="solid"/>
+          </a:ln>
+        </p:spPr>
+      </p:sp>
+      <p:sp>
+        <p:nvSpPr>
+          <p:cNvPr id="25" name="Text 23"/>
+          <p:cNvSpPr txBox="1"/>
+          <p:nvPr/>
+        </p:nvSpPr>
+        <p:spPr>
+          <a:xfrm>
+            <a:off x="6227064" y="2697480"/>
+            <a:ext cx="1554480" cy="1508760"/>
+          </a:xfrm>
+          <a:prstGeom prst="rect">
+            <a:avLst/>
+          </a:prstGeom>
+          <a:noFill/>
+          <a:ln/>
+        </p:spPr>
+        <p:txBody>
+          <a:bodyPr wrap="square" lIns="0" tIns="0" rIns="0" bIns="0" rtlCol="0" anchor="t"/>
+          <a:lstStyle/>
+          <a:p>
+            <a:pPr indent="0" marL="0">
+              <a:buNone/>
+            </a:pPr>
+            <a:r>
+              <a:rPr lang="en-US" sz="1000" b="1" dirty="0">
+                <a:solidFill>
+                  <a:srgbClr val="6B6F80"/>
+                </a:solidFill>
+              </a:rPr>
+              <a:t>Systems</a:t>
+            </a:r>
+            <a:endParaRPr lang="en-US" sz="1000" dirty="0"/>
+          </a:p>
+          <a:p>
+            <a:pPr indent="0" marL="0">
+              <a:buNone/>
+            </a:pPr>
+            <a:r>
+              <a:rPr lang="en-US" sz="1200" dirty="0">
+                <a:solidFill>
+                  <a:schemeClr val="tx1"/>
+                </a:solidFill>
+              </a:rPr>
+              <a:t>Celcat</a:t>
+            </a:r>
+            <a:endParaRPr lang="en-US" sz="1000" dirty="0"/>
+          </a:p>
+          <a:p>
+            <a:pPr indent="0" marL="0">
+              <a:buNone/>
+            </a:pPr>
+            <a:r>
+              <a:rPr lang="en-US" sz="1200" dirty="0">
+                <a:solidFill>
+                  <a:schemeClr val="tx1"/>
+                </a:solidFill>
+              </a:rPr>
+              <a:t>Moodle (VLE)</a:t>
+            </a:r>
+            <a:endParaRPr lang="en-US" sz="1000" dirty="0"/>
+          </a:p>
+          <a:p>
+            <a:pPr indent="0" marL="0">
+              <a:buNone/>
+            </a:pPr>
+            <a:r>
+              <a:rPr lang="en-US" sz="1200" dirty="0">
+                <a:solidFill>
+                  <a:schemeClr val="tx1"/>
+                </a:solidFill>
+              </a:rPr>
+              <a:t>Onefile / JTL</a:t>
+            </a:r>
+            <a:endParaRPr lang="en-US" sz="1000" dirty="0"/>
+          </a:p>
+        </p:txBody>
+      </p:sp>
+      <p:sp>
+        <p:nvSpPr>
+          <p:cNvPr id="26" name="stage data 4"/>
+          <p:cNvSpPr/>
+          <p:nvPr/>
+        </p:nvSpPr>
+        <p:spPr>
+          <a:xfrm>
+            <a:off x="6117336" y="4389120"/>
+            <a:ext cx="1737360" cy="960120"/>
+          </a:xfrm>
+          <a:prstGeom prst="roundRect">
+            <a:avLst>
+              <a:gd name="adj" fmla="val 7619"/>
             </a:avLst>
           </a:prstGeom>
           <a:solidFill>
@@ -10455,86 +10679,74 @@
       </p:sp>
       <p:sp>
         <p:nvSpPr>
-          <p:cNvPr id="12" name="Text 10"/>
+          <p:cNvPr id="27" name="Text 25"/>
           <p:cNvSpPr txBox="1"/>
           <p:nvPr/>
         </p:nvSpPr>
         <p:spPr>
           <a:xfrm>
-            <a:off x="2240280" y="2560320"/>
-            <a:ext cx="3977640" cy="713232"/>
-          </a:xfrm>
-          <a:prstGeom prst="rect">
-            <a:avLst/>
-          </a:prstGeom>
-          <a:noFill/>
-          <a:ln/>
-        </p:spPr>
-        <p:txBody>
-          <a:bodyPr wrap="square" lIns="0" tIns="0" rIns="0" bIns="0" rtlCol="0" anchor="ctr"/>
+            <a:off x="6227064" y="4434840"/>
+            <a:ext cx="1554480" cy="868680"/>
+          </a:xfrm>
+          <a:prstGeom prst="rect">
+            <a:avLst/>
+          </a:prstGeom>
+          <a:noFill/>
+          <a:ln/>
+        </p:spPr>
+        <p:txBody>
+          <a:bodyPr wrap="square" lIns="0" tIns="0" rIns="0" bIns="0" rtlCol="0" anchor="t"/>
           <a:lstStyle/>
           <a:p>
             <a:pPr indent="0" marL="0">
               <a:buNone/>
             </a:pPr>
             <a:r>
+              <a:rPr lang="en-US" sz="1000" b="1" dirty="0">
+                <a:solidFill>
+                  <a:srgbClr val="6B6F80"/>
+                </a:solidFill>
+              </a:rPr>
+              <a:t>Data</a:t>
+            </a:r>
+            <a:endParaRPr lang="en-US" sz="1000" dirty="0"/>
+          </a:p>
+          <a:p>
+            <a:pPr indent="0" marL="0">
+              <a:buNone/>
+            </a:pPr>
+            <a:r>
               <a:rPr lang="en-US" sz="1200" dirty="0">
                 <a:solidFill>
                   <a:schemeClr val="tx1"/>
                 </a:solidFill>
               </a:rPr>
-              <a:t>Bursary engagement, curriculum planning, attendance, PEEP, care placement</a:t>
-            </a:r>
-            <a:endParaRPr lang="en-US" sz="1200" dirty="0"/>
-          </a:p>
-        </p:txBody>
-      </p:sp>
-      <p:sp>
-        <p:nvSpPr>
-          <p:cNvPr id="13" name="Shape 11"/>
-          <p:cNvSpPr/>
-          <p:nvPr/>
-        </p:nvSpPr>
-        <p:spPr>
-          <a:xfrm>
-            <a:off x="6355080" y="2916936"/>
-            <a:ext cx="731520" cy="960120"/>
-          </a:xfrm>
-          <a:prstGeom prst="line">
-            <a:avLst/>
-          </a:prstGeom>
-          <a:noFill/>
-          <a:ln w="19050">
-            <a:solidFill>
-              <a:schemeClr val="accent1"/>
-            </a:solidFill>
-            <a:prstDash val="solid"/>
-            <a:tailEnd type="triangle"/>
-          </a:ln>
-        </p:spPr>
-      </p:sp>
-      <p:sp>
-        <p:nvSpPr>
-          <p:cNvPr id="14" name="feed iTrent"/>
-          <p:cNvSpPr/>
-          <p:nvPr/>
-        </p:nvSpPr>
-        <p:spPr>
-          <a:xfrm>
-            <a:off x="548640" y="3429000"/>
-            <a:ext cx="1463040" cy="713232"/>
-          </a:xfrm>
-          <a:prstGeom prst="roundRect">
-            <a:avLst>
-              <a:gd name="adj" fmla="val 10256"/>
-            </a:avLst>
+              <a:t>Timetable, attendance, e-portfolio</a:t>
+            </a:r>
+            <a:endParaRPr lang="en-US" sz="1000" dirty="0"/>
+          </a:p>
+        </p:txBody>
+      </p:sp>
+      <p:sp>
+        <p:nvSpPr>
+          <p:cNvPr id="28" name="stage 5"/>
+          <p:cNvSpPr/>
+          <p:nvPr/>
+        </p:nvSpPr>
+        <p:spPr>
+          <a:xfrm>
+            <a:off x="7973568" y="1691640"/>
+            <a:ext cx="1892808" cy="731520"/>
+          </a:xfrm>
+          <a:prstGeom prst="chevron">
+            <a:avLst/>
           </a:prstGeom>
           <a:solidFill>
-            <a:schemeClr val="accent1"/>
+            <a:schemeClr val="tx2"/>
           </a:solidFill>
           <a:ln w="12700">
             <a:solidFill>
-              <a:schemeClr val="accent1"/>
+              <a:schemeClr val="tx2"/>
             </a:solidFill>
             <a:prstDash val="solid"/>
           </a:ln>
@@ -10542,54 +10754,159 @@
       </p:sp>
       <p:sp>
         <p:nvSpPr>
-          <p:cNvPr id="15" name="feed iTrent text"/>
+          <p:cNvPr id="29" name="Text 27"/>
           <p:cNvSpPr txBox="1"/>
           <p:nvPr/>
         </p:nvSpPr>
         <p:spPr>
           <a:xfrm>
-            <a:off x="594360" y="3429000"/>
-            <a:ext cx="1371600" cy="713232"/>
-          </a:xfrm>
-          <a:prstGeom prst="rect">
-            <a:avLst/>
-          </a:prstGeom>
-          <a:noFill/>
-          <a:ln/>
-        </p:spPr>
-        <p:txBody>
-          <a:bodyPr wrap="square" lIns="25400" tIns="25400" rIns="25400" bIns="25400" rtlCol="0" anchor="ctr"/>
+            <a:off x="8247888" y="1691640"/>
+            <a:ext cx="1417320" cy="731520"/>
+          </a:xfrm>
+          <a:prstGeom prst="rect">
+            <a:avLst/>
+          </a:prstGeom>
+          <a:noFill/>
+          <a:ln/>
+        </p:spPr>
+        <p:txBody>
+          <a:bodyPr wrap="square" lIns="0" tIns="0" rIns="0" bIns="0" rtlCol="0" anchor="ctr"/>
           <a:lstStyle/>
           <a:p>
             <a:pPr algn="ctr" indent="0" marL="0">
               <a:buNone/>
             </a:pPr>
             <a:r>
-              <a:rPr lang="en-US" sz="1500" b="1" dirty="0">
+              <a:rPr lang="en-US" sz="1300" b="1" dirty="0">
                 <a:solidFill>
                   <a:schemeClr val="bg1"/>
                 </a:solidFill>
               </a:rPr>
-              <a:t>iTrent</a:t>
-            </a:r>
-            <a:endParaRPr lang="en-US" sz="1500" dirty="0"/>
-          </a:p>
-        </p:txBody>
-      </p:sp>
-      <p:sp>
-        <p:nvSpPr>
-          <p:cNvPr id="16" name="feed detail iTrent"/>
-          <p:cNvSpPr/>
-          <p:nvPr/>
-        </p:nvSpPr>
-        <p:spPr>
-          <a:xfrm>
-            <a:off x="2103120" y="3429000"/>
-            <a:ext cx="4206240" cy="713232"/>
+              <a:t>Support &amp; fund</a:t>
+            </a:r>
+            <a:endParaRPr lang="en-US" sz="1300" dirty="0"/>
+          </a:p>
+        </p:txBody>
+      </p:sp>
+      <p:sp>
+        <p:nvSpPr>
+          <p:cNvPr id="30" name="stage systems 5"/>
+          <p:cNvSpPr/>
+          <p:nvPr/>
+        </p:nvSpPr>
+        <p:spPr>
+          <a:xfrm>
+            <a:off x="7973568" y="2651760"/>
+            <a:ext cx="1737360" cy="1600200"/>
           </a:xfrm>
           <a:prstGeom prst="roundRect">
             <a:avLst>
-              <a:gd name="adj" fmla="val 10256"/>
+              <a:gd name="adj" fmla="val 4571"/>
+            </a:avLst>
+          </a:prstGeom>
+          <a:solidFill>
+            <a:schemeClr val="accent5"/>
+          </a:solidFill>
+          <a:ln w="12700">
+            <a:solidFill>
+              <a:schemeClr val="accent5"/>
+            </a:solidFill>
+            <a:prstDash val="solid"/>
+          </a:ln>
+        </p:spPr>
+      </p:sp>
+      <p:sp>
+        <p:nvSpPr>
+          <p:cNvPr id="31" name="Text 29"/>
+          <p:cNvSpPr txBox="1"/>
+          <p:nvPr/>
+        </p:nvSpPr>
+        <p:spPr>
+          <a:xfrm>
+            <a:off x="8083296" y="2697480"/>
+            <a:ext cx="1554480" cy="1508760"/>
+          </a:xfrm>
+          <a:prstGeom prst="rect">
+            <a:avLst/>
+          </a:prstGeom>
+          <a:noFill/>
+          <a:ln/>
+        </p:spPr>
+        <p:txBody>
+          <a:bodyPr wrap="square" lIns="0" tIns="0" rIns="0" bIns="0" rtlCol="0" anchor="t"/>
+          <a:lstStyle/>
+          <a:p>
+            <a:pPr indent="0" marL="0">
+              <a:buNone/>
+            </a:pPr>
+            <a:r>
+              <a:rPr lang="en-US" sz="1000" b="1" dirty="0">
+                <a:solidFill>
+                  <a:srgbClr val="6B6F80"/>
+                </a:solidFill>
+              </a:rPr>
+              <a:t>Systems</a:t>
+            </a:r>
+            <a:endParaRPr lang="en-US" sz="1000" dirty="0"/>
+          </a:p>
+          <a:p>
+            <a:pPr indent="0" marL="0">
+              <a:buNone/>
+            </a:pPr>
+            <a:r>
+              <a:rPr lang="en-US" sz="1200" dirty="0">
+                <a:solidFill>
+                  <a:schemeClr val="tx1"/>
+                </a:solidFill>
+              </a:rPr>
+              <a:t>TripleS</a:t>
+            </a:r>
+            <a:endParaRPr lang="en-US" sz="1000" dirty="0"/>
+          </a:p>
+          <a:p>
+            <a:pPr indent="0" marL="0">
+              <a:buNone/>
+            </a:pPr>
+            <a:r>
+              <a:rPr lang="en-US" sz="1200" dirty="0">
+                <a:solidFill>
+                  <a:schemeClr val="tx1"/>
+                </a:solidFill>
+              </a:rPr>
+              <a:t>Bursary</a:t>
+            </a:r>
+            <a:endParaRPr lang="en-US" sz="1000" dirty="0"/>
+          </a:p>
+          <a:p>
+            <a:pPr indent="0" marL="0">
+              <a:buNone/>
+            </a:pPr>
+            <a:r>
+              <a:rPr lang="en-US" sz="1200" dirty="0">
+                <a:solidFill>
+                  <a:schemeClr val="tx1"/>
+                </a:solidFill>
+              </a:rPr>
+              <a:t>SAAS (external)</a:t>
+            </a:r>
+            <a:endParaRPr lang="en-US" sz="1000" dirty="0"/>
+          </a:p>
+        </p:txBody>
+      </p:sp>
+      <p:sp>
+        <p:nvSpPr>
+          <p:cNvPr id="32" name="stage data 5"/>
+          <p:cNvSpPr/>
+          <p:nvPr/>
+        </p:nvSpPr>
+        <p:spPr>
+          <a:xfrm>
+            <a:off x="7973568" y="4389120"/>
+            <a:ext cx="1737360" cy="960120"/>
+          </a:xfrm>
+          <a:prstGeom prst="roundRect">
+            <a:avLst>
+              <a:gd name="adj" fmla="val 7619"/>
             </a:avLst>
           </a:prstGeom>
           <a:solidFill>
@@ -10605,86 +10922,74 @@
       </p:sp>
       <p:sp>
         <p:nvSpPr>
-          <p:cNvPr id="17" name="Text 15"/>
+          <p:cNvPr id="33" name="Text 31"/>
           <p:cNvSpPr txBox="1"/>
           <p:nvPr/>
         </p:nvSpPr>
         <p:spPr>
           <a:xfrm>
-            <a:off x="2240280" y="3429000"/>
-            <a:ext cx="3977640" cy="713232"/>
-          </a:xfrm>
-          <a:prstGeom prst="rect">
-            <a:avLst/>
-          </a:prstGeom>
-          <a:noFill/>
-          <a:ln/>
-        </p:spPr>
-        <p:txBody>
-          <a:bodyPr wrap="square" lIns="0" tIns="0" rIns="0" bIns="0" rtlCol="0" anchor="ctr"/>
+            <a:off x="8083296" y="4434840"/>
+            <a:ext cx="1554480" cy="868680"/>
+          </a:xfrm>
+          <a:prstGeom prst="rect">
+            <a:avLst/>
+          </a:prstGeom>
+          <a:noFill/>
+          <a:ln/>
+        </p:spPr>
+        <p:txBody>
+          <a:bodyPr wrap="square" lIns="0" tIns="0" rIns="0" bIns="0" rtlCol="0" anchor="t"/>
           <a:lstStyle/>
           <a:p>
             <a:pPr indent="0" marL="0">
               <a:buNone/>
             </a:pPr>
             <a:r>
+              <a:rPr lang="en-US" sz="1000" b="1" dirty="0">
+                <a:solidFill>
+                  <a:srgbClr val="6B6F80"/>
+                </a:solidFill>
+              </a:rPr>
+              <a:t>Data</a:t>
+            </a:r>
+            <a:endParaRPr lang="en-US" sz="1000" dirty="0"/>
+          </a:p>
+          <a:p>
+            <a:pPr indent="0" marL="0">
+              <a:buNone/>
+            </a:pPr>
+            <a:r>
               <a:rPr lang="en-US" sz="1200" dirty="0">
                 <a:solidFill>
                   <a:schemeClr val="tx1"/>
                 </a:solidFill>
               </a:rPr>
-              <a:t>All employee data: detail, work pattern, payroll, job role</a:t>
-            </a:r>
-            <a:endParaRPr lang="en-US" sz="1200" dirty="0"/>
-          </a:p>
-        </p:txBody>
-      </p:sp>
-      <p:sp>
-        <p:nvSpPr>
-          <p:cNvPr id="18" name="Shape 16"/>
-          <p:cNvSpPr/>
-          <p:nvPr/>
-        </p:nvSpPr>
-        <p:spPr>
-          <a:xfrm>
-            <a:off x="6355080" y="3785616"/>
-            <a:ext cx="731520" cy="91440"/>
-          </a:xfrm>
-          <a:prstGeom prst="line">
-            <a:avLst/>
-          </a:prstGeom>
-          <a:noFill/>
-          <a:ln w="19050">
-            <a:solidFill>
-              <a:schemeClr val="accent1"/>
-            </a:solidFill>
-            <a:prstDash val="solid"/>
-            <a:tailEnd type="triangle"/>
-          </a:ln>
-        </p:spPr>
-      </p:sp>
-      <p:sp>
-        <p:nvSpPr>
-          <p:cNvPr id="19" name="feed TripleS"/>
-          <p:cNvSpPr/>
-          <p:nvPr/>
-        </p:nvSpPr>
-        <p:spPr>
-          <a:xfrm>
-            <a:off x="548640" y="4297680"/>
-            <a:ext cx="1463040" cy="713232"/>
-          </a:xfrm>
-          <a:prstGeom prst="roundRect">
-            <a:avLst>
-              <a:gd name="adj" fmla="val 10256"/>
-            </a:avLst>
+              <a:t>ASN, PEEP, bursary awards</a:t>
+            </a:r>
+            <a:endParaRPr lang="en-US" sz="1000" dirty="0"/>
+          </a:p>
+        </p:txBody>
+      </p:sp>
+      <p:sp>
+        <p:nvSpPr>
+          <p:cNvPr id="34" name="stage 6"/>
+          <p:cNvSpPr/>
+          <p:nvPr/>
+        </p:nvSpPr>
+        <p:spPr>
+          <a:xfrm>
+            <a:off x="9829800" y="1691640"/>
+            <a:ext cx="1892808" cy="731520"/>
+          </a:xfrm>
+          <a:prstGeom prst="chevron">
+            <a:avLst/>
           </a:prstGeom>
           <a:solidFill>
-            <a:schemeClr val="accent1"/>
+            <a:schemeClr val="tx2"/>
           </a:solidFill>
           <a:ln w="12700">
             <a:solidFill>
-              <a:schemeClr val="accent1"/>
+              <a:schemeClr val="tx2"/>
             </a:solidFill>
             <a:prstDash val="solid"/>
           </a:ln>
@@ -10692,54 +10997,159 @@
       </p:sp>
       <p:sp>
         <p:nvSpPr>
-          <p:cNvPr id="20" name="feed TripleS text"/>
+          <p:cNvPr id="35" name="Text 33"/>
           <p:cNvSpPr txBox="1"/>
           <p:nvPr/>
         </p:nvSpPr>
         <p:spPr>
           <a:xfrm>
-            <a:off x="594360" y="4297680"/>
-            <a:ext cx="1371600" cy="713232"/>
-          </a:xfrm>
-          <a:prstGeom prst="rect">
-            <a:avLst/>
-          </a:prstGeom>
-          <a:noFill/>
-          <a:ln/>
-        </p:spPr>
-        <p:txBody>
-          <a:bodyPr wrap="square" lIns="25400" tIns="25400" rIns="25400" bIns="25400" rtlCol="0" anchor="ctr"/>
+            <a:off x="10104120" y="1691640"/>
+            <a:ext cx="1417320" cy="731520"/>
+          </a:xfrm>
+          <a:prstGeom prst="rect">
+            <a:avLst/>
+          </a:prstGeom>
+          <a:noFill/>
+          <a:ln/>
+        </p:spPr>
+        <p:txBody>
+          <a:bodyPr wrap="square" lIns="0" tIns="0" rIns="0" bIns="0" rtlCol="0" anchor="ctr"/>
           <a:lstStyle/>
           <a:p>
             <a:pPr algn="ctr" indent="0" marL="0">
               <a:buNone/>
             </a:pPr>
             <a:r>
-              <a:rPr lang="en-US" sz="1500" b="1" dirty="0">
+              <a:rPr lang="en-US" sz="1300" b="1" dirty="0">
                 <a:solidFill>
                   <a:schemeClr val="bg1"/>
                 </a:solidFill>
               </a:rPr>
-              <a:t>TripleS</a:t>
-            </a:r>
-            <a:endParaRPr lang="en-US" sz="1500" dirty="0"/>
-          </a:p>
-        </p:txBody>
-      </p:sp>
-      <p:sp>
-        <p:nvSpPr>
-          <p:cNvPr id="21" name="feed detail TripleS"/>
-          <p:cNvSpPr/>
-          <p:nvPr/>
-        </p:nvSpPr>
-        <p:spPr>
-          <a:xfrm>
-            <a:off x="2103120" y="4297680"/>
-            <a:ext cx="4206240" cy="713232"/>
+              <a:t>Achieve &amp; progress</a:t>
+            </a:r>
+            <a:endParaRPr lang="en-US" sz="1300" dirty="0"/>
+          </a:p>
+        </p:txBody>
+      </p:sp>
+      <p:sp>
+        <p:nvSpPr>
+          <p:cNvPr id="36" name="stage systems 6"/>
+          <p:cNvSpPr/>
+          <p:nvPr/>
+        </p:nvSpPr>
+        <p:spPr>
+          <a:xfrm>
+            <a:off x="9829800" y="2651760"/>
+            <a:ext cx="1737360" cy="1600200"/>
           </a:xfrm>
           <a:prstGeom prst="roundRect">
             <a:avLst>
-              <a:gd name="adj" fmla="val 10256"/>
+              <a:gd name="adj" fmla="val 4571"/>
+            </a:avLst>
+          </a:prstGeom>
+          <a:solidFill>
+            <a:schemeClr val="accent5"/>
+          </a:solidFill>
+          <a:ln w="12700">
+            <a:solidFill>
+              <a:schemeClr val="accent5"/>
+            </a:solidFill>
+            <a:prstDash val="solid"/>
+          </a:ln>
+        </p:spPr>
+      </p:sp>
+      <p:sp>
+        <p:nvSpPr>
+          <p:cNvPr id="37" name="Text 35"/>
+          <p:cNvSpPr txBox="1"/>
+          <p:nvPr/>
+        </p:nvSpPr>
+        <p:spPr>
+          <a:xfrm>
+            <a:off x="9939528" y="2697480"/>
+            <a:ext cx="1554480" cy="1508760"/>
+          </a:xfrm>
+          <a:prstGeom prst="rect">
+            <a:avLst/>
+          </a:prstGeom>
+          <a:noFill/>
+          <a:ln/>
+        </p:spPr>
+        <p:txBody>
+          <a:bodyPr wrap="square" lIns="0" tIns="0" rIns="0" bIns="0" rtlCol="0" anchor="t"/>
+          <a:lstStyle/>
+          <a:p>
+            <a:pPr indent="0" marL="0">
+              <a:buNone/>
+            </a:pPr>
+            <a:r>
+              <a:rPr lang="en-US" sz="1000" b="1" dirty="0">
+                <a:solidFill>
+                  <a:srgbClr val="6B6F80"/>
+                </a:solidFill>
+              </a:rPr>
+              <a:t>Systems</a:t>
+            </a:r>
+            <a:endParaRPr lang="en-US" sz="1000" dirty="0"/>
+          </a:p>
+          <a:p>
+            <a:pPr indent="0" marL="0">
+              <a:buNone/>
+            </a:pPr>
+            <a:r>
+              <a:rPr lang="en-US" sz="1200" dirty="0">
+                <a:solidFill>
+                  <a:schemeClr val="tx1"/>
+                </a:solidFill>
+              </a:rPr>
+              <a:t>Dataserve</a:t>
+            </a:r>
+            <a:endParaRPr lang="en-US" sz="1000" dirty="0"/>
+          </a:p>
+          <a:p>
+            <a:pPr indent="0" marL="0">
+              <a:buNone/>
+            </a:pPr>
+            <a:r>
+              <a:rPr lang="en-US" sz="1200" dirty="0">
+                <a:solidFill>
+                  <a:schemeClr val="tx1"/>
+                </a:solidFill>
+              </a:rPr>
+              <a:t>UCAS · NAD</a:t>
+            </a:r>
+            <a:endParaRPr lang="en-US" sz="1000" dirty="0"/>
+          </a:p>
+          <a:p>
+            <a:pPr indent="0" marL="0">
+              <a:buNone/>
+            </a:pPr>
+            <a:r>
+              <a:rPr lang="en-US" sz="1200" dirty="0">
+                <a:solidFill>
+                  <a:schemeClr val="tx1"/>
+                </a:solidFill>
+              </a:rPr>
+              <a:t>Partner universities</a:t>
+            </a:r>
+            <a:endParaRPr lang="en-US" sz="1000" dirty="0"/>
+          </a:p>
+        </p:txBody>
+      </p:sp>
+      <p:sp>
+        <p:nvSpPr>
+          <p:cNvPr id="38" name="stage data 6"/>
+          <p:cNvSpPr/>
+          <p:nvPr/>
+        </p:nvSpPr>
+        <p:spPr>
+          <a:xfrm>
+            <a:off x="9829800" y="4389120"/>
+            <a:ext cx="1737360" cy="960120"/>
+          </a:xfrm>
+          <a:prstGeom prst="roundRect">
+            <a:avLst>
+              <a:gd name="adj" fmla="val 7619"/>
             </a:avLst>
           </a:prstGeom>
           <a:solidFill>
@@ -10755,228 +11165,68 @@
       </p:sp>
       <p:sp>
         <p:nvSpPr>
-          <p:cNvPr id="22" name="Text 20"/>
+          <p:cNvPr id="39" name="Text 37"/>
           <p:cNvSpPr txBox="1"/>
           <p:nvPr/>
         </p:nvSpPr>
         <p:spPr>
           <a:xfrm>
-            <a:off x="2240280" y="4297680"/>
-            <a:ext cx="3977640" cy="713232"/>
-          </a:xfrm>
-          <a:prstGeom prst="rect">
-            <a:avLst/>
-          </a:prstGeom>
-          <a:noFill/>
-          <a:ln/>
-        </p:spPr>
-        <p:txBody>
-          <a:bodyPr wrap="square" lIns="0" tIns="0" rIns="0" bIns="0" rtlCol="0" anchor="ctr"/>
+            <a:off x="9939528" y="4434840"/>
+            <a:ext cx="1554480" cy="868680"/>
+          </a:xfrm>
+          <a:prstGeom prst="rect">
+            <a:avLst/>
+          </a:prstGeom>
+          <a:noFill/>
+          <a:ln/>
+        </p:spPr>
+        <p:txBody>
+          <a:bodyPr wrap="square" lIns="0" tIns="0" rIns="0" bIns="0" rtlCol="0" anchor="t"/>
           <a:lstStyle/>
           <a:p>
             <a:pPr indent="0" marL="0">
               <a:buNone/>
             </a:pPr>
             <a:r>
+              <a:rPr lang="en-US" sz="1000" b="1" dirty="0">
+                <a:solidFill>
+                  <a:srgbClr val="6B6F80"/>
+                </a:solidFill>
+              </a:rPr>
+              <a:t>Data</a:t>
+            </a:r>
+            <a:endParaRPr lang="en-US" sz="1000" dirty="0"/>
+          </a:p>
+          <a:p>
+            <a:pPr indent="0" marL="0">
+              <a:buNone/>
+            </a:pPr>
+            <a:r>
               <a:rPr lang="en-US" sz="1200" dirty="0">
                 <a:solidFill>
                   <a:schemeClr val="tx1"/>
                 </a:solidFill>
               </a:rPr>
-              <a:t>ASN and school transition</a:t>
-            </a:r>
-            <a:endParaRPr lang="en-US" sz="1200" dirty="0"/>
-          </a:p>
-        </p:txBody>
-      </p:sp>
-      <p:sp>
-        <p:nvSpPr>
-          <p:cNvPr id="23" name="Shape 21"/>
-          <p:cNvSpPr/>
-          <p:nvPr/>
-        </p:nvSpPr>
-        <p:spPr>
-          <a:xfrm flipV="1">
-            <a:off x="6355080" y="3877056"/>
-            <a:ext cx="731520" cy="777240"/>
-          </a:xfrm>
-          <a:prstGeom prst="line">
-            <a:avLst/>
-          </a:prstGeom>
-          <a:noFill/>
-          <a:ln w="19050">
-            <a:solidFill>
-              <a:schemeClr val="accent1"/>
-            </a:solidFill>
-            <a:prstDash val="solid"/>
-            <a:tailEnd type="triangle"/>
-          </a:ln>
-        </p:spPr>
-      </p:sp>
-      <p:sp>
-        <p:nvSpPr>
-          <p:cNvPr id="24" name="feed Bursary"/>
-          <p:cNvSpPr/>
-          <p:nvPr/>
-        </p:nvSpPr>
-        <p:spPr>
-          <a:xfrm>
-            <a:off x="548640" y="5166360"/>
-            <a:ext cx="1463040" cy="713232"/>
+              <a:t>Results, destinations</a:t>
+            </a:r>
+            <a:endParaRPr lang="en-US" sz="1000" dirty="0"/>
+          </a:p>
+        </p:txBody>
+      </p:sp>
+      <p:sp>
+        <p:nvSpPr>
+          <p:cNvPr id="40" name="reporting band"/>
+          <p:cNvSpPr/>
+          <p:nvPr/>
+        </p:nvSpPr>
+        <p:spPr>
+          <a:xfrm>
+            <a:off x="548640" y="5532120"/>
+            <a:ext cx="11064240" cy="685800"/>
           </a:xfrm>
           <a:prstGeom prst="roundRect">
             <a:avLst>
-              <a:gd name="adj" fmla="val 10256"/>
-            </a:avLst>
-          </a:prstGeom>
-          <a:solidFill>
-            <a:schemeClr val="accent1"/>
-          </a:solidFill>
-          <a:ln w="12700">
-            <a:solidFill>
-              <a:schemeClr val="accent1"/>
-            </a:solidFill>
-            <a:prstDash val="solid"/>
-          </a:ln>
-        </p:spPr>
-      </p:sp>
-      <p:sp>
-        <p:nvSpPr>
-          <p:cNvPr id="25" name="feed Bursary text"/>
-          <p:cNvSpPr txBox="1"/>
-          <p:nvPr/>
-        </p:nvSpPr>
-        <p:spPr>
-          <a:xfrm>
-            <a:off x="594360" y="5166360"/>
-            <a:ext cx="1371600" cy="713232"/>
-          </a:xfrm>
-          <a:prstGeom prst="rect">
-            <a:avLst/>
-          </a:prstGeom>
-          <a:noFill/>
-          <a:ln/>
-        </p:spPr>
-        <p:txBody>
-          <a:bodyPr wrap="square" lIns="25400" tIns="25400" rIns="25400" bIns="25400" rtlCol="0" anchor="ctr"/>
-          <a:lstStyle/>
-          <a:p>
-            <a:pPr algn="ctr" indent="0" marL="0">
-              <a:buNone/>
-            </a:pPr>
-            <a:r>
-              <a:rPr lang="en-US" sz="1500" b="1" dirty="0">
-                <a:solidFill>
-                  <a:schemeClr val="bg1"/>
-                </a:solidFill>
-              </a:rPr>
-              <a:t>Bursary</a:t>
-            </a:r>
-            <a:endParaRPr lang="en-US" sz="1500" dirty="0"/>
-          </a:p>
-        </p:txBody>
-      </p:sp>
-      <p:sp>
-        <p:nvSpPr>
-          <p:cNvPr id="26" name="feed detail Bursary"/>
-          <p:cNvSpPr/>
-          <p:nvPr/>
-        </p:nvSpPr>
-        <p:spPr>
-          <a:xfrm>
-            <a:off x="2103120" y="5166360"/>
-            <a:ext cx="4206240" cy="713232"/>
-          </a:xfrm>
-          <a:prstGeom prst="roundRect">
-            <a:avLst>
-              <a:gd name="adj" fmla="val 10256"/>
-            </a:avLst>
-          </a:prstGeom>
-          <a:solidFill>
-            <a:schemeClr val="bg2"/>
-          </a:solidFill>
-          <a:ln w="12700">
-            <a:solidFill>
-              <a:schemeClr val="bg2"/>
-            </a:solidFill>
-            <a:prstDash val="solid"/>
-          </a:ln>
-        </p:spPr>
-      </p:sp>
-      <p:sp>
-        <p:nvSpPr>
-          <p:cNvPr id="27" name="Text 25"/>
-          <p:cNvSpPr txBox="1"/>
-          <p:nvPr/>
-        </p:nvSpPr>
-        <p:spPr>
-          <a:xfrm>
-            <a:off x="2240280" y="5166360"/>
-            <a:ext cx="3977640" cy="713232"/>
-          </a:xfrm>
-          <a:prstGeom prst="rect">
-            <a:avLst/>
-          </a:prstGeom>
-          <a:noFill/>
-          <a:ln/>
-        </p:spPr>
-        <p:txBody>
-          <a:bodyPr wrap="square" lIns="0" tIns="0" rIns="0" bIns="0" rtlCol="0" anchor="ctr"/>
-          <a:lstStyle/>
-          <a:p>
-            <a:pPr indent="0" marL="0">
-              <a:buNone/>
-            </a:pPr>
-            <a:r>
-              <a:rPr lang="en-US" sz="1200" dirty="0">
-                <a:solidFill>
-                  <a:schemeClr val="tx1"/>
-                </a:solidFill>
-              </a:rPr>
-              <a:t>Applications and awards</a:t>
-            </a:r>
-            <a:endParaRPr lang="en-US" sz="1200" dirty="0"/>
-          </a:p>
-        </p:txBody>
-      </p:sp>
-      <p:sp>
-        <p:nvSpPr>
-          <p:cNvPr id="28" name="Shape 26"/>
-          <p:cNvSpPr/>
-          <p:nvPr/>
-        </p:nvSpPr>
-        <p:spPr>
-          <a:xfrm flipV="1">
-            <a:off x="6355080" y="3877056"/>
-            <a:ext cx="731520" cy="1645920"/>
-          </a:xfrm>
-          <a:prstGeom prst="line">
-            <a:avLst/>
-          </a:prstGeom>
-          <a:noFill/>
-          <a:ln w="19050">
-            <a:solidFill>
-              <a:schemeClr val="accent1"/>
-            </a:solidFill>
-            <a:prstDash val="solid"/>
-            <a:tailEnd type="triangle"/>
-          </a:ln>
-        </p:spPr>
-      </p:sp>
-      <p:sp>
-        <p:nvSpPr>
-          <p:cNvPr id="29" name="connector"/>
-          <p:cNvSpPr/>
-          <p:nvPr/>
-        </p:nvSpPr>
-        <p:spPr>
-          <a:xfrm>
-            <a:off x="7132320" y="3291840"/>
-            <a:ext cx="2011680" cy="1188720"/>
-          </a:xfrm>
-          <a:prstGeom prst="roundRect">
-            <a:avLst>
-              <a:gd name="adj" fmla="val 6154"/>
+              <a:gd name="adj" fmla="val 13333"/>
             </a:avLst>
           </a:prstGeom>
           <a:solidFill>
@@ -10988,247 +11238,52 @@
             </a:solidFill>
             <a:prstDash val="solid"/>
           </a:ln>
-          <a:effectLst>
-            <a:outerShdw sx="100000" sy="100000" kx="0" ky="0" algn="bl" rotWithShape="0" blurRad="50800" dist="25400" dir="5400000">
-              <a:srgbClr val="000000">
-                <a:alpha val="15000"/>
-              </a:srgbClr>
-            </a:outerShdw>
-          </a:effectLst>
-        </p:spPr>
-      </p:sp>
-      <p:sp>
-        <p:nvSpPr>
-          <p:cNvPr id="30" name="connector text"/>
+        </p:spPr>
+      </p:sp>
+      <p:sp>
+        <p:nvSpPr>
+          <p:cNvPr id="41" name="Text 39"/>
           <p:cNvSpPr txBox="1"/>
           <p:nvPr/>
         </p:nvSpPr>
         <p:spPr>
           <a:xfrm>
-            <a:off x="7178040" y="3291840"/>
-            <a:ext cx="1920240" cy="1188720"/>
-          </a:xfrm>
-          <a:prstGeom prst="rect">
-            <a:avLst/>
-          </a:prstGeom>
-          <a:noFill/>
-          <a:ln/>
-        </p:spPr>
-        <p:txBody>
-          <a:bodyPr wrap="square" lIns="25400" tIns="25400" rIns="25400" bIns="25400" rtlCol="0" anchor="ctr"/>
-          <a:lstStyle/>
-          <a:p>
-            <a:pPr algn="ctr" indent="0" marL="0">
-              <a:buNone/>
-            </a:pPr>
-            <a:r>
-              <a:rPr lang="en-US" sz="1600" b="1" dirty="0">
+            <a:off x="777240" y="5532120"/>
+            <a:ext cx="10607040" cy="685800"/>
+          </a:xfrm>
+          <a:prstGeom prst="rect">
+            <a:avLst/>
+          </a:prstGeom>
+          <a:noFill/>
+          <a:ln/>
+        </p:spPr>
+        <p:txBody>
+          <a:bodyPr wrap="square" lIns="0" tIns="0" rIns="0" bIns="0" rtlCol="0" anchor="ctr"/>
+          <a:lstStyle/>
+          <a:p>
+            <a:pPr indent="0" marL="0">
+              <a:buNone/>
+            </a:pPr>
+            <a:r>
+              <a:rPr lang="en-US" sz="1300" b="1" dirty="0">
                 <a:solidFill>
                   <a:schemeClr val="bg1"/>
                 </a:solidFill>
               </a:rPr>
-              <a:t>Data Connector</a:t>
-            </a:r>
-            <a:endParaRPr lang="en-US" sz="1600" dirty="0"/>
-          </a:p>
-          <a:p>
-            <a:pPr algn="ctr" indent="0" marL="0">
-              <a:buNone/>
-            </a:pPr>
-            <a:r>
-              <a:rPr lang="en-US" sz="1200" dirty="0">
+              <a:t>Across every stage:  </a:t>
+            </a:r>
+            <a:pPr indent="0" marL="0">
+              <a:buNone/>
+            </a:pPr>
+            <a:r>
+              <a:rPr lang="en-US" sz="1300" dirty="0">
                 <a:solidFill>
                   <a:schemeClr val="bg1"/>
                 </a:solidFill>
               </a:rPr>
-              <a:t>SQL Server</a:t>
-            </a:r>
-            <a:endParaRPr lang="en-US" sz="1600" dirty="0"/>
-          </a:p>
-        </p:txBody>
-      </p:sp>
-      <p:sp>
-        <p:nvSpPr>
-          <p:cNvPr id="31" name="Shape 29"/>
-          <p:cNvSpPr/>
-          <p:nvPr/>
-        </p:nvSpPr>
-        <p:spPr>
-          <a:xfrm>
-            <a:off x="9189720" y="3886200"/>
-            <a:ext cx="411480" cy="914"/>
-          </a:xfrm>
-          <a:prstGeom prst="line">
-            <a:avLst/>
-          </a:prstGeom>
-          <a:noFill/>
-          <a:ln w="28575">
-            <a:solidFill>
-              <a:schemeClr val="tx2"/>
-            </a:solidFill>
-            <a:prstDash val="solid"/>
-            <a:tailEnd type="triangle"/>
-          </a:ln>
-        </p:spPr>
-      </p:sp>
-      <p:sp>
-        <p:nvSpPr>
-          <p:cNvPr id="32" name="powerbi"/>
-          <p:cNvSpPr/>
-          <p:nvPr/>
-        </p:nvSpPr>
-        <p:spPr>
-          <a:xfrm>
-            <a:off x="9646920" y="3291840"/>
-            <a:ext cx="1965960" cy="1188720"/>
-          </a:xfrm>
-          <a:prstGeom prst="roundRect">
-            <a:avLst>
-              <a:gd name="adj" fmla="val 6154"/>
-            </a:avLst>
-          </a:prstGeom>
-          <a:solidFill>
-            <a:schemeClr val="accent5"/>
-          </a:solidFill>
-          <a:ln w="19050">
-            <a:solidFill>
-              <a:schemeClr val="accent1"/>
-            </a:solidFill>
-            <a:prstDash val="solid"/>
-          </a:ln>
-          <a:effectLst>
-            <a:outerShdw sx="100000" sy="100000" kx="0" ky="0" algn="bl" rotWithShape="0" blurRad="50800" dist="25400" dir="5400000">
-              <a:srgbClr val="000000">
-                <a:alpha val="15000"/>
-              </a:srgbClr>
-            </a:outerShdw>
-          </a:effectLst>
-        </p:spPr>
-      </p:sp>
-      <p:sp>
-        <p:nvSpPr>
-          <p:cNvPr id="33" name="powerbi text"/>
-          <p:cNvSpPr txBox="1"/>
-          <p:nvPr/>
-        </p:nvSpPr>
-        <p:spPr>
-          <a:xfrm>
-            <a:off x="9692640" y="3291840"/>
-            <a:ext cx="1874520" cy="1188720"/>
-          </a:xfrm>
-          <a:prstGeom prst="rect">
-            <a:avLst/>
-          </a:prstGeom>
-          <a:noFill/>
-          <a:ln/>
-        </p:spPr>
-        <p:txBody>
-          <a:bodyPr wrap="square" lIns="25400" tIns="25400" rIns="25400" bIns="25400" rtlCol="0" anchor="ctr"/>
-          <a:lstStyle/>
-          <a:p>
-            <a:pPr algn="ctr" indent="0" marL="0">
-              <a:buNone/>
-            </a:pPr>
-            <a:r>
-              <a:rPr lang="en-US" sz="1600" b="1" dirty="0">
-                <a:solidFill>
-                  <a:schemeClr val="tx1"/>
-                </a:solidFill>
-              </a:rPr>
-              <a:t>BI Report</a:t>
-            </a:r>
-            <a:endParaRPr lang="en-US" sz="1600" dirty="0"/>
-          </a:p>
-          <a:p>
-            <a:pPr algn="ctr" indent="0" marL="0">
-              <a:buNone/>
-            </a:pPr>
-            <a:r>
-              <a:rPr lang="en-US" sz="1200" dirty="0">
-                <a:solidFill>
-                  <a:schemeClr val="tx1"/>
-                </a:solidFill>
-              </a:rPr>
-              <a:t>Power BI</a:t>
-            </a:r>
-            <a:endParaRPr lang="en-US" sz="1600" dirty="0"/>
-          </a:p>
-        </p:txBody>
-      </p:sp>
-      <p:sp>
-        <p:nvSpPr>
-          <p:cNvPr id="34" name="side feeds"/>
-          <p:cNvSpPr/>
-          <p:nvPr/>
-        </p:nvSpPr>
-        <p:spPr>
-          <a:xfrm>
-            <a:off x="7132320" y="4892040"/>
-            <a:ext cx="4480560" cy="1097280"/>
-          </a:xfrm>
-          <a:prstGeom prst="roundRect">
-            <a:avLst>
-              <a:gd name="adj" fmla="val 6667"/>
-            </a:avLst>
-          </a:prstGeom>
-          <a:solidFill>
-            <a:srgbClr val="FDF0DF"/>
-          </a:solidFill>
-          <a:ln w="12700">
-            <a:solidFill>
-              <a:srgbClr val="FDF0DF"/>
-            </a:solidFill>
-            <a:prstDash val="solid"/>
-          </a:ln>
-        </p:spPr>
-      </p:sp>
-      <p:sp>
-        <p:nvSpPr>
-          <p:cNvPr id="35" name="Text 33"/>
-          <p:cNvSpPr txBox="1"/>
-          <p:nvPr/>
-        </p:nvSpPr>
-        <p:spPr>
-          <a:xfrm>
-            <a:off x="7269480" y="4892040"/>
-            <a:ext cx="4206240" cy="1097280"/>
-          </a:xfrm>
-          <a:prstGeom prst="rect">
-            <a:avLst/>
-          </a:prstGeom>
-          <a:noFill/>
-          <a:ln/>
-        </p:spPr>
-        <p:txBody>
-          <a:bodyPr wrap="square" lIns="0" tIns="0" rIns="0" bIns="0" rtlCol="0" anchor="ctr"/>
-          <a:lstStyle/>
-          <a:p>
-            <a:pPr indent="0" marL="0">
-              <a:buNone/>
-            </a:pPr>
-            <a:r>
-              <a:rPr lang="en-US" sz="1200" b="1" dirty="0">
-                <a:solidFill>
-                  <a:schemeClr val="tx1"/>
-                </a:solidFill>
-              </a:rPr>
-              <a:t>Also reaching Power BI outside the connector</a:t>
-            </a:r>
-            <a:endParaRPr lang="en-US" sz="1200" dirty="0"/>
-          </a:p>
-          <a:p>
-            <a:pPr indent="0" marL="0">
-              <a:buNone/>
-            </a:pPr>
-            <a:r>
-              <a:rPr lang="en-US" sz="1200" dirty="0">
-                <a:solidFill>
-                  <a:schemeClr val="tx1"/>
-                </a:solidFill>
-              </a:rPr>
-              <a:t>Staff Helpdesk (UNIDESK) directly; MS Access databases by manual upload</a:t>
-            </a:r>
-            <a:endParaRPr lang="en-US" sz="1200" dirty="0"/>
+              <a:t>UnitE, Enquirer, TripleS, Bursary and iTrent feed the SQL Server data connector, which powers Power BI reporting</a:t>
+            </a:r>
+            <a:endParaRPr lang="en-US" sz="1300" dirty="0"/>
           </a:p>
         </p:txBody>
       </p:sp>
@@ -11334,7 +11389,7 @@
                   <a:schemeClr val="tx2"/>
                 </a:solidFill>
               </a:rPr>
-              <a:t>Where data still moves by hand</a:t>
+              <a:t>Reporting: five systems feed one Power BI layer</a:t>
             </a:r>
             <a:endParaRPr lang="en-US" sz="3200" dirty="0"/>
           </a:p>
@@ -11372,6 +11427,1171 @@
                   <a:schemeClr val="tx1"/>
                 </a:solidFill>
               </a:rPr>
+              <a:t>All automated feeds land in the SQL Server data connector before reaching Power BI</a:t>
+            </a:r>
+            <a:endParaRPr lang="en-US" sz="1500" dirty="0"/>
+          </a:p>
+        </p:txBody>
+      </p:sp>
+      <p:sp>
+        <p:nvSpPr>
+          <p:cNvPr id="4" name="feed UnitE"/>
+          <p:cNvSpPr/>
+          <p:nvPr/>
+        </p:nvSpPr>
+        <p:spPr>
+          <a:xfrm>
+            <a:off x="548640" y="1691640"/>
+            <a:ext cx="1463040" cy="713232"/>
+          </a:xfrm>
+          <a:prstGeom prst="roundRect">
+            <a:avLst>
+              <a:gd name="adj" fmla="val 10256"/>
+            </a:avLst>
+          </a:prstGeom>
+          <a:solidFill>
+            <a:schemeClr val="accent1"/>
+          </a:solidFill>
+          <a:ln w="12700">
+            <a:solidFill>
+              <a:schemeClr val="accent1"/>
+            </a:solidFill>
+            <a:prstDash val="solid"/>
+          </a:ln>
+        </p:spPr>
+      </p:sp>
+      <p:sp>
+        <p:nvSpPr>
+          <p:cNvPr id="5" name="feed UnitE text"/>
+          <p:cNvSpPr txBox="1"/>
+          <p:nvPr/>
+        </p:nvSpPr>
+        <p:spPr>
+          <a:xfrm>
+            <a:off x="594360" y="1691640"/>
+            <a:ext cx="1371600" cy="713232"/>
+          </a:xfrm>
+          <a:prstGeom prst="rect">
+            <a:avLst/>
+          </a:prstGeom>
+          <a:noFill/>
+          <a:ln/>
+        </p:spPr>
+        <p:txBody>
+          <a:bodyPr wrap="square" lIns="25400" tIns="25400" rIns="25400" bIns="25400" rtlCol="0" anchor="ctr"/>
+          <a:lstStyle/>
+          <a:p>
+            <a:pPr algn="ctr" indent="0" marL="0">
+              <a:buNone/>
+            </a:pPr>
+            <a:r>
+              <a:rPr lang="en-US" sz="1500" b="1" dirty="0">
+                <a:solidFill>
+                  <a:schemeClr val="bg1"/>
+                </a:solidFill>
+              </a:rPr>
+              <a:t>UnitE</a:t>
+            </a:r>
+            <a:endParaRPr lang="en-US" sz="1500" dirty="0"/>
+          </a:p>
+        </p:txBody>
+      </p:sp>
+      <p:sp>
+        <p:nvSpPr>
+          <p:cNvPr id="6" name="feed detail UnitE"/>
+          <p:cNvSpPr/>
+          <p:nvPr/>
+        </p:nvSpPr>
+        <p:spPr>
+          <a:xfrm>
+            <a:off x="2103120" y="1691640"/>
+            <a:ext cx="4206240" cy="713232"/>
+          </a:xfrm>
+          <a:prstGeom prst="roundRect">
+            <a:avLst>
+              <a:gd name="adj" fmla="val 10256"/>
+            </a:avLst>
+          </a:prstGeom>
+          <a:solidFill>
+            <a:schemeClr val="bg2"/>
+          </a:solidFill>
+          <a:ln w="12700">
+            <a:solidFill>
+              <a:schemeClr val="bg2"/>
+            </a:solidFill>
+            <a:prstDash val="solid"/>
+          </a:ln>
+        </p:spPr>
+      </p:sp>
+      <p:sp>
+        <p:nvSpPr>
+          <p:cNvPr id="7" name="Text 5"/>
+          <p:cNvSpPr txBox="1"/>
+          <p:nvPr/>
+        </p:nvSpPr>
+        <p:spPr>
+          <a:xfrm>
+            <a:off x="2240280" y="1691640"/>
+            <a:ext cx="3977640" cy="713232"/>
+          </a:xfrm>
+          <a:prstGeom prst="rect">
+            <a:avLst/>
+          </a:prstGeom>
+          <a:noFill/>
+          <a:ln/>
+        </p:spPr>
+        <p:txBody>
+          <a:bodyPr wrap="square" lIns="0" tIns="0" rIns="0" bIns="0" rtlCol="0" anchor="ctr"/>
+          <a:lstStyle/>
+          <a:p>
+            <a:pPr indent="0" marL="0">
+              <a:buNone/>
+            </a:pPr>
+            <a:r>
+              <a:rPr lang="en-US" sz="1200" dirty="0">
+                <a:solidFill>
+                  <a:schemeClr val="tx1"/>
+                </a:solidFill>
+              </a:rPr>
+              <a:t>Student details, ASN, application, enrolment, course; employee details, organisation</a:t>
+            </a:r>
+            <a:endParaRPr lang="en-US" sz="1200" dirty="0"/>
+          </a:p>
+        </p:txBody>
+      </p:sp>
+      <p:sp>
+        <p:nvSpPr>
+          <p:cNvPr id="8" name="Shape 6"/>
+          <p:cNvSpPr/>
+          <p:nvPr/>
+        </p:nvSpPr>
+        <p:spPr>
+          <a:xfrm>
+            <a:off x="6355080" y="2048256"/>
+            <a:ext cx="731520" cy="1828800"/>
+          </a:xfrm>
+          <a:prstGeom prst="line">
+            <a:avLst/>
+          </a:prstGeom>
+          <a:noFill/>
+          <a:ln w="19050">
+            <a:solidFill>
+              <a:schemeClr val="accent1"/>
+            </a:solidFill>
+            <a:prstDash val="solid"/>
+            <a:tailEnd type="triangle"/>
+          </a:ln>
+        </p:spPr>
+      </p:sp>
+      <p:sp>
+        <p:nvSpPr>
+          <p:cNvPr id="9" name="feed Enquirer"/>
+          <p:cNvSpPr/>
+          <p:nvPr/>
+        </p:nvSpPr>
+        <p:spPr>
+          <a:xfrm>
+            <a:off x="548640" y="2560320"/>
+            <a:ext cx="1463040" cy="713232"/>
+          </a:xfrm>
+          <a:prstGeom prst="roundRect">
+            <a:avLst>
+              <a:gd name="adj" fmla="val 10256"/>
+            </a:avLst>
+          </a:prstGeom>
+          <a:solidFill>
+            <a:schemeClr val="accent1"/>
+          </a:solidFill>
+          <a:ln w="12700">
+            <a:solidFill>
+              <a:schemeClr val="accent1"/>
+            </a:solidFill>
+            <a:prstDash val="solid"/>
+          </a:ln>
+        </p:spPr>
+      </p:sp>
+      <p:sp>
+        <p:nvSpPr>
+          <p:cNvPr id="10" name="feed Enquirer text"/>
+          <p:cNvSpPr txBox="1"/>
+          <p:nvPr/>
+        </p:nvSpPr>
+        <p:spPr>
+          <a:xfrm>
+            <a:off x="594360" y="2560320"/>
+            <a:ext cx="1371600" cy="713232"/>
+          </a:xfrm>
+          <a:prstGeom prst="rect">
+            <a:avLst/>
+          </a:prstGeom>
+          <a:noFill/>
+          <a:ln/>
+        </p:spPr>
+        <p:txBody>
+          <a:bodyPr wrap="square" lIns="25400" tIns="25400" rIns="25400" bIns="25400" rtlCol="0" anchor="ctr"/>
+          <a:lstStyle/>
+          <a:p>
+            <a:pPr algn="ctr" indent="0" marL="0">
+              <a:buNone/>
+            </a:pPr>
+            <a:r>
+              <a:rPr lang="en-US" sz="1500" b="1" dirty="0">
+                <a:solidFill>
+                  <a:schemeClr val="bg1"/>
+                </a:solidFill>
+              </a:rPr>
+              <a:t>Enquirer</a:t>
+            </a:r>
+            <a:endParaRPr lang="en-US" sz="1500" dirty="0"/>
+          </a:p>
+        </p:txBody>
+      </p:sp>
+      <p:sp>
+        <p:nvSpPr>
+          <p:cNvPr id="11" name="feed detail Enquirer"/>
+          <p:cNvSpPr/>
+          <p:nvPr/>
+        </p:nvSpPr>
+        <p:spPr>
+          <a:xfrm>
+            <a:off x="2103120" y="2560320"/>
+            <a:ext cx="4206240" cy="713232"/>
+          </a:xfrm>
+          <a:prstGeom prst="roundRect">
+            <a:avLst>
+              <a:gd name="adj" fmla="val 10256"/>
+            </a:avLst>
+          </a:prstGeom>
+          <a:solidFill>
+            <a:schemeClr val="bg2"/>
+          </a:solidFill>
+          <a:ln w="12700">
+            <a:solidFill>
+              <a:schemeClr val="bg2"/>
+            </a:solidFill>
+            <a:prstDash val="solid"/>
+          </a:ln>
+        </p:spPr>
+      </p:sp>
+      <p:sp>
+        <p:nvSpPr>
+          <p:cNvPr id="12" name="Text 10"/>
+          <p:cNvSpPr txBox="1"/>
+          <p:nvPr/>
+        </p:nvSpPr>
+        <p:spPr>
+          <a:xfrm>
+            <a:off x="2240280" y="2560320"/>
+            <a:ext cx="3977640" cy="713232"/>
+          </a:xfrm>
+          <a:prstGeom prst="rect">
+            <a:avLst/>
+          </a:prstGeom>
+          <a:noFill/>
+          <a:ln/>
+        </p:spPr>
+        <p:txBody>
+          <a:bodyPr wrap="square" lIns="0" tIns="0" rIns="0" bIns="0" rtlCol="0" anchor="ctr"/>
+          <a:lstStyle/>
+          <a:p>
+            <a:pPr indent="0" marL="0">
+              <a:buNone/>
+            </a:pPr>
+            <a:r>
+              <a:rPr lang="en-US" sz="1200" dirty="0">
+                <a:solidFill>
+                  <a:schemeClr val="tx1"/>
+                </a:solidFill>
+              </a:rPr>
+              <a:t>Bursary engagement, curriculum planning, attendance, PEEP, care placement</a:t>
+            </a:r>
+            <a:endParaRPr lang="en-US" sz="1200" dirty="0"/>
+          </a:p>
+        </p:txBody>
+      </p:sp>
+      <p:sp>
+        <p:nvSpPr>
+          <p:cNvPr id="13" name="Shape 11"/>
+          <p:cNvSpPr/>
+          <p:nvPr/>
+        </p:nvSpPr>
+        <p:spPr>
+          <a:xfrm>
+            <a:off x="6355080" y="2916936"/>
+            <a:ext cx="731520" cy="960120"/>
+          </a:xfrm>
+          <a:prstGeom prst="line">
+            <a:avLst/>
+          </a:prstGeom>
+          <a:noFill/>
+          <a:ln w="19050">
+            <a:solidFill>
+              <a:schemeClr val="accent1"/>
+            </a:solidFill>
+            <a:prstDash val="solid"/>
+            <a:tailEnd type="triangle"/>
+          </a:ln>
+        </p:spPr>
+      </p:sp>
+      <p:sp>
+        <p:nvSpPr>
+          <p:cNvPr id="14" name="feed iTrent"/>
+          <p:cNvSpPr/>
+          <p:nvPr/>
+        </p:nvSpPr>
+        <p:spPr>
+          <a:xfrm>
+            <a:off x="548640" y="3429000"/>
+            <a:ext cx="1463040" cy="713232"/>
+          </a:xfrm>
+          <a:prstGeom prst="roundRect">
+            <a:avLst>
+              <a:gd name="adj" fmla="val 10256"/>
+            </a:avLst>
+          </a:prstGeom>
+          <a:solidFill>
+            <a:schemeClr val="accent1"/>
+          </a:solidFill>
+          <a:ln w="12700">
+            <a:solidFill>
+              <a:schemeClr val="accent1"/>
+            </a:solidFill>
+            <a:prstDash val="solid"/>
+          </a:ln>
+        </p:spPr>
+      </p:sp>
+      <p:sp>
+        <p:nvSpPr>
+          <p:cNvPr id="15" name="feed iTrent text"/>
+          <p:cNvSpPr txBox="1"/>
+          <p:nvPr/>
+        </p:nvSpPr>
+        <p:spPr>
+          <a:xfrm>
+            <a:off x="594360" y="3429000"/>
+            <a:ext cx="1371600" cy="713232"/>
+          </a:xfrm>
+          <a:prstGeom prst="rect">
+            <a:avLst/>
+          </a:prstGeom>
+          <a:noFill/>
+          <a:ln/>
+        </p:spPr>
+        <p:txBody>
+          <a:bodyPr wrap="square" lIns="25400" tIns="25400" rIns="25400" bIns="25400" rtlCol="0" anchor="ctr"/>
+          <a:lstStyle/>
+          <a:p>
+            <a:pPr algn="ctr" indent="0" marL="0">
+              <a:buNone/>
+            </a:pPr>
+            <a:r>
+              <a:rPr lang="en-US" sz="1500" b="1" dirty="0">
+                <a:solidFill>
+                  <a:schemeClr val="bg1"/>
+                </a:solidFill>
+              </a:rPr>
+              <a:t>iTrent</a:t>
+            </a:r>
+            <a:endParaRPr lang="en-US" sz="1500" dirty="0"/>
+          </a:p>
+        </p:txBody>
+      </p:sp>
+      <p:sp>
+        <p:nvSpPr>
+          <p:cNvPr id="16" name="feed detail iTrent"/>
+          <p:cNvSpPr/>
+          <p:nvPr/>
+        </p:nvSpPr>
+        <p:spPr>
+          <a:xfrm>
+            <a:off x="2103120" y="3429000"/>
+            <a:ext cx="4206240" cy="713232"/>
+          </a:xfrm>
+          <a:prstGeom prst="roundRect">
+            <a:avLst>
+              <a:gd name="adj" fmla="val 10256"/>
+            </a:avLst>
+          </a:prstGeom>
+          <a:solidFill>
+            <a:schemeClr val="bg2"/>
+          </a:solidFill>
+          <a:ln w="12700">
+            <a:solidFill>
+              <a:schemeClr val="bg2"/>
+            </a:solidFill>
+            <a:prstDash val="solid"/>
+          </a:ln>
+        </p:spPr>
+      </p:sp>
+      <p:sp>
+        <p:nvSpPr>
+          <p:cNvPr id="17" name="Text 15"/>
+          <p:cNvSpPr txBox="1"/>
+          <p:nvPr/>
+        </p:nvSpPr>
+        <p:spPr>
+          <a:xfrm>
+            <a:off x="2240280" y="3429000"/>
+            <a:ext cx="3977640" cy="713232"/>
+          </a:xfrm>
+          <a:prstGeom prst="rect">
+            <a:avLst/>
+          </a:prstGeom>
+          <a:noFill/>
+          <a:ln/>
+        </p:spPr>
+        <p:txBody>
+          <a:bodyPr wrap="square" lIns="0" tIns="0" rIns="0" bIns="0" rtlCol="0" anchor="ctr"/>
+          <a:lstStyle/>
+          <a:p>
+            <a:pPr indent="0" marL="0">
+              <a:buNone/>
+            </a:pPr>
+            <a:r>
+              <a:rPr lang="en-US" sz="1200" dirty="0">
+                <a:solidFill>
+                  <a:schemeClr val="tx1"/>
+                </a:solidFill>
+              </a:rPr>
+              <a:t>All employee data: detail, work pattern, payroll, job role</a:t>
+            </a:r>
+            <a:endParaRPr lang="en-US" sz="1200" dirty="0"/>
+          </a:p>
+        </p:txBody>
+      </p:sp>
+      <p:sp>
+        <p:nvSpPr>
+          <p:cNvPr id="18" name="Shape 16"/>
+          <p:cNvSpPr/>
+          <p:nvPr/>
+        </p:nvSpPr>
+        <p:spPr>
+          <a:xfrm>
+            <a:off x="6355080" y="3785616"/>
+            <a:ext cx="731520" cy="91440"/>
+          </a:xfrm>
+          <a:prstGeom prst="line">
+            <a:avLst/>
+          </a:prstGeom>
+          <a:noFill/>
+          <a:ln w="19050">
+            <a:solidFill>
+              <a:schemeClr val="accent1"/>
+            </a:solidFill>
+            <a:prstDash val="solid"/>
+            <a:tailEnd type="triangle"/>
+          </a:ln>
+        </p:spPr>
+      </p:sp>
+      <p:sp>
+        <p:nvSpPr>
+          <p:cNvPr id="19" name="feed TripleS"/>
+          <p:cNvSpPr/>
+          <p:nvPr/>
+        </p:nvSpPr>
+        <p:spPr>
+          <a:xfrm>
+            <a:off x="548640" y="4297680"/>
+            <a:ext cx="1463040" cy="713232"/>
+          </a:xfrm>
+          <a:prstGeom prst="roundRect">
+            <a:avLst>
+              <a:gd name="adj" fmla="val 10256"/>
+            </a:avLst>
+          </a:prstGeom>
+          <a:solidFill>
+            <a:schemeClr val="accent1"/>
+          </a:solidFill>
+          <a:ln w="12700">
+            <a:solidFill>
+              <a:schemeClr val="accent1"/>
+            </a:solidFill>
+            <a:prstDash val="solid"/>
+          </a:ln>
+        </p:spPr>
+      </p:sp>
+      <p:sp>
+        <p:nvSpPr>
+          <p:cNvPr id="20" name="feed TripleS text"/>
+          <p:cNvSpPr txBox="1"/>
+          <p:nvPr/>
+        </p:nvSpPr>
+        <p:spPr>
+          <a:xfrm>
+            <a:off x="594360" y="4297680"/>
+            <a:ext cx="1371600" cy="713232"/>
+          </a:xfrm>
+          <a:prstGeom prst="rect">
+            <a:avLst/>
+          </a:prstGeom>
+          <a:noFill/>
+          <a:ln/>
+        </p:spPr>
+        <p:txBody>
+          <a:bodyPr wrap="square" lIns="25400" tIns="25400" rIns="25400" bIns="25400" rtlCol="0" anchor="ctr"/>
+          <a:lstStyle/>
+          <a:p>
+            <a:pPr algn="ctr" indent="0" marL="0">
+              <a:buNone/>
+            </a:pPr>
+            <a:r>
+              <a:rPr lang="en-US" sz="1500" b="1" dirty="0">
+                <a:solidFill>
+                  <a:schemeClr val="bg1"/>
+                </a:solidFill>
+              </a:rPr>
+              <a:t>TripleS</a:t>
+            </a:r>
+            <a:endParaRPr lang="en-US" sz="1500" dirty="0"/>
+          </a:p>
+        </p:txBody>
+      </p:sp>
+      <p:sp>
+        <p:nvSpPr>
+          <p:cNvPr id="21" name="feed detail TripleS"/>
+          <p:cNvSpPr/>
+          <p:nvPr/>
+        </p:nvSpPr>
+        <p:spPr>
+          <a:xfrm>
+            <a:off x="2103120" y="4297680"/>
+            <a:ext cx="4206240" cy="713232"/>
+          </a:xfrm>
+          <a:prstGeom prst="roundRect">
+            <a:avLst>
+              <a:gd name="adj" fmla="val 10256"/>
+            </a:avLst>
+          </a:prstGeom>
+          <a:solidFill>
+            <a:schemeClr val="bg2"/>
+          </a:solidFill>
+          <a:ln w="12700">
+            <a:solidFill>
+              <a:schemeClr val="bg2"/>
+            </a:solidFill>
+            <a:prstDash val="solid"/>
+          </a:ln>
+        </p:spPr>
+      </p:sp>
+      <p:sp>
+        <p:nvSpPr>
+          <p:cNvPr id="22" name="Text 20"/>
+          <p:cNvSpPr txBox="1"/>
+          <p:nvPr/>
+        </p:nvSpPr>
+        <p:spPr>
+          <a:xfrm>
+            <a:off x="2240280" y="4297680"/>
+            <a:ext cx="3977640" cy="713232"/>
+          </a:xfrm>
+          <a:prstGeom prst="rect">
+            <a:avLst/>
+          </a:prstGeom>
+          <a:noFill/>
+          <a:ln/>
+        </p:spPr>
+        <p:txBody>
+          <a:bodyPr wrap="square" lIns="0" tIns="0" rIns="0" bIns="0" rtlCol="0" anchor="ctr"/>
+          <a:lstStyle/>
+          <a:p>
+            <a:pPr indent="0" marL="0">
+              <a:buNone/>
+            </a:pPr>
+            <a:r>
+              <a:rPr lang="en-US" sz="1200" dirty="0">
+                <a:solidFill>
+                  <a:schemeClr val="tx1"/>
+                </a:solidFill>
+              </a:rPr>
+              <a:t>ASN and school transition</a:t>
+            </a:r>
+            <a:endParaRPr lang="en-US" sz="1200" dirty="0"/>
+          </a:p>
+        </p:txBody>
+      </p:sp>
+      <p:sp>
+        <p:nvSpPr>
+          <p:cNvPr id="23" name="Shape 21"/>
+          <p:cNvSpPr/>
+          <p:nvPr/>
+        </p:nvSpPr>
+        <p:spPr>
+          <a:xfrm flipV="1">
+            <a:off x="6355080" y="3877056"/>
+            <a:ext cx="731520" cy="777240"/>
+          </a:xfrm>
+          <a:prstGeom prst="line">
+            <a:avLst/>
+          </a:prstGeom>
+          <a:noFill/>
+          <a:ln w="19050">
+            <a:solidFill>
+              <a:schemeClr val="accent1"/>
+            </a:solidFill>
+            <a:prstDash val="solid"/>
+            <a:tailEnd type="triangle"/>
+          </a:ln>
+        </p:spPr>
+      </p:sp>
+      <p:sp>
+        <p:nvSpPr>
+          <p:cNvPr id="24" name="feed Bursary"/>
+          <p:cNvSpPr/>
+          <p:nvPr/>
+        </p:nvSpPr>
+        <p:spPr>
+          <a:xfrm>
+            <a:off x="548640" y="5166360"/>
+            <a:ext cx="1463040" cy="713232"/>
+          </a:xfrm>
+          <a:prstGeom prst="roundRect">
+            <a:avLst>
+              <a:gd name="adj" fmla="val 10256"/>
+            </a:avLst>
+          </a:prstGeom>
+          <a:solidFill>
+            <a:schemeClr val="accent1"/>
+          </a:solidFill>
+          <a:ln w="12700">
+            <a:solidFill>
+              <a:schemeClr val="accent1"/>
+            </a:solidFill>
+            <a:prstDash val="solid"/>
+          </a:ln>
+        </p:spPr>
+      </p:sp>
+      <p:sp>
+        <p:nvSpPr>
+          <p:cNvPr id="25" name="feed Bursary text"/>
+          <p:cNvSpPr txBox="1"/>
+          <p:nvPr/>
+        </p:nvSpPr>
+        <p:spPr>
+          <a:xfrm>
+            <a:off x="594360" y="5166360"/>
+            <a:ext cx="1371600" cy="713232"/>
+          </a:xfrm>
+          <a:prstGeom prst="rect">
+            <a:avLst/>
+          </a:prstGeom>
+          <a:noFill/>
+          <a:ln/>
+        </p:spPr>
+        <p:txBody>
+          <a:bodyPr wrap="square" lIns="25400" tIns="25400" rIns="25400" bIns="25400" rtlCol="0" anchor="ctr"/>
+          <a:lstStyle/>
+          <a:p>
+            <a:pPr algn="ctr" indent="0" marL="0">
+              <a:buNone/>
+            </a:pPr>
+            <a:r>
+              <a:rPr lang="en-US" sz="1500" b="1" dirty="0">
+                <a:solidFill>
+                  <a:schemeClr val="bg1"/>
+                </a:solidFill>
+              </a:rPr>
+              <a:t>Bursary</a:t>
+            </a:r>
+            <a:endParaRPr lang="en-US" sz="1500" dirty="0"/>
+          </a:p>
+        </p:txBody>
+      </p:sp>
+      <p:sp>
+        <p:nvSpPr>
+          <p:cNvPr id="26" name="feed detail Bursary"/>
+          <p:cNvSpPr/>
+          <p:nvPr/>
+        </p:nvSpPr>
+        <p:spPr>
+          <a:xfrm>
+            <a:off x="2103120" y="5166360"/>
+            <a:ext cx="4206240" cy="713232"/>
+          </a:xfrm>
+          <a:prstGeom prst="roundRect">
+            <a:avLst>
+              <a:gd name="adj" fmla="val 10256"/>
+            </a:avLst>
+          </a:prstGeom>
+          <a:solidFill>
+            <a:schemeClr val="bg2"/>
+          </a:solidFill>
+          <a:ln w="12700">
+            <a:solidFill>
+              <a:schemeClr val="bg2"/>
+            </a:solidFill>
+            <a:prstDash val="solid"/>
+          </a:ln>
+        </p:spPr>
+      </p:sp>
+      <p:sp>
+        <p:nvSpPr>
+          <p:cNvPr id="27" name="Text 25"/>
+          <p:cNvSpPr txBox="1"/>
+          <p:nvPr/>
+        </p:nvSpPr>
+        <p:spPr>
+          <a:xfrm>
+            <a:off x="2240280" y="5166360"/>
+            <a:ext cx="3977640" cy="713232"/>
+          </a:xfrm>
+          <a:prstGeom prst="rect">
+            <a:avLst/>
+          </a:prstGeom>
+          <a:noFill/>
+          <a:ln/>
+        </p:spPr>
+        <p:txBody>
+          <a:bodyPr wrap="square" lIns="0" tIns="0" rIns="0" bIns="0" rtlCol="0" anchor="ctr"/>
+          <a:lstStyle/>
+          <a:p>
+            <a:pPr indent="0" marL="0">
+              <a:buNone/>
+            </a:pPr>
+            <a:r>
+              <a:rPr lang="en-US" sz="1200" dirty="0">
+                <a:solidFill>
+                  <a:schemeClr val="tx1"/>
+                </a:solidFill>
+              </a:rPr>
+              <a:t>Applications and awards</a:t>
+            </a:r>
+            <a:endParaRPr lang="en-US" sz="1200" dirty="0"/>
+          </a:p>
+        </p:txBody>
+      </p:sp>
+      <p:sp>
+        <p:nvSpPr>
+          <p:cNvPr id="28" name="Shape 26"/>
+          <p:cNvSpPr/>
+          <p:nvPr/>
+        </p:nvSpPr>
+        <p:spPr>
+          <a:xfrm flipV="1">
+            <a:off x="6355080" y="3877056"/>
+            <a:ext cx="731520" cy="1645920"/>
+          </a:xfrm>
+          <a:prstGeom prst="line">
+            <a:avLst/>
+          </a:prstGeom>
+          <a:noFill/>
+          <a:ln w="19050">
+            <a:solidFill>
+              <a:schemeClr val="accent1"/>
+            </a:solidFill>
+            <a:prstDash val="solid"/>
+            <a:tailEnd type="triangle"/>
+          </a:ln>
+        </p:spPr>
+      </p:sp>
+      <p:sp>
+        <p:nvSpPr>
+          <p:cNvPr id="29" name="connector"/>
+          <p:cNvSpPr/>
+          <p:nvPr/>
+        </p:nvSpPr>
+        <p:spPr>
+          <a:xfrm>
+            <a:off x="7132320" y="3291840"/>
+            <a:ext cx="2011680" cy="1188720"/>
+          </a:xfrm>
+          <a:prstGeom prst="roundRect">
+            <a:avLst>
+              <a:gd name="adj" fmla="val 6154"/>
+            </a:avLst>
+          </a:prstGeom>
+          <a:solidFill>
+            <a:schemeClr val="accent4"/>
+          </a:solidFill>
+          <a:ln w="12700">
+            <a:solidFill>
+              <a:schemeClr val="accent4"/>
+            </a:solidFill>
+            <a:prstDash val="solid"/>
+          </a:ln>
+          <a:effectLst>
+            <a:outerShdw sx="100000" sy="100000" kx="0" ky="0" algn="bl" rotWithShape="0" blurRad="50800" dist="25400" dir="5400000">
+              <a:srgbClr val="000000">
+                <a:alpha val="15000"/>
+              </a:srgbClr>
+            </a:outerShdw>
+          </a:effectLst>
+        </p:spPr>
+      </p:sp>
+      <p:sp>
+        <p:nvSpPr>
+          <p:cNvPr id="30" name="connector text"/>
+          <p:cNvSpPr txBox="1"/>
+          <p:nvPr/>
+        </p:nvSpPr>
+        <p:spPr>
+          <a:xfrm>
+            <a:off x="7178040" y="3291840"/>
+            <a:ext cx="1920240" cy="1188720"/>
+          </a:xfrm>
+          <a:prstGeom prst="rect">
+            <a:avLst/>
+          </a:prstGeom>
+          <a:noFill/>
+          <a:ln/>
+        </p:spPr>
+        <p:txBody>
+          <a:bodyPr wrap="square" lIns="25400" tIns="25400" rIns="25400" bIns="25400" rtlCol="0" anchor="ctr"/>
+          <a:lstStyle/>
+          <a:p>
+            <a:pPr algn="ctr" indent="0" marL="0">
+              <a:buNone/>
+            </a:pPr>
+            <a:r>
+              <a:rPr lang="en-US" sz="1600" b="1" dirty="0">
+                <a:solidFill>
+                  <a:schemeClr val="bg1"/>
+                </a:solidFill>
+              </a:rPr>
+              <a:t>Data Connector</a:t>
+            </a:r>
+            <a:endParaRPr lang="en-US" sz="1600" dirty="0"/>
+          </a:p>
+          <a:p>
+            <a:pPr algn="ctr" indent="0" marL="0">
+              <a:buNone/>
+            </a:pPr>
+            <a:r>
+              <a:rPr lang="en-US" sz="1200" dirty="0">
+                <a:solidFill>
+                  <a:schemeClr val="bg1"/>
+                </a:solidFill>
+              </a:rPr>
+              <a:t>SQL Server</a:t>
+            </a:r>
+            <a:endParaRPr lang="en-US" sz="1600" dirty="0"/>
+          </a:p>
+        </p:txBody>
+      </p:sp>
+      <p:sp>
+        <p:nvSpPr>
+          <p:cNvPr id="31" name="Shape 29"/>
+          <p:cNvSpPr/>
+          <p:nvPr/>
+        </p:nvSpPr>
+        <p:spPr>
+          <a:xfrm>
+            <a:off x="9189720" y="3886200"/>
+            <a:ext cx="411480" cy="914"/>
+          </a:xfrm>
+          <a:prstGeom prst="line">
+            <a:avLst/>
+          </a:prstGeom>
+          <a:noFill/>
+          <a:ln w="28575">
+            <a:solidFill>
+              <a:schemeClr val="tx2"/>
+            </a:solidFill>
+            <a:prstDash val="solid"/>
+            <a:tailEnd type="triangle"/>
+          </a:ln>
+        </p:spPr>
+      </p:sp>
+      <p:sp>
+        <p:nvSpPr>
+          <p:cNvPr id="32" name="powerbi"/>
+          <p:cNvSpPr/>
+          <p:nvPr/>
+        </p:nvSpPr>
+        <p:spPr>
+          <a:xfrm>
+            <a:off x="9646920" y="3291840"/>
+            <a:ext cx="1965960" cy="1188720"/>
+          </a:xfrm>
+          <a:prstGeom prst="roundRect">
+            <a:avLst>
+              <a:gd name="adj" fmla="val 6154"/>
+            </a:avLst>
+          </a:prstGeom>
+          <a:solidFill>
+            <a:schemeClr val="accent5"/>
+          </a:solidFill>
+          <a:ln w="19050">
+            <a:solidFill>
+              <a:schemeClr val="accent1"/>
+            </a:solidFill>
+            <a:prstDash val="solid"/>
+          </a:ln>
+          <a:effectLst>
+            <a:outerShdw sx="100000" sy="100000" kx="0" ky="0" algn="bl" rotWithShape="0" blurRad="50800" dist="25400" dir="5400000">
+              <a:srgbClr val="000000">
+                <a:alpha val="15000"/>
+              </a:srgbClr>
+            </a:outerShdw>
+          </a:effectLst>
+        </p:spPr>
+      </p:sp>
+      <p:sp>
+        <p:nvSpPr>
+          <p:cNvPr id="33" name="powerbi text"/>
+          <p:cNvSpPr txBox="1"/>
+          <p:nvPr/>
+        </p:nvSpPr>
+        <p:spPr>
+          <a:xfrm>
+            <a:off x="9692640" y="3291840"/>
+            <a:ext cx="1874520" cy="1188720"/>
+          </a:xfrm>
+          <a:prstGeom prst="rect">
+            <a:avLst/>
+          </a:prstGeom>
+          <a:noFill/>
+          <a:ln/>
+        </p:spPr>
+        <p:txBody>
+          <a:bodyPr wrap="square" lIns="25400" tIns="25400" rIns="25400" bIns="25400" rtlCol="0" anchor="ctr"/>
+          <a:lstStyle/>
+          <a:p>
+            <a:pPr algn="ctr" indent="0" marL="0">
+              <a:buNone/>
+            </a:pPr>
+            <a:r>
+              <a:rPr lang="en-US" sz="1600" b="1" dirty="0">
+                <a:solidFill>
+                  <a:schemeClr val="tx1"/>
+                </a:solidFill>
+              </a:rPr>
+              <a:t>BI Report</a:t>
+            </a:r>
+            <a:endParaRPr lang="en-US" sz="1600" dirty="0"/>
+          </a:p>
+          <a:p>
+            <a:pPr algn="ctr" indent="0" marL="0">
+              <a:buNone/>
+            </a:pPr>
+            <a:r>
+              <a:rPr lang="en-US" sz="1200" dirty="0">
+                <a:solidFill>
+                  <a:schemeClr val="tx1"/>
+                </a:solidFill>
+              </a:rPr>
+              <a:t>Power BI</a:t>
+            </a:r>
+            <a:endParaRPr lang="en-US" sz="1600" dirty="0"/>
+          </a:p>
+        </p:txBody>
+      </p:sp>
+      <p:sp>
+        <p:nvSpPr>
+          <p:cNvPr id="34" name="side feeds"/>
+          <p:cNvSpPr/>
+          <p:nvPr/>
+        </p:nvSpPr>
+        <p:spPr>
+          <a:xfrm>
+            <a:off x="7132320" y="4892040"/>
+            <a:ext cx="4480560" cy="1097280"/>
+          </a:xfrm>
+          <a:prstGeom prst="roundRect">
+            <a:avLst>
+              <a:gd name="adj" fmla="val 6667"/>
+            </a:avLst>
+          </a:prstGeom>
+          <a:solidFill>
+            <a:srgbClr val="FDF0DF"/>
+          </a:solidFill>
+          <a:ln w="12700">
+            <a:solidFill>
+              <a:srgbClr val="FDF0DF"/>
+            </a:solidFill>
+            <a:prstDash val="solid"/>
+          </a:ln>
+        </p:spPr>
+      </p:sp>
+      <p:sp>
+        <p:nvSpPr>
+          <p:cNvPr id="35" name="Text 33"/>
+          <p:cNvSpPr txBox="1"/>
+          <p:nvPr/>
+        </p:nvSpPr>
+        <p:spPr>
+          <a:xfrm>
+            <a:off x="7269480" y="4892040"/>
+            <a:ext cx="4206240" cy="1097280"/>
+          </a:xfrm>
+          <a:prstGeom prst="rect">
+            <a:avLst/>
+          </a:prstGeom>
+          <a:noFill/>
+          <a:ln/>
+        </p:spPr>
+        <p:txBody>
+          <a:bodyPr wrap="square" lIns="0" tIns="0" rIns="0" bIns="0" rtlCol="0" anchor="ctr"/>
+          <a:lstStyle/>
+          <a:p>
+            <a:pPr indent="0" marL="0">
+              <a:buNone/>
+            </a:pPr>
+            <a:r>
+              <a:rPr lang="en-US" sz="1200" b="1" dirty="0">
+                <a:solidFill>
+                  <a:schemeClr val="tx1"/>
+                </a:solidFill>
+              </a:rPr>
+              <a:t>Also reaching Power BI outside the connector</a:t>
+            </a:r>
+            <a:endParaRPr lang="en-US" sz="1200" dirty="0"/>
+          </a:p>
+          <a:p>
+            <a:pPr indent="0" marL="0">
+              <a:buNone/>
+            </a:pPr>
+            <a:r>
+              <a:rPr lang="en-US" sz="1200" dirty="0">
+                <a:solidFill>
+                  <a:schemeClr val="tx1"/>
+                </a:solidFill>
+              </a:rPr>
+              <a:t>Staff Helpdesk (UNIDESK) directly; MS Access databases by manual upload</a:t>
+            </a:r>
+            <a:endParaRPr lang="en-US" sz="1200" dirty="0"/>
+          </a:p>
+        </p:txBody>
+      </p:sp>
+      <p:sp>
+        <p:nvSpPr>
+          <p:cNvPr id="25" name="Slide Number Placeholder 0"/>
+          <p:cNvSpPr>
+            <a:spLocks noGrp="1"/>
+          </p:cNvSpPr>
+          <p:nvPr>
+            <p:ph type="sldNum" sz="quarter" idx="4294967295"/>
+          </p:nvPr>
+        </p:nvSpPr>
+        <p:spPr>
+          <a:xfrm>
+            <a:off x="11247120" y="6446520"/>
+            <a:ext cx="457200" cy="274320"/>
+          </a:xfrm>
+          <a:prstGeom prst="rect">
+            <a:avLst/>
+          </a:prstGeom>
+          <a:extLst>
+            <a:ext uri="{C572A759-6A51-4108-AA02-DFA0A04FC94B}">
+              <ma14:wrappingTextBoxFlag xmlns:ma14="http://schemas.microsoft.com/office/mac/drawingml/2011/main" val="0"/>
+            </a:ext>
+          </a:extLst>
+        </p:spPr>
+        <p:txBody>
+          <a:bodyPr/>
+          <a:lstStyle>
+            <a:lvl1pPr>
+              <a:defRPr sz="1000">
+                <a:solidFill>
+                  <a:srgbClr val="6B6F80"/>
+                </a:solidFill>
+              </a:defRPr>
+            </a:lvl1pPr>
+          </a:lstStyle>
+          <a:p>
+            <a:pPr algn="r"/>
+            <a:fld id="{F7021451-1387-4CA6-816F-3879F97B5CBC}" type="slidenum">
+              <a:rPr b="0" lang="en-US"/>
+              <a:t>8</a:t>
+            </a:fld>
+            <a:endParaRPr lang="en-US"/>
+          </a:p>
+        </p:txBody>
+      </p:sp>
+    </p:spTree>
+  </p:cSld>
+  <p:clrMapOvr>
+    <a:masterClrMapping/>
+  </p:clrMapOvr>
+</p:sld>
+</file>
+
+<file path=ppt/slides/slide9.xml><?xml version="1.0" encoding="utf-8"?>
+<p:sld xmlns:a="http://schemas.openxmlformats.org/drawingml/2006/main" xmlns:r="http://schemas.openxmlformats.org/officeDocument/2006/relationships" xmlns:p="http://schemas.openxmlformats.org/presentationml/2006/main">
+  <p:cSld name="Slide 9">
+    <p:spTree>
+      <p:nvGrpSpPr>
+        <p:cNvPr id="1" name=""/>
+        <p:cNvGrpSpPr/>
+        <p:nvPr/>
+      </p:nvGrpSpPr>
+      <p:grpSpPr>
+        <a:xfrm>
+          <a:off x="0" y="0"/>
+          <a:ext cx="0" cy="0"/>
+          <a:chOff x="0" y="0"/>
+          <a:chExt cx="0" cy="0"/>
+        </a:xfrm>
+      </p:grpSpPr>
+      <p:sp>
+        <p:nvSpPr>
+          <p:cNvPr id="2" name="Text 0"/>
+          <p:cNvSpPr/>
+          <p:nvPr>
+            <p:ph idx="100" type="title" hasCustomPrompt="1"/>
+          </p:nvPr>
+        </p:nvSpPr>
+        <p:spPr>
+          <a:xfrm>
+            <a:off x="548640" y="320040"/>
+            <a:ext cx="11064240" cy="731520"/>
+          </a:xfrm>
+          <a:prstGeom prst="rect">
+            <a:avLst/>
+          </a:prstGeom>
+          <a:noFill/>
+          <a:ln/>
+        </p:spPr>
+        <p:txBody>
+          <a:bodyPr wrap="square" lIns="0" tIns="0" rIns="0" bIns="0" rtlCol="0" anchor="ctr"/>
+          <a:lstStyle/>
+          <a:p>
+            <a:pPr indent="0" marL="0">
+              <a:buNone/>
+            </a:pPr>
+            <a:r>
+              <a:rPr lang="en-US" sz="3200" b="1" dirty="0">
+                <a:solidFill>
+                  <a:schemeClr val="tx2"/>
+                </a:solidFill>
+              </a:rPr>
+              <a:t>Where data still moves by hand</a:t>
+            </a:r>
+            <a:endParaRPr lang="en-US" sz="3200" dirty="0"/>
+          </a:p>
+        </p:txBody>
+      </p:sp>
+      <p:sp>
+        <p:nvSpPr>
+          <p:cNvPr id="3" name="Text 0"/>
+          <p:cNvSpPr/>
+          <p:nvPr>
+            <p:ph idx="101" type="body" hasCustomPrompt="1"/>
+          </p:nvPr>
+        </p:nvSpPr>
+        <p:spPr>
+          <a:xfrm>
+            <a:off x="548640" y="1005840"/>
+            <a:ext cx="11064240" cy="411480"/>
+          </a:xfrm>
+          <a:prstGeom prst="rect">
+            <a:avLst/>
+          </a:prstGeom>
+          <a:noFill/>
+          <a:ln/>
+        </p:spPr>
+        <p:txBody>
+          <a:bodyPr wrap="square" lIns="0" tIns="0" rIns="0" bIns="0" rtlCol="0" anchor="t"/>
+          <a:lstStyle/>
+          <a:p>
+            <a:pPr indent="0" marL="0">
+              <a:buNone/>
+            </a:pPr>
+            <a:r>
+              <a:rPr lang="en-US" sz="1500" dirty="0">
+                <a:solidFill>
+                  <a:schemeClr val="tx1"/>
+                </a:solidFill>
+              </a:rPr>
               <a:t>23 of 98 connections are manual. These are the main ones on the student and staff side</a:t>
             </a:r>
             <a:endParaRPr lang="en-US" sz="1500" dirty="0"/>
@@ -11380,7 +12600,7 @@
       </p:sp>
       <p:graphicFrame>
         <p:nvGraphicFramePr>
-          <p:cNvPr id="9" name="manual table"/>
+          <p:cNvPr id="10" name="manual table"/>
           <p:cNvGraphicFramePr>
             <a:graphicFrameLocks noGrp="1"/>
           </p:cNvGraphicFramePr>
@@ -13663,792 +14883,6 @@
             <a:pPr algn="r"/>
             <a:fld id="{F7021451-1387-4CA6-816F-3879F97B5CBC}" type="slidenum">
               <a:rPr b="0" lang="en-US"/>
-              <a:t>8</a:t>
-            </a:fld>
-            <a:endParaRPr lang="en-US"/>
-          </a:p>
-        </p:txBody>
-      </p:sp>
-    </p:spTree>
-  </p:cSld>
-  <p:clrMapOvr>
-    <a:masterClrMapping/>
-  </p:clrMapOvr>
-</p:sld>
-</file>
-
-<file path=ppt/slides/slide9.xml><?xml version="1.0" encoding="utf-8"?>
-<p:sld xmlns:a="http://schemas.openxmlformats.org/drawingml/2006/main" xmlns:r="http://schemas.openxmlformats.org/officeDocument/2006/relationships" xmlns:p="http://schemas.openxmlformats.org/presentationml/2006/main">
-  <p:cSld name="Slide 9">
-    <p:spTree>
-      <p:nvGrpSpPr>
-        <p:cNvPr id="1" name=""/>
-        <p:cNvGrpSpPr/>
-        <p:nvPr/>
-      </p:nvGrpSpPr>
-      <p:grpSpPr>
-        <a:xfrm>
-          <a:off x="0" y="0"/>
-          <a:ext cx="0" cy="0"/>
-          <a:chOff x="0" y="0"/>
-          <a:chExt cx="0" cy="0"/>
-        </a:xfrm>
-      </p:grpSpPr>
-      <p:sp>
-        <p:nvSpPr>
-          <p:cNvPr id="2" name="Text 0"/>
-          <p:cNvSpPr/>
-          <p:nvPr>
-            <p:ph idx="100" type="title" hasCustomPrompt="1"/>
-          </p:nvPr>
-        </p:nvSpPr>
-        <p:spPr>
-          <a:xfrm>
-            <a:off x="548640" y="320040"/>
-            <a:ext cx="11064240" cy="731520"/>
-          </a:xfrm>
-          <a:prstGeom prst="rect">
-            <a:avLst/>
-          </a:prstGeom>
-          <a:noFill/>
-          <a:ln/>
-        </p:spPr>
-        <p:txBody>
-          <a:bodyPr wrap="square" lIns="0" tIns="0" rIns="0" bIns="0" rtlCol="0" anchor="ctr"/>
-          <a:lstStyle/>
-          <a:p>
-            <a:pPr indent="0" marL="0">
-              <a:buNone/>
-            </a:pPr>
-            <a:r>
-              <a:rPr lang="en-US" sz="3200" b="1" dirty="0">
-                <a:solidFill>
-                  <a:schemeClr val="tx2"/>
-                </a:solidFill>
-              </a:rPr>
-              <a:t>Four things to take away</a:t>
-            </a:r>
-            <a:endParaRPr lang="en-US" sz="3200" dirty="0"/>
-          </a:p>
-        </p:txBody>
-      </p:sp>
-      <p:sp>
-        <p:nvSpPr>
-          <p:cNvPr id="3" name="Text 0"/>
-          <p:cNvSpPr/>
-          <p:nvPr>
-            <p:ph idx="101" type="body" hasCustomPrompt="1"/>
-          </p:nvPr>
-        </p:nvSpPr>
-        <p:spPr>
-          <a:xfrm>
-            <a:off x="548640" y="1005840"/>
-            <a:ext cx="11064240" cy="411480"/>
-          </a:xfrm>
-          <a:prstGeom prst="rect">
-            <a:avLst/>
-          </a:prstGeom>
-          <a:noFill/>
-          <a:ln/>
-        </p:spPr>
-        <p:txBody>
-          <a:bodyPr wrap="square" lIns="0" tIns="0" rIns="0" bIns="0" rtlCol="0" anchor="t"/>
-          <a:lstStyle/>
-          <a:p>
-            <a:pPr indent="0" marL="0">
-              <a:buNone/>
-            </a:pPr>
-            <a:r>
-              <a:rPr lang="en-US" sz="1500" dirty="0">
-                <a:solidFill>
-                  <a:schemeClr val="tx1"/>
-                </a:solidFill>
-              </a:rPr>
-              <a:t>What the map tells us about how our data works today</a:t>
-            </a:r>
-            <a:endParaRPr lang="en-US" sz="1500" dirty="0"/>
-          </a:p>
-        </p:txBody>
-      </p:sp>
-      <p:sp>
-        <p:nvSpPr>
-          <p:cNvPr id="4" name="message card 1"/>
-          <p:cNvSpPr/>
-          <p:nvPr/>
-        </p:nvSpPr>
-        <p:spPr>
-          <a:xfrm>
-            <a:off x="548640" y="1691640"/>
-            <a:ext cx="5394960" cy="2011680"/>
-          </a:xfrm>
-          <a:prstGeom prst="roundRect">
-            <a:avLst>
-              <a:gd name="adj" fmla="val 4545"/>
-            </a:avLst>
-          </a:prstGeom>
-          <a:solidFill>
-            <a:schemeClr val="bg2"/>
-          </a:solidFill>
-          <a:ln w="12700">
-            <a:solidFill>
-              <a:schemeClr val="bg2"/>
-            </a:solidFill>
-            <a:prstDash val="solid"/>
-          </a:ln>
-        </p:spPr>
-      </p:sp>
-      <p:sp>
-        <p:nvSpPr>
-          <p:cNvPr id="5" name="message dot 1"/>
-          <p:cNvSpPr/>
-          <p:nvPr/>
-        </p:nvSpPr>
-        <p:spPr>
-          <a:xfrm>
-            <a:off x="822960" y="1984248"/>
-            <a:ext cx="457200" cy="457200"/>
-          </a:xfrm>
-          <a:prstGeom prst="ellipse">
-            <a:avLst/>
-          </a:prstGeom>
-          <a:solidFill>
-            <a:schemeClr val="accent1"/>
-          </a:solidFill>
-          <a:ln w="12700">
-            <a:solidFill>
-              <a:schemeClr val="accent1"/>
-            </a:solidFill>
-            <a:prstDash val="solid"/>
-          </a:ln>
-        </p:spPr>
-      </p:sp>
-      <p:sp>
-        <p:nvSpPr>
-          <p:cNvPr id="6" name="Text 4"/>
-          <p:cNvSpPr txBox="1"/>
-          <p:nvPr/>
-        </p:nvSpPr>
-        <p:spPr>
-          <a:xfrm>
-            <a:off x="822960" y="1984248"/>
-            <a:ext cx="457200" cy="457200"/>
-          </a:xfrm>
-          <a:prstGeom prst="rect">
-            <a:avLst/>
-          </a:prstGeom>
-          <a:noFill/>
-          <a:ln/>
-        </p:spPr>
-        <p:txBody>
-          <a:bodyPr wrap="square" lIns="0" tIns="0" rIns="0" bIns="0" rtlCol="0" anchor="ctr"/>
-          <a:lstStyle/>
-          <a:p>
-            <a:pPr algn="ctr" indent="0" marL="0">
-              <a:buNone/>
-            </a:pPr>
-            <a:r>
-              <a:rPr lang="en-US" sz="1500" b="1" dirty="0">
-                <a:solidFill>
-                  <a:schemeClr val="bg1"/>
-                </a:solidFill>
-              </a:rPr>
-              <a:t>1</a:t>
-            </a:r>
-            <a:endParaRPr lang="en-US" sz="1500" dirty="0"/>
-          </a:p>
-        </p:txBody>
-      </p:sp>
-      <p:sp>
-        <p:nvSpPr>
-          <p:cNvPr id="7" name="Text 5"/>
-          <p:cNvSpPr txBox="1"/>
-          <p:nvPr/>
-        </p:nvSpPr>
-        <p:spPr>
-          <a:xfrm>
-            <a:off x="1463040" y="1965960"/>
-            <a:ext cx="4297680" cy="502920"/>
-          </a:xfrm>
-          <a:prstGeom prst="rect">
-            <a:avLst/>
-          </a:prstGeom>
-          <a:noFill/>
-          <a:ln/>
-        </p:spPr>
-        <p:txBody>
-          <a:bodyPr wrap="square" lIns="0" tIns="0" rIns="0" bIns="0" rtlCol="0" anchor="ctr"/>
-          <a:lstStyle/>
-          <a:p>
-            <a:pPr indent="0" marL="0">
-              <a:buNone/>
-            </a:pPr>
-            <a:r>
-              <a:rPr lang="en-US" sz="1800" b="1" dirty="0">
-                <a:solidFill>
-                  <a:schemeClr val="tx2"/>
-                </a:solidFill>
-              </a:rPr>
-              <a:t>UnitE is the backbone</a:t>
-            </a:r>
-            <a:endParaRPr lang="en-US" sz="1800" dirty="0"/>
-          </a:p>
-        </p:txBody>
-      </p:sp>
-      <p:sp>
-        <p:nvSpPr>
-          <p:cNvPr id="8" name="Text 6"/>
-          <p:cNvSpPr txBox="1"/>
-          <p:nvPr/>
-        </p:nvSpPr>
-        <p:spPr>
-          <a:xfrm>
-            <a:off x="1463040" y="2560320"/>
-            <a:ext cx="4297680" cy="1005840"/>
-          </a:xfrm>
-          <a:prstGeom prst="rect">
-            <a:avLst/>
-          </a:prstGeom>
-          <a:noFill/>
-          <a:ln/>
-        </p:spPr>
-        <p:txBody>
-          <a:bodyPr wrap="square" lIns="0" tIns="0" rIns="0" bIns="0" rtlCol="0" anchor="t"/>
-          <a:lstStyle/>
-          <a:p>
-            <a:pPr indent="0" marL="0">
-              <a:buNone/>
-            </a:pPr>
-            <a:r>
-              <a:rPr lang="en-US" sz="1400" dirty="0">
-                <a:solidFill>
-                  <a:schemeClr val="tx1"/>
-                </a:solidFill>
-              </a:rPr>
-              <a:t>Nearly every student system syncs with UnitE. Keeping it accurate keeps everything downstream accurate.</a:t>
-            </a:r>
-            <a:endParaRPr lang="en-US" sz="1400" dirty="0"/>
-          </a:p>
-        </p:txBody>
-      </p:sp>
-      <p:sp>
-        <p:nvSpPr>
-          <p:cNvPr id="9" name="message card 2"/>
-          <p:cNvSpPr/>
-          <p:nvPr/>
-        </p:nvSpPr>
-        <p:spPr>
-          <a:xfrm>
-            <a:off x="6217920" y="1691640"/>
-            <a:ext cx="5394960" cy="2011680"/>
-          </a:xfrm>
-          <a:prstGeom prst="roundRect">
-            <a:avLst>
-              <a:gd name="adj" fmla="val 4545"/>
-            </a:avLst>
-          </a:prstGeom>
-          <a:solidFill>
-            <a:schemeClr val="bg2"/>
-          </a:solidFill>
-          <a:ln w="12700">
-            <a:solidFill>
-              <a:schemeClr val="bg2"/>
-            </a:solidFill>
-            <a:prstDash val="solid"/>
-          </a:ln>
-        </p:spPr>
-      </p:sp>
-      <p:sp>
-        <p:nvSpPr>
-          <p:cNvPr id="10" name="message dot 2"/>
-          <p:cNvSpPr/>
-          <p:nvPr/>
-        </p:nvSpPr>
-        <p:spPr>
-          <a:xfrm>
-            <a:off x="6492240" y="1984248"/>
-            <a:ext cx="457200" cy="457200"/>
-          </a:xfrm>
-          <a:prstGeom prst="ellipse">
-            <a:avLst/>
-          </a:prstGeom>
-          <a:solidFill>
-            <a:schemeClr val="accent3"/>
-          </a:solidFill>
-          <a:ln w="12700">
-            <a:solidFill>
-              <a:schemeClr val="accent3"/>
-            </a:solidFill>
-            <a:prstDash val="solid"/>
-          </a:ln>
-        </p:spPr>
-      </p:sp>
-      <p:sp>
-        <p:nvSpPr>
-          <p:cNvPr id="11" name="Text 9"/>
-          <p:cNvSpPr txBox="1"/>
-          <p:nvPr/>
-        </p:nvSpPr>
-        <p:spPr>
-          <a:xfrm>
-            <a:off x="6492240" y="1984248"/>
-            <a:ext cx="457200" cy="457200"/>
-          </a:xfrm>
-          <a:prstGeom prst="rect">
-            <a:avLst/>
-          </a:prstGeom>
-          <a:noFill/>
-          <a:ln/>
-        </p:spPr>
-        <p:txBody>
-          <a:bodyPr wrap="square" lIns="0" tIns="0" rIns="0" bIns="0" rtlCol="0" anchor="ctr"/>
-          <a:lstStyle/>
-          <a:p>
-            <a:pPr algn="ctr" indent="0" marL="0">
-              <a:buNone/>
-            </a:pPr>
-            <a:r>
-              <a:rPr lang="en-US" sz="1500" b="1" dirty="0">
-                <a:solidFill>
-                  <a:schemeClr val="bg1"/>
-                </a:solidFill>
-              </a:rPr>
-              <a:t>2</a:t>
-            </a:r>
-            <a:endParaRPr lang="en-US" sz="1500" dirty="0"/>
-          </a:p>
-        </p:txBody>
-      </p:sp>
-      <p:sp>
-        <p:nvSpPr>
-          <p:cNvPr id="12" name="Text 10"/>
-          <p:cNvSpPr txBox="1"/>
-          <p:nvPr/>
-        </p:nvSpPr>
-        <p:spPr>
-          <a:xfrm>
-            <a:off x="7132320" y="1965960"/>
-            <a:ext cx="4297680" cy="502920"/>
-          </a:xfrm>
-          <a:prstGeom prst="rect">
-            <a:avLst/>
-          </a:prstGeom>
-          <a:noFill/>
-          <a:ln/>
-        </p:spPr>
-        <p:txBody>
-          <a:bodyPr wrap="square" lIns="0" tIns="0" rIns="0" bIns="0" rtlCol="0" anchor="ctr"/>
-          <a:lstStyle/>
-          <a:p>
-            <a:pPr indent="0" marL="0">
-              <a:buNone/>
-            </a:pPr>
-            <a:r>
-              <a:rPr lang="en-US" sz="1800" b="1" dirty="0">
-                <a:solidFill>
-                  <a:schemeClr val="tx2"/>
-                </a:solidFill>
-              </a:rPr>
-              <a:t>Data flows out well, but not back in</a:t>
-            </a:r>
-            <a:endParaRPr lang="en-US" sz="1800" dirty="0"/>
-          </a:p>
-        </p:txBody>
-      </p:sp>
-      <p:sp>
-        <p:nvSpPr>
-          <p:cNvPr id="13" name="Text 11"/>
-          <p:cNvSpPr txBox="1"/>
-          <p:nvPr/>
-        </p:nvSpPr>
-        <p:spPr>
-          <a:xfrm>
-            <a:off x="7132320" y="2560320"/>
-            <a:ext cx="4297680" cy="1005840"/>
-          </a:xfrm>
-          <a:prstGeom prst="rect">
-            <a:avLst/>
-          </a:prstGeom>
-          <a:noFill/>
-          <a:ln/>
-        </p:spPr>
-        <p:txBody>
-          <a:bodyPr wrap="square" lIns="0" tIns="0" rIns="0" bIns="0" rtlCol="0" anchor="t"/>
-          <a:lstStyle/>
-          <a:p>
-            <a:pPr indent="0" marL="0">
-              <a:buNone/>
-            </a:pPr>
-            <a:r>
-              <a:rPr lang="en-US" sz="1400" dirty="0">
-                <a:solidFill>
-                  <a:schemeClr val="tx1"/>
-                </a:solidFill>
-              </a:rPr>
-              <a:t>UnitE sends data out automatically. Most return routes into UnitE are still manual.</a:t>
-            </a:r>
-            <a:endParaRPr lang="en-US" sz="1400" dirty="0"/>
-          </a:p>
-        </p:txBody>
-      </p:sp>
-      <p:sp>
-        <p:nvSpPr>
-          <p:cNvPr id="14" name="message card 3"/>
-          <p:cNvSpPr/>
-          <p:nvPr/>
-        </p:nvSpPr>
-        <p:spPr>
-          <a:xfrm>
-            <a:off x="548640" y="3977640"/>
-            <a:ext cx="5394960" cy="2011680"/>
-          </a:xfrm>
-          <a:prstGeom prst="roundRect">
-            <a:avLst>
-              <a:gd name="adj" fmla="val 4545"/>
-            </a:avLst>
-          </a:prstGeom>
-          <a:solidFill>
-            <a:schemeClr val="bg2"/>
-          </a:solidFill>
-          <a:ln w="12700">
-            <a:solidFill>
-              <a:schemeClr val="bg2"/>
-            </a:solidFill>
-            <a:prstDash val="solid"/>
-          </a:ln>
-        </p:spPr>
-      </p:sp>
-      <p:sp>
-        <p:nvSpPr>
-          <p:cNvPr id="15" name="message dot 3"/>
-          <p:cNvSpPr/>
-          <p:nvPr/>
-        </p:nvSpPr>
-        <p:spPr>
-          <a:xfrm>
-            <a:off x="822960" y="4270248"/>
-            <a:ext cx="457200" cy="457200"/>
-          </a:xfrm>
-          <a:prstGeom prst="ellipse">
-            <a:avLst/>
-          </a:prstGeom>
-          <a:solidFill>
-            <a:schemeClr val="accent4"/>
-          </a:solidFill>
-          <a:ln w="12700">
-            <a:solidFill>
-              <a:schemeClr val="accent4"/>
-            </a:solidFill>
-            <a:prstDash val="solid"/>
-          </a:ln>
-        </p:spPr>
-      </p:sp>
-      <p:sp>
-        <p:nvSpPr>
-          <p:cNvPr id="16" name="Text 14"/>
-          <p:cNvSpPr txBox="1"/>
-          <p:nvPr/>
-        </p:nvSpPr>
-        <p:spPr>
-          <a:xfrm>
-            <a:off x="822960" y="4270248"/>
-            <a:ext cx="457200" cy="457200"/>
-          </a:xfrm>
-          <a:prstGeom prst="rect">
-            <a:avLst/>
-          </a:prstGeom>
-          <a:noFill/>
-          <a:ln/>
-        </p:spPr>
-        <p:txBody>
-          <a:bodyPr wrap="square" lIns="0" tIns="0" rIns="0" bIns="0" rtlCol="0" anchor="ctr"/>
-          <a:lstStyle/>
-          <a:p>
-            <a:pPr algn="ctr" indent="0" marL="0">
-              <a:buNone/>
-            </a:pPr>
-            <a:r>
-              <a:rPr lang="en-US" sz="1500" b="1" dirty="0">
-                <a:solidFill>
-                  <a:schemeClr val="bg1"/>
-                </a:solidFill>
-              </a:rPr>
-              <a:t>3</a:t>
-            </a:r>
-            <a:endParaRPr lang="en-US" sz="1500" dirty="0"/>
-          </a:p>
-        </p:txBody>
-      </p:sp>
-      <p:sp>
-        <p:nvSpPr>
-          <p:cNvPr id="17" name="Text 15"/>
-          <p:cNvSpPr txBox="1"/>
-          <p:nvPr/>
-        </p:nvSpPr>
-        <p:spPr>
-          <a:xfrm>
-            <a:off x="1463040" y="4251960"/>
-            <a:ext cx="4297680" cy="502920"/>
-          </a:xfrm>
-          <a:prstGeom prst="rect">
-            <a:avLst/>
-          </a:prstGeom>
-          <a:noFill/>
-          <a:ln/>
-        </p:spPr>
-        <p:txBody>
-          <a:bodyPr wrap="square" lIns="0" tIns="0" rIns="0" bIns="0" rtlCol="0" anchor="ctr"/>
-          <a:lstStyle/>
-          <a:p>
-            <a:pPr indent="0" marL="0">
-              <a:buNone/>
-            </a:pPr>
-            <a:r>
-              <a:rPr lang="en-US" sz="1800" b="1" dirty="0">
-                <a:solidFill>
-                  <a:schemeClr val="tx2"/>
-                </a:solidFill>
-              </a:rPr>
-              <a:t>Reporting already has one front door</a:t>
-            </a:r>
-            <a:endParaRPr lang="en-US" sz="1800" dirty="0"/>
-          </a:p>
-        </p:txBody>
-      </p:sp>
-      <p:sp>
-        <p:nvSpPr>
-          <p:cNvPr id="18" name="Text 16"/>
-          <p:cNvSpPr txBox="1"/>
-          <p:nvPr/>
-        </p:nvSpPr>
-        <p:spPr>
-          <a:xfrm>
-            <a:off x="1463040" y="4846320"/>
-            <a:ext cx="4297680" cy="1005840"/>
-          </a:xfrm>
-          <a:prstGeom prst="rect">
-            <a:avLst/>
-          </a:prstGeom>
-          <a:noFill/>
-          <a:ln/>
-        </p:spPr>
-        <p:txBody>
-          <a:bodyPr wrap="square" lIns="0" tIns="0" rIns="0" bIns="0" rtlCol="0" anchor="t"/>
-          <a:lstStyle/>
-          <a:p>
-            <a:pPr indent="0" marL="0">
-              <a:buNone/>
-            </a:pPr>
-            <a:r>
-              <a:rPr lang="en-US" sz="1400" dirty="0">
-                <a:solidFill>
-                  <a:schemeClr val="tx1"/>
-                </a:solidFill>
-              </a:rPr>
-              <a:t>Five core systems feed Power BI through one SQL Server connector. A few side routes still bypass it.</a:t>
-            </a:r>
-            <a:endParaRPr lang="en-US" sz="1400" dirty="0"/>
-          </a:p>
-        </p:txBody>
-      </p:sp>
-      <p:sp>
-        <p:nvSpPr>
-          <p:cNvPr id="19" name="message card 4"/>
-          <p:cNvSpPr/>
-          <p:nvPr/>
-        </p:nvSpPr>
-        <p:spPr>
-          <a:xfrm>
-            <a:off x="6217920" y="3977640"/>
-            <a:ext cx="5394960" cy="2011680"/>
-          </a:xfrm>
-          <a:prstGeom prst="roundRect">
-            <a:avLst>
-              <a:gd name="adj" fmla="val 4545"/>
-            </a:avLst>
-          </a:prstGeom>
-          <a:solidFill>
-            <a:schemeClr val="bg2"/>
-          </a:solidFill>
-          <a:ln w="12700">
-            <a:solidFill>
-              <a:schemeClr val="bg2"/>
-            </a:solidFill>
-            <a:prstDash val="solid"/>
-          </a:ln>
-        </p:spPr>
-      </p:sp>
-      <p:sp>
-        <p:nvSpPr>
-          <p:cNvPr id="20" name="message dot 4"/>
-          <p:cNvSpPr/>
-          <p:nvPr/>
-        </p:nvSpPr>
-        <p:spPr>
-          <a:xfrm>
-            <a:off x="6492240" y="4270248"/>
-            <a:ext cx="457200" cy="457200"/>
-          </a:xfrm>
-          <a:prstGeom prst="ellipse">
-            <a:avLst/>
-          </a:prstGeom>
-          <a:solidFill>
-            <a:schemeClr val="accent2"/>
-          </a:solidFill>
-          <a:ln w="12700">
-            <a:solidFill>
-              <a:schemeClr val="accent2"/>
-            </a:solidFill>
-            <a:prstDash val="solid"/>
-          </a:ln>
-        </p:spPr>
-      </p:sp>
-      <p:sp>
-        <p:nvSpPr>
-          <p:cNvPr id="21" name="Text 19"/>
-          <p:cNvSpPr txBox="1"/>
-          <p:nvPr/>
-        </p:nvSpPr>
-        <p:spPr>
-          <a:xfrm>
-            <a:off x="6492240" y="4270248"/>
-            <a:ext cx="457200" cy="457200"/>
-          </a:xfrm>
-          <a:prstGeom prst="rect">
-            <a:avLst/>
-          </a:prstGeom>
-          <a:noFill/>
-          <a:ln/>
-        </p:spPr>
-        <p:txBody>
-          <a:bodyPr wrap="square" lIns="0" tIns="0" rIns="0" bIns="0" rtlCol="0" anchor="ctr"/>
-          <a:lstStyle/>
-          <a:p>
-            <a:pPr algn="ctr" indent="0" marL="0">
-              <a:buNone/>
-            </a:pPr>
-            <a:r>
-              <a:rPr lang="en-US" sz="1500" b="1" dirty="0">
-                <a:solidFill>
-                  <a:schemeClr val="bg1"/>
-                </a:solidFill>
-              </a:rPr>
-              <a:t>4</a:t>
-            </a:r>
-            <a:endParaRPr lang="en-US" sz="1500" dirty="0"/>
-          </a:p>
-        </p:txBody>
-      </p:sp>
-      <p:sp>
-        <p:nvSpPr>
-          <p:cNvPr id="22" name="Text 20"/>
-          <p:cNvSpPr txBox="1"/>
-          <p:nvPr/>
-        </p:nvSpPr>
-        <p:spPr>
-          <a:xfrm>
-            <a:off x="7132320" y="4251960"/>
-            <a:ext cx="4297680" cy="502920"/>
-          </a:xfrm>
-          <a:prstGeom prst="rect">
-            <a:avLst/>
-          </a:prstGeom>
-          <a:noFill/>
-          <a:ln/>
-        </p:spPr>
-        <p:txBody>
-          <a:bodyPr wrap="square" lIns="0" tIns="0" rIns="0" bIns="0" rtlCol="0" anchor="ctr"/>
-          <a:lstStyle/>
-          <a:p>
-            <a:pPr indent="0" marL="0">
-              <a:buNone/>
-            </a:pPr>
-            <a:r>
-              <a:rPr lang="en-US" sz="1800" b="1" dirty="0">
-                <a:solidFill>
-                  <a:schemeClr val="tx2"/>
-                </a:solidFill>
-              </a:rPr>
-              <a:t>The wider estate is large</a:t>
-            </a:r>
-            <a:endParaRPr lang="en-US" sz="1800" dirty="0"/>
-          </a:p>
-        </p:txBody>
-      </p:sp>
-      <p:sp>
-        <p:nvSpPr>
-          <p:cNvPr id="23" name="Text 21"/>
-          <p:cNvSpPr txBox="1"/>
-          <p:nvPr/>
-        </p:nvSpPr>
-        <p:spPr>
-          <a:xfrm>
-            <a:off x="7132320" y="4846320"/>
-            <a:ext cx="4297680" cy="1005840"/>
-          </a:xfrm>
-          <a:prstGeom prst="rect">
-            <a:avLst/>
-          </a:prstGeom>
-          <a:noFill/>
-          <a:ln/>
-        </p:spPr>
-        <p:txBody>
-          <a:bodyPr wrap="square" lIns="0" tIns="0" rIns="0" bIns="0" rtlCol="0" anchor="t"/>
-          <a:lstStyle/>
-          <a:p>
-            <a:pPr indent="0" marL="0">
-              <a:buNone/>
-            </a:pPr>
-            <a:r>
-              <a:rPr lang="en-US" sz="1400" dirty="0">
-                <a:solidFill>
-                  <a:schemeClr val="tx1"/>
-                </a:solidFill>
-              </a:rPr>
-              <a:t>209 systems across 12 areas. Many sit outside the student system and are not yet connected.</a:t>
-            </a:r>
-            <a:endParaRPr lang="en-US" sz="1400" dirty="0"/>
-          </a:p>
-        </p:txBody>
-      </p:sp>
-      <p:sp>
-        <p:nvSpPr>
-          <p:cNvPr id="25" name="Slide Number Placeholder 0"/>
-          <p:cNvSpPr>
-            <a:spLocks noGrp="1"/>
-          </p:cNvSpPr>
-          <p:nvPr>
-            <p:ph type="sldNum" sz="quarter" idx="4294967295"/>
-          </p:nvPr>
-        </p:nvSpPr>
-        <p:spPr>
-          <a:xfrm>
-            <a:off x="11247120" y="6446520"/>
-            <a:ext cx="457200" cy="274320"/>
-          </a:xfrm>
-          <a:prstGeom prst="rect">
-            <a:avLst/>
-          </a:prstGeom>
-          <a:extLst>
-            <a:ext uri="{C572A759-6A51-4108-AA02-DFA0A04FC94B}">
-              <ma14:wrappingTextBoxFlag xmlns:ma14="http://schemas.microsoft.com/office/mac/drawingml/2011/main" val="0"/>
-            </a:ext>
-          </a:extLst>
-        </p:spPr>
-        <p:txBody>
-          <a:bodyPr/>
-          <a:lstStyle>
-            <a:lvl1pPr>
-              <a:defRPr sz="1000">
-                <a:solidFill>
-                  <a:srgbClr val="6B6F80"/>
-                </a:solidFill>
-              </a:defRPr>
-            </a:lvl1pPr>
-          </a:lstStyle>
-          <a:p>
-            <a:pPr algn="r"/>
-            <a:fld id="{F7021451-1387-4CA6-816F-3879F97B5CBC}" type="slidenum">
-              <a:rPr b="0" lang="en-US"/>
               <a:t>9</a:t>
             </a:fld>
             <a:endParaRPr lang="en-US"/>
